--- a/class_plan/vibe_coding_workshop.pptx
+++ b/class_plan/vibe_coding_workshop.pptx
@@ -359,7 +359,7 @@
           <a:p>
             <a:fld id="{5BCAD085-E8A6-8845-BD4E-CB4CCA059FC4}" type="datetimeFigureOut">
               <a:rPr lang="en-US" smtClean="0"/>
-              <a:t>4/22/2026</a:t>
+              <a:t>5/3/2026</a:t>
             </a:fld>
             <a:endParaRPr lang="en-US"/>
           </a:p>
@@ -527,7 +527,7 @@
           <a:p>
             <a:fld id="{5BCAD085-E8A6-8845-BD4E-CB4CCA059FC4}" type="datetimeFigureOut">
               <a:rPr lang="en-US" smtClean="0"/>
-              <a:t>4/22/2026</a:t>
+              <a:t>5/3/2026</a:t>
             </a:fld>
             <a:endParaRPr lang="en-US"/>
           </a:p>
@@ -705,7 +705,7 @@
           <a:p>
             <a:fld id="{5BCAD085-E8A6-8845-BD4E-CB4CCA059FC4}" type="datetimeFigureOut">
               <a:rPr lang="en-US" smtClean="0"/>
-              <a:t>4/22/2026</a:t>
+              <a:t>5/3/2026</a:t>
             </a:fld>
             <a:endParaRPr lang="en-US"/>
           </a:p>
@@ -873,7 +873,7 @@
           <a:p>
             <a:fld id="{5BCAD085-E8A6-8845-BD4E-CB4CCA059FC4}" type="datetimeFigureOut">
               <a:rPr lang="en-US" smtClean="0"/>
-              <a:t>4/22/2026</a:t>
+              <a:t>5/3/2026</a:t>
             </a:fld>
             <a:endParaRPr lang="en-US"/>
           </a:p>
@@ -1118,7 +1118,7 @@
           <a:p>
             <a:fld id="{5BCAD085-E8A6-8845-BD4E-CB4CCA059FC4}" type="datetimeFigureOut">
               <a:rPr lang="en-US" smtClean="0"/>
-              <a:t>4/22/2026</a:t>
+              <a:t>5/3/2026</a:t>
             </a:fld>
             <a:endParaRPr lang="en-US"/>
           </a:p>
@@ -1403,7 +1403,7 @@
           <a:p>
             <a:fld id="{5BCAD085-E8A6-8845-BD4E-CB4CCA059FC4}" type="datetimeFigureOut">
               <a:rPr lang="en-US" smtClean="0"/>
-              <a:t>4/22/2026</a:t>
+              <a:t>5/3/2026</a:t>
             </a:fld>
             <a:endParaRPr lang="en-US"/>
           </a:p>
@@ -1822,7 +1822,7 @@
           <a:p>
             <a:fld id="{5BCAD085-E8A6-8845-BD4E-CB4CCA059FC4}" type="datetimeFigureOut">
               <a:rPr lang="en-US" smtClean="0"/>
-              <a:t>4/22/2026</a:t>
+              <a:t>5/3/2026</a:t>
             </a:fld>
             <a:endParaRPr lang="en-US"/>
           </a:p>
@@ -1939,7 +1939,7 @@
           <a:p>
             <a:fld id="{5BCAD085-E8A6-8845-BD4E-CB4CCA059FC4}" type="datetimeFigureOut">
               <a:rPr lang="en-US" smtClean="0"/>
-              <a:t>4/22/2026</a:t>
+              <a:t>5/3/2026</a:t>
             </a:fld>
             <a:endParaRPr lang="en-US"/>
           </a:p>
@@ -2034,7 +2034,7 @@
           <a:p>
             <a:fld id="{5BCAD085-E8A6-8845-BD4E-CB4CCA059FC4}" type="datetimeFigureOut">
               <a:rPr lang="en-US" smtClean="0"/>
-              <a:t>4/22/2026</a:t>
+              <a:t>5/3/2026</a:t>
             </a:fld>
             <a:endParaRPr lang="en-US"/>
           </a:p>
@@ -2309,7 +2309,7 @@
           <a:p>
             <a:fld id="{5BCAD085-E8A6-8845-BD4E-CB4CCA059FC4}" type="datetimeFigureOut">
               <a:rPr lang="en-US" smtClean="0"/>
-              <a:t>4/22/2026</a:t>
+              <a:t>5/3/2026</a:t>
             </a:fld>
             <a:endParaRPr lang="en-US"/>
           </a:p>
@@ -2561,7 +2561,7 @@
           <a:p>
             <a:fld id="{5BCAD085-E8A6-8845-BD4E-CB4CCA059FC4}" type="datetimeFigureOut">
               <a:rPr lang="en-US" smtClean="0"/>
-              <a:t>4/22/2026</a:t>
+              <a:t>5/3/2026</a:t>
             </a:fld>
             <a:endParaRPr lang="en-US"/>
           </a:p>
@@ -2772,7 +2772,7 @@
           <a:p>
             <a:fld id="{5BCAD085-E8A6-8845-BD4E-CB4CCA059FC4}" type="datetimeFigureOut">
               <a:rPr lang="en-US" smtClean="0"/>
-              <a:t>4/22/2026</a:t>
+              <a:t>5/3/2026</a:t>
             </a:fld>
             <a:endParaRPr lang="en-US"/>
           </a:p>
@@ -4138,32 +4138,59 @@
         <p:spPr>
           <a:xfrm>
             <a:off x="731520" y="1920240"/>
-            <a:ext cx="10698480" cy="365760"/>
-          </a:xfrm>
-          <a:prstGeom prst="rect">
-            <a:avLst/>
-          </a:prstGeom>
-          <a:noFill/>
-        </p:spPr>
-        <p:txBody>
-          <a:bodyPr wrap="square" lIns="45720" tIns="18288" rIns="45720" bIns="18288" anchor="t">
-            <a:spAutoFit/>
-          </a:bodyPr>
-          <a:lstStyle/>
-          <a:p>
-            <a:pPr algn="l">
-              <a:lnSpc>
-                <a:spcPct val="135000"/>
-              </a:lnSpc>
-            </a:pPr>
-            <a:r>
-              <a:rPr sz="1400" b="0" spc="150">
+            <a:ext cx="10698480" cy="300210"/>
+          </a:xfrm>
+          <a:prstGeom prst="rect">
+            <a:avLst/>
+          </a:prstGeom>
+          <a:noFill/>
+        </p:spPr>
+        <p:txBody>
+          <a:bodyPr wrap="square" lIns="45720" tIns="18288" rIns="45720" bIns="18288" anchor="t">
+            <a:spAutoFit/>
+          </a:bodyPr>
+          <a:lstStyle/>
+          <a:p>
+            <a:pPr algn="l">
+              <a:lnSpc>
+                <a:spcPct val="135000"/>
+              </a:lnSpc>
+            </a:pPr>
+            <a:r>
+              <a:rPr sz="1400" b="0" spc="150" dirty="0" err="1">
                 <a:solidFill>
                   <a:srgbClr val="8A8A8A"/>
                 </a:solidFill>
                 <a:latin typeface="Consolas"/>
               </a:rPr>
-              <a:t>複製貼上到 ChatGPT / Claude</a:t>
+              <a:t>複製貼上到</a:t>
+            </a:r>
+            <a:r>
+              <a:rPr sz="1400" b="0" spc="150" dirty="0">
+                <a:solidFill>
+                  <a:srgbClr val="8A8A8A"/>
+                </a:solidFill>
+                <a:latin typeface="Consolas"/>
+              </a:rPr>
+              <a:t> </a:t>
+            </a:r>
+            <a:r>
+              <a:rPr lang="en-US" sz="1400" b="0" spc="150" dirty="0">
+                <a:solidFill>
+                  <a:srgbClr val="8A8A8A"/>
+                </a:solidFill>
+                <a:latin typeface="Consolas"/>
+              </a:rPr>
+              <a:t>Gemini / </a:t>
+            </a:r>
+            <a:r>
+              <a:rPr sz="1400" b="0" spc="150" dirty="0">
+                <a:solidFill>
+                  <a:srgbClr val="8A8A8A"/>
+                </a:solidFill>
+                <a:latin typeface="Consolas"/>
+              </a:rPr>
+              <a:t>ChatGPT / Claude</a:t>
             </a:r>
           </a:p>
         </p:txBody>
@@ -4217,13 +4244,40 @@
               </a:lnSpc>
             </a:pPr>
             <a:r>
-              <a:rPr sz="1300">
+              <a:rPr sz="1300" dirty="0" err="1">
                 <a:solidFill>
                   <a:srgbClr val="111111"/>
                 </a:solidFill>
                 <a:latin typeface="Consolas"/>
               </a:rPr>
-              <a:t>你是一位痛點結構化教練。我腦中有一些模糊的工作 / 生活痛點。</a:t>
+              <a:t>你是一位痛點結構化教練。我腦中有一些模糊的工作</a:t>
+            </a:r>
+            <a:r>
+              <a:rPr sz="1300" dirty="0">
+                <a:solidFill>
+                  <a:srgbClr val="111111"/>
+                </a:solidFill>
+                <a:latin typeface="Consolas"/>
+              </a:rPr>
+              <a:t> / </a:t>
+            </a:r>
+            <a:r>
+              <a:rPr sz="1300" dirty="0" err="1">
+                <a:solidFill>
+                  <a:srgbClr val="111111"/>
+                </a:solidFill>
+                <a:latin typeface="Consolas"/>
+              </a:rPr>
+              <a:t>生活痛點</a:t>
+            </a:r>
+            <a:r>
+              <a:rPr sz="1300" dirty="0">
+                <a:solidFill>
+                  <a:srgbClr val="111111"/>
+                </a:solidFill>
+                <a:latin typeface="Consolas"/>
+              </a:rPr>
+              <a:t>。</a:t>
             </a:r>
           </a:p>
           <a:p>
@@ -4232,7 +4286,7 @@
                 <a:spcPct val="130000"/>
               </a:lnSpc>
             </a:pPr>
-            <a:endParaRPr sz="1300">
+            <a:endParaRPr sz="1300" dirty="0">
               <a:solidFill>
                 <a:srgbClr val="111111"/>
               </a:solidFill>
@@ -4246,13 +4300,40 @@
               </a:lnSpc>
             </a:pPr>
             <a:r>
-              <a:rPr sz="1300">
+              <a:rPr sz="1300" dirty="0" err="1">
                 <a:solidFill>
                   <a:srgbClr val="111111"/>
                 </a:solidFill>
                 <a:latin typeface="Consolas"/>
               </a:rPr>
-              <a:t>請用蘇格拉底式提問（一次一題）引導我整理出 3 個具體痛點，</a:t>
+              <a:t>請用蘇格拉底式提問（一次一題）引導我整理出</a:t>
+            </a:r>
+            <a:r>
+              <a:rPr sz="1300" dirty="0">
+                <a:solidFill>
+                  <a:srgbClr val="111111"/>
+                </a:solidFill>
+                <a:latin typeface="Consolas"/>
+              </a:rPr>
+              <a:t> 3 </a:t>
+            </a:r>
+            <a:r>
+              <a:rPr sz="1300" dirty="0" err="1">
+                <a:solidFill>
+                  <a:srgbClr val="111111"/>
+                </a:solidFill>
+                <a:latin typeface="Consolas"/>
+              </a:rPr>
+              <a:t>個具體痛點</a:t>
+            </a:r>
+            <a:r>
+              <a:rPr sz="1300" dirty="0">
+                <a:solidFill>
+                  <a:srgbClr val="111111"/>
+                </a:solidFill>
+                <a:latin typeface="Consolas"/>
+              </a:rPr>
+              <a:t>，</a:t>
             </a:r>
           </a:p>
           <a:p>
@@ -4262,13 +4343,22 @@
               </a:lnSpc>
             </a:pPr>
             <a:r>
-              <a:rPr sz="1300">
+              <a:rPr sz="1300" dirty="0" err="1">
                 <a:solidFill>
                   <a:srgbClr val="111111"/>
                 </a:solidFill>
                 <a:latin typeface="Consolas"/>
               </a:rPr>
-              <a:t>每個痛點包含：</a:t>
+              <a:t>每個痛點包含</a:t>
+            </a:r>
+            <a:r>
+              <a:rPr sz="1300" dirty="0">
+                <a:solidFill>
+                  <a:srgbClr val="111111"/>
+                </a:solidFill>
+                <a:latin typeface="Consolas"/>
+              </a:rPr>
+              <a:t>：</a:t>
             </a:r>
           </a:p>
           <a:p>
@@ -4278,13 +4368,31 @@
               </a:lnSpc>
             </a:pPr>
             <a:r>
-              <a:rPr sz="1300">
+              <a:rPr sz="1300" dirty="0">
                 <a:solidFill>
                   <a:srgbClr val="111111"/>
                 </a:solidFill>
                 <a:latin typeface="Consolas"/>
               </a:rPr>
-              <a:t>  - 誰遇到（具體的人）</a:t>
+              <a:t>  - </a:t>
+            </a:r>
+            <a:r>
+              <a:rPr sz="1300" dirty="0" err="1">
+                <a:solidFill>
+                  <a:srgbClr val="111111"/>
+                </a:solidFill>
+                <a:latin typeface="Consolas"/>
+              </a:rPr>
+              <a:t>誰遇到（具體的人</a:t>
+            </a:r>
+            <a:r>
+              <a:rPr sz="1300" dirty="0">
+                <a:solidFill>
+                  <a:srgbClr val="111111"/>
+                </a:solidFill>
+                <a:latin typeface="Consolas"/>
+              </a:rPr>
+              <a:t>）</a:t>
             </a:r>
           </a:p>
           <a:p>
@@ -4294,13 +4402,31 @@
               </a:lnSpc>
             </a:pPr>
             <a:r>
-              <a:rPr sz="1300">
+              <a:rPr sz="1300" dirty="0">
                 <a:solidFill>
                   <a:srgbClr val="111111"/>
                 </a:solidFill>
                 <a:latin typeface="Consolas"/>
               </a:rPr>
-              <a:t>  - 情境（什麼時候）</a:t>
+              <a:t>  - </a:t>
+            </a:r>
+            <a:r>
+              <a:rPr sz="1300" dirty="0" err="1">
+                <a:solidFill>
+                  <a:srgbClr val="111111"/>
+                </a:solidFill>
+                <a:latin typeface="Consolas"/>
+              </a:rPr>
+              <a:t>情境（什麼時候</a:t>
+            </a:r>
+            <a:r>
+              <a:rPr sz="1300" dirty="0">
+                <a:solidFill>
+                  <a:srgbClr val="111111"/>
+                </a:solidFill>
+                <a:latin typeface="Consolas"/>
+              </a:rPr>
+              <a:t>）</a:t>
             </a:r>
           </a:p>
           <a:p>
@@ -4310,13 +4436,31 @@
               </a:lnSpc>
             </a:pPr>
             <a:r>
-              <a:rPr sz="1300">
+              <a:rPr sz="1300" dirty="0">
                 <a:solidFill>
                   <a:srgbClr val="111111"/>
                 </a:solidFill>
                 <a:latin typeface="Consolas"/>
               </a:rPr>
-              <a:t>  - 現行解法（現在怎麼處理）</a:t>
+              <a:t>  - </a:t>
+            </a:r>
+            <a:r>
+              <a:rPr sz="1300" dirty="0" err="1">
+                <a:solidFill>
+                  <a:srgbClr val="111111"/>
+                </a:solidFill>
+                <a:latin typeface="Consolas"/>
+              </a:rPr>
+              <a:t>現行解法（現在怎麼處理</a:t>
+            </a:r>
+            <a:r>
+              <a:rPr sz="1300" dirty="0">
+                <a:solidFill>
+                  <a:srgbClr val="111111"/>
+                </a:solidFill>
+                <a:latin typeface="Consolas"/>
+              </a:rPr>
+              <a:t>）</a:t>
             </a:r>
           </a:p>
           <a:p>
@@ -4326,13 +4470,31 @@
               </a:lnSpc>
             </a:pPr>
             <a:r>
-              <a:rPr sz="1300">
+              <a:rPr sz="1300" dirty="0">
                 <a:solidFill>
                   <a:srgbClr val="111111"/>
                 </a:solidFill>
                 <a:latin typeface="Consolas"/>
               </a:rPr>
-              <a:t>  - 不滿（哪裡煩）</a:t>
+              <a:t>  - </a:t>
+            </a:r>
+            <a:r>
+              <a:rPr sz="1300" dirty="0" err="1">
+                <a:solidFill>
+                  <a:srgbClr val="111111"/>
+                </a:solidFill>
+                <a:latin typeface="Consolas"/>
+              </a:rPr>
+              <a:t>不滿（哪裡煩</a:t>
+            </a:r>
+            <a:r>
+              <a:rPr sz="1300" dirty="0">
+                <a:solidFill>
+                  <a:srgbClr val="111111"/>
+                </a:solidFill>
+                <a:latin typeface="Consolas"/>
+              </a:rPr>
+              <a:t>）</a:t>
             </a:r>
           </a:p>
           <a:p>
@@ -4341,7 +4503,7 @@
                 <a:spcPct val="130000"/>
               </a:lnSpc>
             </a:pPr>
-            <a:endParaRPr sz="1300">
+            <a:endParaRPr sz="1300" dirty="0">
               <a:solidFill>
                 <a:srgbClr val="111111"/>
               </a:solidFill>
@@ -4355,13 +4517,22 @@
               </a:lnSpc>
             </a:pPr>
             <a:r>
-              <a:rPr sz="1300">
+              <a:rPr sz="1300" dirty="0" err="1">
                 <a:solidFill>
                   <a:srgbClr val="111111"/>
                 </a:solidFill>
                 <a:latin typeface="Consolas"/>
               </a:rPr>
-              <a:t>規則：一次一題，我回答後再問下一題；</a:t>
+              <a:t>規則：一次一題，我回答後再問下一題</a:t>
+            </a:r>
+            <a:r>
+              <a:rPr sz="1300" dirty="0">
+                <a:solidFill>
+                  <a:srgbClr val="111111"/>
+                </a:solidFill>
+                <a:latin typeface="Consolas"/>
+              </a:rPr>
+              <a:t>；</a:t>
             </a:r>
           </a:p>
           <a:p>
@@ -4371,13 +4542,31 @@
               </a:lnSpc>
             </a:pPr>
             <a:r>
-              <a:rPr sz="1300">
+              <a:rPr sz="1300" dirty="0">
                 <a:solidFill>
                   <a:srgbClr val="111111"/>
                 </a:solidFill>
                 <a:latin typeface="Consolas"/>
               </a:rPr>
-              <a:t>      我回答太抽象時請直接指出；</a:t>
+              <a:t>      </a:t>
+            </a:r>
+            <a:r>
+              <a:rPr sz="1300" dirty="0" err="1">
+                <a:solidFill>
+                  <a:srgbClr val="111111"/>
+                </a:solidFill>
+                <a:latin typeface="Consolas"/>
+              </a:rPr>
+              <a:t>我回答太抽象時請直接指出</a:t>
+            </a:r>
+            <a:r>
+              <a:rPr sz="1300" dirty="0">
+                <a:solidFill>
+                  <a:srgbClr val="111111"/>
+                </a:solidFill>
+                <a:latin typeface="Consolas"/>
+              </a:rPr>
+              <a:t>；</a:t>
             </a:r>
           </a:p>
           <a:p>
@@ -4387,13 +4576,31 @@
               </a:lnSpc>
             </a:pPr>
             <a:r>
-              <a:rPr sz="1300">
+              <a:rPr sz="1300" dirty="0">
                 <a:solidFill>
                   <a:srgbClr val="111111"/>
                 </a:solidFill>
                 <a:latin typeface="Consolas"/>
               </a:rPr>
-              <a:t>      不要評分或建議產品。</a:t>
+              <a:t>      </a:t>
+            </a:r>
+            <a:r>
+              <a:rPr sz="1300" dirty="0" err="1">
+                <a:solidFill>
+                  <a:srgbClr val="111111"/>
+                </a:solidFill>
+                <a:latin typeface="Consolas"/>
+              </a:rPr>
+              <a:t>不要評分或建議產品</a:t>
+            </a:r>
+            <a:r>
+              <a:rPr sz="1300" dirty="0">
+                <a:solidFill>
+                  <a:srgbClr val="111111"/>
+                </a:solidFill>
+                <a:latin typeface="Consolas"/>
+              </a:rPr>
+              <a:t>。</a:t>
             </a:r>
           </a:p>
           <a:p>
@@ -4402,7 +4609,7 @@
                 <a:spcPct val="130000"/>
               </a:lnSpc>
             </a:pPr>
-            <a:endParaRPr sz="1300">
+            <a:endParaRPr sz="1300" dirty="0">
               <a:solidFill>
                 <a:srgbClr val="111111"/>
               </a:solidFill>
@@ -4416,13 +4623,22 @@
               </a:lnSpc>
             </a:pPr>
             <a:r>
-              <a:rPr sz="1300">
+              <a:rPr sz="1300" dirty="0" err="1">
                 <a:solidFill>
                   <a:srgbClr val="111111"/>
                 </a:solidFill>
                 <a:latin typeface="Consolas"/>
               </a:rPr>
-              <a:t>開始問我第一題吧。</a:t>
+              <a:t>開始問我第一題吧</a:t>
+            </a:r>
+            <a:r>
+              <a:rPr sz="1300" dirty="0">
+                <a:solidFill>
+                  <a:srgbClr val="111111"/>
+                </a:solidFill>
+                <a:latin typeface="Consolas"/>
+              </a:rPr>
+              <a:t>。</a:t>
             </a:r>
           </a:p>
         </p:txBody>
@@ -4805,13 +5021,31 @@
               </a:lnSpc>
             </a:pPr>
             <a:r>
-              <a:rPr sz="1800" b="0" spc="-20">
+              <a:rPr sz="1800" b="0" spc="-20" dirty="0">
                 <a:solidFill>
                   <a:srgbClr val="3A3A3A"/>
                 </a:solidFill>
                 <a:latin typeface="Microsoft JhengHei"/>
               </a:rPr>
-              <a:t>02   複製上一張的 Prompt</a:t>
+              <a:t>02   </a:t>
+            </a:r>
+            <a:r>
+              <a:rPr sz="1800" b="0" spc="-20" dirty="0" err="1">
+                <a:solidFill>
+                  <a:srgbClr val="3A3A3A"/>
+                </a:solidFill>
+                <a:latin typeface="Microsoft JhengHei"/>
+              </a:rPr>
+              <a:t>複製上一張的</a:t>
+            </a:r>
+            <a:r>
+              <a:rPr sz="1800" b="0" spc="-20" dirty="0">
+                <a:solidFill>
+                  <a:srgbClr val="3A3A3A"/>
+                </a:solidFill>
+                <a:latin typeface="Microsoft JhengHei"/>
+              </a:rPr>
+              <a:t> Prompt</a:t>
             </a:r>
           </a:p>
         </p:txBody>
@@ -5456,54 +5690,87 @@
               </a:lnSpc>
             </a:pPr>
             <a:r>
-              <a:rPr sz="1600">
+              <a:rPr sz="1600" dirty="0" err="1">
                 <a:solidFill>
                   <a:srgbClr val="111111"/>
                 </a:solidFill>
                 <a:latin typeface="Consolas"/>
               </a:rPr>
-              <a:t>痛點 A   □ 具體的人    □ 付錢的痛    □ 手工可交付    □ 收款</a:t>
-            </a:r>
-          </a:p>
-          <a:p>
-            <a:pPr algn="l">
-              <a:lnSpc>
-                <a:spcPct val="130000"/>
-              </a:lnSpc>
-            </a:pPr>
-            <a:r>
-              <a:rPr sz="1600">
+              <a:t>痛點</a:t>
+            </a:r>
+            <a:r>
+              <a:rPr sz="1600" dirty="0">
                 <a:solidFill>
                   <a:srgbClr val="111111"/>
                 </a:solidFill>
                 <a:latin typeface="Consolas"/>
               </a:rPr>
-              <a:t>痛點 B   □ 具體的人    □ 付錢的痛    □ 手工可交付    □ 收款</a:t>
-            </a:r>
-          </a:p>
-          <a:p>
-            <a:pPr algn="l">
-              <a:lnSpc>
-                <a:spcPct val="130000"/>
-              </a:lnSpc>
-            </a:pPr>
-            <a:r>
-              <a:rPr sz="1600">
+              <a:t> A   □ </a:t>
+            </a:r>
+            <a:r>
+              <a:rPr sz="1600" dirty="0" err="1">
                 <a:solidFill>
                   <a:srgbClr val="111111"/>
                 </a:solidFill>
                 <a:latin typeface="Consolas"/>
               </a:rPr>
-              <a:t>痛點 C   □ 具體的人    □ 付錢的痛    □ 手工可交付    □ 收款</a:t>
-            </a:r>
-          </a:p>
-          <a:p>
-            <a:pPr algn="l">
-              <a:lnSpc>
-                <a:spcPct val="130000"/>
-              </a:lnSpc>
-            </a:pPr>
-            <a:endParaRPr sz="1600">
+              <a:t>具體的人</a:t>
+            </a:r>
+            <a:r>
+              <a:rPr sz="1600" dirty="0">
+                <a:solidFill>
+                  <a:srgbClr val="111111"/>
+                </a:solidFill>
+                <a:latin typeface="Consolas"/>
+              </a:rPr>
+              <a:t>    □ </a:t>
+            </a:r>
+            <a:r>
+              <a:rPr sz="1600" dirty="0" err="1">
+                <a:solidFill>
+                  <a:srgbClr val="111111"/>
+                </a:solidFill>
+                <a:latin typeface="Consolas"/>
+              </a:rPr>
+              <a:t>付錢的痛</a:t>
+            </a:r>
+            <a:r>
+              <a:rPr sz="1600" dirty="0">
+                <a:solidFill>
+                  <a:srgbClr val="111111"/>
+                </a:solidFill>
+                <a:latin typeface="Consolas"/>
+              </a:rPr>
+              <a:t>    □ </a:t>
+            </a:r>
+            <a:r>
+              <a:rPr sz="1600" dirty="0" err="1">
+                <a:solidFill>
+                  <a:srgbClr val="111111"/>
+                </a:solidFill>
+                <a:latin typeface="Consolas"/>
+              </a:rPr>
+              <a:t>手工可交付</a:t>
+            </a:r>
+            <a:r>
+              <a:rPr sz="1600" dirty="0">
+                <a:solidFill>
+                  <a:srgbClr val="111111"/>
+                </a:solidFill>
+                <a:latin typeface="Consolas"/>
+              </a:rPr>
+              <a:t>    □ </a:t>
+            </a:r>
+            <a:r>
+              <a:rPr sz="1600" dirty="0" err="1">
+                <a:solidFill>
+                  <a:srgbClr val="111111"/>
+                </a:solidFill>
+                <a:latin typeface="Consolas"/>
+              </a:rPr>
+              <a:t>收款</a:t>
+            </a:r>
+            <a:endParaRPr sz="1600" dirty="0">
               <a:solidFill>
                 <a:srgbClr val="111111"/>
               </a:solidFill>
@@ -5517,14 +5784,248 @@
               </a:lnSpc>
             </a:pPr>
             <a:r>
-              <a:rPr sz="1600">
+              <a:rPr sz="1600" dirty="0" err="1">
                 <a:solidFill>
                   <a:srgbClr val="111111"/>
                 </a:solidFill>
                 <a:latin typeface="Consolas"/>
               </a:rPr>
-              <a:t>選 ① + ③ 最紮實的那個  =  今天的題目</a:t>
-            </a:r>
+              <a:t>痛點</a:t>
+            </a:r>
+            <a:r>
+              <a:rPr sz="1600" dirty="0">
+                <a:solidFill>
+                  <a:srgbClr val="111111"/>
+                </a:solidFill>
+                <a:latin typeface="Consolas"/>
+              </a:rPr>
+              <a:t> B   □ </a:t>
+            </a:r>
+            <a:r>
+              <a:rPr sz="1600" dirty="0" err="1">
+                <a:solidFill>
+                  <a:srgbClr val="111111"/>
+                </a:solidFill>
+                <a:latin typeface="Consolas"/>
+              </a:rPr>
+              <a:t>具體的人</a:t>
+            </a:r>
+            <a:r>
+              <a:rPr sz="1600" dirty="0">
+                <a:solidFill>
+                  <a:srgbClr val="111111"/>
+                </a:solidFill>
+                <a:latin typeface="Consolas"/>
+              </a:rPr>
+              <a:t>    □ </a:t>
+            </a:r>
+            <a:r>
+              <a:rPr sz="1600" dirty="0" err="1">
+                <a:solidFill>
+                  <a:srgbClr val="111111"/>
+                </a:solidFill>
+                <a:latin typeface="Consolas"/>
+              </a:rPr>
+              <a:t>付錢的痛</a:t>
+            </a:r>
+            <a:r>
+              <a:rPr sz="1600" dirty="0">
+                <a:solidFill>
+                  <a:srgbClr val="111111"/>
+                </a:solidFill>
+                <a:latin typeface="Consolas"/>
+              </a:rPr>
+              <a:t>    □ </a:t>
+            </a:r>
+            <a:r>
+              <a:rPr sz="1600" dirty="0" err="1">
+                <a:solidFill>
+                  <a:srgbClr val="111111"/>
+                </a:solidFill>
+                <a:latin typeface="Consolas"/>
+              </a:rPr>
+              <a:t>手工可交付</a:t>
+            </a:r>
+            <a:r>
+              <a:rPr sz="1600" dirty="0">
+                <a:solidFill>
+                  <a:srgbClr val="111111"/>
+                </a:solidFill>
+                <a:latin typeface="Consolas"/>
+              </a:rPr>
+              <a:t>    □ </a:t>
+            </a:r>
+            <a:r>
+              <a:rPr sz="1600" dirty="0" err="1">
+                <a:solidFill>
+                  <a:srgbClr val="111111"/>
+                </a:solidFill>
+                <a:latin typeface="Consolas"/>
+              </a:rPr>
+              <a:t>收款</a:t>
+            </a:r>
+            <a:endParaRPr sz="1600" dirty="0">
+              <a:solidFill>
+                <a:srgbClr val="111111"/>
+              </a:solidFill>
+              <a:latin typeface="Consolas"/>
+            </a:endParaRPr>
+          </a:p>
+          <a:p>
+            <a:pPr algn="l">
+              <a:lnSpc>
+                <a:spcPct val="130000"/>
+              </a:lnSpc>
+            </a:pPr>
+            <a:r>
+              <a:rPr sz="1600" dirty="0" err="1">
+                <a:solidFill>
+                  <a:srgbClr val="111111"/>
+                </a:solidFill>
+                <a:latin typeface="Consolas"/>
+              </a:rPr>
+              <a:t>痛點</a:t>
+            </a:r>
+            <a:r>
+              <a:rPr sz="1600" dirty="0">
+                <a:solidFill>
+                  <a:srgbClr val="111111"/>
+                </a:solidFill>
+                <a:latin typeface="Consolas"/>
+              </a:rPr>
+              <a:t> C   □ </a:t>
+            </a:r>
+            <a:r>
+              <a:rPr sz="1600" dirty="0" err="1">
+                <a:solidFill>
+                  <a:srgbClr val="111111"/>
+                </a:solidFill>
+                <a:latin typeface="Consolas"/>
+              </a:rPr>
+              <a:t>具體的人</a:t>
+            </a:r>
+            <a:r>
+              <a:rPr sz="1600" dirty="0">
+                <a:solidFill>
+                  <a:srgbClr val="111111"/>
+                </a:solidFill>
+                <a:latin typeface="Consolas"/>
+              </a:rPr>
+              <a:t>    □ </a:t>
+            </a:r>
+            <a:r>
+              <a:rPr sz="1600" dirty="0" err="1">
+                <a:solidFill>
+                  <a:srgbClr val="111111"/>
+                </a:solidFill>
+                <a:latin typeface="Consolas"/>
+              </a:rPr>
+              <a:t>付錢的痛</a:t>
+            </a:r>
+            <a:r>
+              <a:rPr sz="1600" dirty="0">
+                <a:solidFill>
+                  <a:srgbClr val="111111"/>
+                </a:solidFill>
+                <a:latin typeface="Consolas"/>
+              </a:rPr>
+              <a:t>    □ </a:t>
+            </a:r>
+            <a:r>
+              <a:rPr sz="1600" dirty="0" err="1">
+                <a:solidFill>
+                  <a:srgbClr val="111111"/>
+                </a:solidFill>
+                <a:latin typeface="Consolas"/>
+              </a:rPr>
+              <a:t>手工可交付</a:t>
+            </a:r>
+            <a:r>
+              <a:rPr sz="1600" dirty="0">
+                <a:solidFill>
+                  <a:srgbClr val="111111"/>
+                </a:solidFill>
+                <a:latin typeface="Consolas"/>
+              </a:rPr>
+              <a:t>    □ </a:t>
+            </a:r>
+            <a:r>
+              <a:rPr sz="1600" dirty="0" err="1">
+                <a:solidFill>
+                  <a:srgbClr val="111111"/>
+                </a:solidFill>
+                <a:latin typeface="Consolas"/>
+              </a:rPr>
+              <a:t>收款</a:t>
+            </a:r>
+            <a:endParaRPr sz="1600" dirty="0">
+              <a:solidFill>
+                <a:srgbClr val="111111"/>
+              </a:solidFill>
+              <a:latin typeface="Consolas"/>
+            </a:endParaRPr>
+          </a:p>
+          <a:p>
+            <a:pPr algn="l">
+              <a:lnSpc>
+                <a:spcPct val="130000"/>
+              </a:lnSpc>
+            </a:pPr>
+            <a:endParaRPr sz="1600" dirty="0">
+              <a:solidFill>
+                <a:srgbClr val="111111"/>
+              </a:solidFill>
+              <a:latin typeface="Consolas"/>
+            </a:endParaRPr>
+          </a:p>
+          <a:p>
+            <a:pPr algn="l">
+              <a:lnSpc>
+                <a:spcPct val="130000"/>
+              </a:lnSpc>
+            </a:pPr>
+            <a:r>
+              <a:rPr sz="1600" dirty="0">
+                <a:solidFill>
+                  <a:srgbClr val="111111"/>
+                </a:solidFill>
+                <a:latin typeface="Consolas"/>
+              </a:rPr>
+              <a:t>選 ① + ③ </a:t>
+            </a:r>
+            <a:r>
+              <a:rPr sz="1600" dirty="0" err="1">
+                <a:solidFill>
+                  <a:srgbClr val="111111"/>
+                </a:solidFill>
+                <a:latin typeface="Consolas"/>
+              </a:rPr>
+              <a:t>最紮實的那個</a:t>
+            </a:r>
+            <a:r>
+              <a:rPr sz="1600" dirty="0">
+                <a:solidFill>
+                  <a:srgbClr val="111111"/>
+                </a:solidFill>
+                <a:latin typeface="Consolas"/>
+              </a:rPr>
+              <a:t>  =  </a:t>
+            </a:r>
+            <a:r>
+              <a:rPr sz="1600" dirty="0" err="1">
+                <a:solidFill>
+                  <a:srgbClr val="111111"/>
+                </a:solidFill>
+                <a:latin typeface="Consolas"/>
+              </a:rPr>
+              <a:t>今天的題目</a:t>
+            </a:r>
+            <a:endParaRPr sz="1600" dirty="0">
+              <a:solidFill>
+                <a:srgbClr val="111111"/>
+              </a:solidFill>
+              <a:latin typeface="Consolas"/>
+            </a:endParaRPr>
           </a:p>
         </p:txBody>
       </p:sp>
@@ -6020,13 +6521,22 @@
               </a:lnSpc>
             </a:pPr>
             <a:r>
-              <a:rPr sz="1400">
+              <a:rPr sz="1400" dirty="0" err="1">
                 <a:solidFill>
                   <a:srgbClr val="111111"/>
                 </a:solidFill>
                 <a:latin typeface="Consolas"/>
               </a:rPr>
-              <a:t>我要做 _______________，</a:t>
+              <a:t>我要做</a:t>
+            </a:r>
+            <a:r>
+              <a:rPr sz="1400" dirty="0">
+                <a:solidFill>
+                  <a:srgbClr val="111111"/>
+                </a:solidFill>
+                <a:latin typeface="Consolas"/>
+              </a:rPr>
+              <a:t> _______________，</a:t>
             </a:r>
           </a:p>
           <a:p>
@@ -6036,7 +6546,7 @@
               </a:lnSpc>
             </a:pPr>
             <a:r>
-              <a:rPr sz="1400">
+              <a:rPr sz="1400" dirty="0">
                 <a:solidFill>
                   <a:srgbClr val="111111"/>
                 </a:solidFill>
@@ -6052,13 +6562,40 @@
               </a:lnSpc>
             </a:pPr>
             <a:r>
-              <a:rPr sz="1400">
+              <a:rPr sz="1400" dirty="0" err="1">
                 <a:solidFill>
                   <a:srgbClr val="111111"/>
                 </a:solidFill>
                 <a:latin typeface="Consolas"/>
               </a:rPr>
-              <a:t>解決 _______________ 問題，</a:t>
+              <a:t>解決</a:t>
+            </a:r>
+            <a:r>
+              <a:rPr sz="1400" dirty="0">
+                <a:solidFill>
+                  <a:srgbClr val="111111"/>
+                </a:solidFill>
+                <a:latin typeface="Consolas"/>
+              </a:rPr>
+              <a:t> _______________ </a:t>
+            </a:r>
+            <a:r>
+              <a:rPr sz="1400" dirty="0" err="1">
+                <a:solidFill>
+                  <a:srgbClr val="111111"/>
+                </a:solidFill>
+                <a:latin typeface="Consolas"/>
+              </a:rPr>
+              <a:t>問題</a:t>
+            </a:r>
+            <a:r>
+              <a:rPr sz="1400" dirty="0">
+                <a:solidFill>
+                  <a:srgbClr val="111111"/>
+                </a:solidFill>
+                <a:latin typeface="Consolas"/>
+              </a:rPr>
+              <a:t>，</a:t>
             </a:r>
           </a:p>
           <a:p>
@@ -6068,13 +6605,22 @@
               </a:lnSpc>
             </a:pPr>
             <a:r>
-              <a:rPr sz="1400">
+              <a:rPr sz="1400" dirty="0" err="1">
                 <a:solidFill>
                   <a:srgbClr val="111111"/>
                 </a:solidFill>
                 <a:latin typeface="Consolas"/>
               </a:rPr>
-              <a:t>核心功能是 _______________。</a:t>
+              <a:t>核心功能是</a:t>
+            </a:r>
+            <a:r>
+              <a:rPr sz="1400" dirty="0">
+                <a:solidFill>
+                  <a:srgbClr val="111111"/>
+                </a:solidFill>
+                <a:latin typeface="Consolas"/>
+              </a:rPr>
+              <a:t> _______________。</a:t>
             </a:r>
           </a:p>
           <a:p>
@@ -6083,7 +6629,7 @@
                 <a:spcPct val="130000"/>
               </a:lnSpc>
             </a:pPr>
-            <a:endParaRPr sz="1400">
+            <a:endParaRPr sz="1400" dirty="0">
               <a:solidFill>
                 <a:srgbClr val="111111"/>
               </a:solidFill>
@@ -6097,13 +6643,22 @@
               </a:lnSpc>
             </a:pPr>
             <a:r>
-              <a:rPr sz="1400">
+              <a:rPr sz="1400" dirty="0" err="1">
                 <a:solidFill>
                   <a:srgbClr val="111111"/>
                 </a:solidFill>
                 <a:latin typeface="Consolas"/>
               </a:rPr>
-              <a:t>範例：</a:t>
+              <a:t>範例</a:t>
+            </a:r>
+            <a:r>
+              <a:rPr sz="1400" dirty="0">
+                <a:solidFill>
+                  <a:srgbClr val="111111"/>
+                </a:solidFill>
+                <a:latin typeface="Consolas"/>
+              </a:rPr>
+              <a:t>：</a:t>
             </a:r>
           </a:p>
           <a:p>
@@ -6113,13 +6668,31 @@
               </a:lnSpc>
             </a:pPr>
             <a:r>
-              <a:rPr sz="1400">
+              <a:rPr sz="1400" dirty="0">
                 <a:solidFill>
                   <a:srgbClr val="111111"/>
                 </a:solidFill>
                 <a:latin typeface="Consolas"/>
               </a:rPr>
-              <a:t>  我要做一個新聞摘要工具，</a:t>
+              <a:t>  </a:t>
+            </a:r>
+            <a:r>
+              <a:rPr sz="1400" dirty="0" err="1">
+                <a:solidFill>
+                  <a:srgbClr val="111111"/>
+                </a:solidFill>
+                <a:latin typeface="Consolas"/>
+              </a:rPr>
+              <a:t>我要做一個新聞摘要工具</a:t>
+            </a:r>
+            <a:r>
+              <a:rPr sz="1400" dirty="0">
+                <a:solidFill>
+                  <a:srgbClr val="111111"/>
+                </a:solidFill>
+                <a:latin typeface="Consolas"/>
+              </a:rPr>
+              <a:t>，</a:t>
             </a:r>
           </a:p>
           <a:p>
@@ -6129,13 +6702,31 @@
               </a:lnSpc>
             </a:pPr>
             <a:r>
-              <a:rPr sz="1400">
+              <a:rPr sz="1400" dirty="0">
                 <a:solidFill>
                   <a:srgbClr val="111111"/>
                 </a:solidFill>
                 <a:latin typeface="Consolas"/>
               </a:rPr>
-              <a:t>  給自己用，</a:t>
+              <a:t>  </a:t>
+            </a:r>
+            <a:r>
+              <a:rPr sz="1400" dirty="0" err="1">
+                <a:solidFill>
+                  <a:srgbClr val="111111"/>
+                </a:solidFill>
+                <a:latin typeface="Consolas"/>
+              </a:rPr>
+              <a:t>給自己用</a:t>
+            </a:r>
+            <a:r>
+              <a:rPr sz="1400" dirty="0">
+                <a:solidFill>
+                  <a:srgbClr val="111111"/>
+                </a:solidFill>
+                <a:latin typeface="Consolas"/>
+              </a:rPr>
+              <a:t>，</a:t>
             </a:r>
           </a:p>
           <a:p>
@@ -6145,13 +6736,67 @@
               </a:lnSpc>
             </a:pPr>
             <a:r>
-              <a:rPr sz="1400">
+              <a:rPr sz="1400" dirty="0">
                 <a:solidFill>
                   <a:srgbClr val="111111"/>
                 </a:solidFill>
                 <a:latin typeface="Consolas"/>
               </a:rPr>
-              <a:t>  解決每天花 30 分鐘讀新聞只記得 10% 的問題，</a:t>
+              <a:t>  </a:t>
+            </a:r>
+            <a:r>
+              <a:rPr sz="1400" dirty="0" err="1">
+                <a:solidFill>
+                  <a:srgbClr val="111111"/>
+                </a:solidFill>
+                <a:latin typeface="Consolas"/>
+              </a:rPr>
+              <a:t>解決每天花</a:t>
+            </a:r>
+            <a:r>
+              <a:rPr sz="1400" dirty="0">
+                <a:solidFill>
+                  <a:srgbClr val="111111"/>
+                </a:solidFill>
+                <a:latin typeface="Consolas"/>
+              </a:rPr>
+              <a:t> 30 </a:t>
+            </a:r>
+            <a:r>
+              <a:rPr sz="1400" dirty="0" err="1">
+                <a:solidFill>
+                  <a:srgbClr val="111111"/>
+                </a:solidFill>
+                <a:latin typeface="Consolas"/>
+              </a:rPr>
+              <a:t>分鐘讀新聞只記得</a:t>
+            </a:r>
+            <a:r>
+              <a:rPr sz="1400" dirty="0">
+                <a:solidFill>
+                  <a:srgbClr val="111111"/>
+                </a:solidFill>
+                <a:latin typeface="Consolas"/>
+              </a:rPr>
+              <a:t> 10% </a:t>
+            </a:r>
+            <a:r>
+              <a:rPr sz="1400" dirty="0" err="1">
+                <a:solidFill>
+                  <a:srgbClr val="111111"/>
+                </a:solidFill>
+                <a:latin typeface="Consolas"/>
+              </a:rPr>
+              <a:t>的問題</a:t>
+            </a:r>
+            <a:r>
+              <a:rPr sz="1400" dirty="0">
+                <a:solidFill>
+                  <a:srgbClr val="111111"/>
+                </a:solidFill>
+                <a:latin typeface="Consolas"/>
+              </a:rPr>
+              <a:t>，</a:t>
             </a:r>
           </a:p>
           <a:p>
@@ -6161,13 +6806,49 @@
               </a:lnSpc>
             </a:pPr>
             <a:r>
-              <a:rPr sz="1400">
+              <a:rPr sz="1400" dirty="0">
                 <a:solidFill>
                   <a:srgbClr val="111111"/>
                 </a:solidFill>
                 <a:latin typeface="Consolas"/>
               </a:rPr>
-              <a:t>  核心功能是貼新聞就出 3 句重點。</a:t>
+              <a:t>  </a:t>
+            </a:r>
+            <a:r>
+              <a:rPr sz="1400" dirty="0" err="1">
+                <a:solidFill>
+                  <a:srgbClr val="111111"/>
+                </a:solidFill>
+                <a:latin typeface="Consolas"/>
+              </a:rPr>
+              <a:t>核心功能是貼新聞就出</a:t>
+            </a:r>
+            <a:r>
+              <a:rPr sz="1400" dirty="0">
+                <a:solidFill>
+                  <a:srgbClr val="111111"/>
+                </a:solidFill>
+                <a:latin typeface="Consolas"/>
+              </a:rPr>
+              <a:t> 3 </a:t>
+            </a:r>
+            <a:r>
+              <a:rPr sz="1400" dirty="0" err="1">
+                <a:solidFill>
+                  <a:srgbClr val="111111"/>
+                </a:solidFill>
+                <a:latin typeface="Consolas"/>
+              </a:rPr>
+              <a:t>句重點</a:t>
+            </a:r>
+            <a:r>
+              <a:rPr sz="1400" dirty="0">
+                <a:solidFill>
+                  <a:srgbClr val="111111"/>
+                </a:solidFill>
+                <a:latin typeface="Consolas"/>
+              </a:rPr>
+              <a:t>。</a:t>
             </a:r>
           </a:p>
         </p:txBody>
@@ -7316,14 +7997,29 @@
               </a:lnSpc>
             </a:pPr>
             <a:r>
-              <a:rPr sz="8800" b="1" spc="-350">
+              <a:rPr sz="8800" b="1" spc="-350" dirty="0">
                 <a:solidFill>
                   <a:srgbClr val="111111"/>
                 </a:solidFill>
                 <a:latin typeface="Microsoft JhengHei"/>
               </a:rPr>
-              <a:t>STRIKE 提示詞戰法</a:t>
-            </a:r>
+              <a:t>STRIKE </a:t>
+            </a:r>
+            <a:r>
+              <a:rPr sz="8800" b="1" spc="-350" dirty="0" err="1">
+                <a:solidFill>
+                  <a:srgbClr val="111111"/>
+                </a:solidFill>
+                <a:latin typeface="Microsoft JhengHei"/>
+              </a:rPr>
+              <a:t>提示詞戰法</a:t>
+            </a:r>
+            <a:endParaRPr sz="8800" b="1" spc="-350" dirty="0">
+              <a:solidFill>
+                <a:srgbClr val="111111"/>
+              </a:solidFill>
+              <a:latin typeface="Microsoft JhengHei"/>
+            </a:endParaRPr>
           </a:p>
         </p:txBody>
       </p:sp>
@@ -7869,14 +8565,65 @@
               </a:lnSpc>
             </a:pPr>
             <a:r>
-              <a:rPr sz="1100">
+              <a:rPr sz="1100" dirty="0">
                 <a:solidFill>
                   <a:srgbClr val="111111"/>
                 </a:solidFill>
                 <a:latin typeface="Consolas"/>
               </a:rPr>
-              <a:t>【S】我是 PM，剛結束 Q2 跨部門規劃會議</a:t>
-            </a:r>
+              <a:t>【</a:t>
+            </a:r>
+            <a:r>
+              <a:rPr sz="1100" dirty="0" err="1">
+                <a:solidFill>
+                  <a:srgbClr val="111111"/>
+                </a:solidFill>
+                <a:latin typeface="Consolas"/>
+              </a:rPr>
+              <a:t>S】我是</a:t>
+            </a:r>
+            <a:r>
+              <a:rPr sz="1100" dirty="0">
+                <a:solidFill>
+                  <a:srgbClr val="111111"/>
+                </a:solidFill>
+                <a:latin typeface="Consolas"/>
+              </a:rPr>
+              <a:t> </a:t>
+            </a:r>
+            <a:r>
+              <a:rPr sz="1100" dirty="0" err="1">
+                <a:solidFill>
+                  <a:srgbClr val="111111"/>
+                </a:solidFill>
+                <a:latin typeface="Consolas"/>
+              </a:rPr>
+              <a:t>PM，剛結束</a:t>
+            </a:r>
+            <a:r>
+              <a:rPr sz="1100" dirty="0">
+                <a:solidFill>
+                  <a:srgbClr val="111111"/>
+                </a:solidFill>
+                <a:latin typeface="Consolas"/>
+              </a:rPr>
+              <a:t> Q2 </a:t>
+            </a:r>
+            <a:r>
+              <a:rPr sz="1100" dirty="0" err="1">
+                <a:solidFill>
+                  <a:srgbClr val="111111"/>
+                </a:solidFill>
+                <a:latin typeface="Consolas"/>
+              </a:rPr>
+              <a:t>跨部門規劃會議</a:t>
+            </a:r>
+            <a:endParaRPr sz="1100" dirty="0">
+              <a:solidFill>
+                <a:srgbClr val="111111"/>
+              </a:solidFill>
+              <a:latin typeface="Consolas"/>
+            </a:endParaRPr>
           </a:p>
           <a:p>
             <a:pPr algn="l">
@@ -7885,14 +8632,29 @@
               </a:lnSpc>
             </a:pPr>
             <a:r>
-              <a:rPr sz="1100">
+              <a:rPr sz="1100" dirty="0">
                 <a:solidFill>
                   <a:srgbClr val="111111"/>
                 </a:solidFill>
                 <a:latin typeface="Consolas"/>
               </a:rPr>
-              <a:t>【T】將逐字稿整理成結構化會議紀錄</a:t>
-            </a:r>
+              <a:t>【</a:t>
+            </a:r>
+            <a:r>
+              <a:rPr sz="1100" dirty="0" err="1">
+                <a:solidFill>
+                  <a:srgbClr val="111111"/>
+                </a:solidFill>
+                <a:latin typeface="Consolas"/>
+              </a:rPr>
+              <a:t>T】將逐字稿整理成結構化會議紀錄</a:t>
+            </a:r>
+            <a:endParaRPr sz="1100" dirty="0">
+              <a:solidFill>
+                <a:srgbClr val="111111"/>
+              </a:solidFill>
+              <a:latin typeface="Consolas"/>
+            </a:endParaRPr>
           </a:p>
           <a:p>
             <a:pPr algn="l">
@@ -7901,14 +8663,47 @@
               </a:lnSpc>
             </a:pPr>
             <a:r>
-              <a:rPr sz="1100">
+              <a:rPr sz="1100" dirty="0">
                 <a:solidFill>
                   <a:srgbClr val="111111"/>
                 </a:solidFill>
                 <a:latin typeface="Consolas"/>
               </a:rPr>
-              <a:t>【R】你是資深 PM，擅長提取關鍵決策</a:t>
-            </a:r>
+              <a:t>【</a:t>
+            </a:r>
+            <a:r>
+              <a:rPr sz="1100" dirty="0" err="1">
+                <a:solidFill>
+                  <a:srgbClr val="111111"/>
+                </a:solidFill>
+                <a:latin typeface="Consolas"/>
+              </a:rPr>
+              <a:t>R】你是資深</a:t>
+            </a:r>
+            <a:r>
+              <a:rPr sz="1100" dirty="0">
+                <a:solidFill>
+                  <a:srgbClr val="111111"/>
+                </a:solidFill>
+                <a:latin typeface="Consolas"/>
+              </a:rPr>
+              <a:t> </a:t>
+            </a:r>
+            <a:r>
+              <a:rPr sz="1100" dirty="0" err="1">
+                <a:solidFill>
+                  <a:srgbClr val="111111"/>
+                </a:solidFill>
+                <a:latin typeface="Consolas"/>
+              </a:rPr>
+              <a:t>PM，擅長提取關鍵決策</a:t>
+            </a:r>
+            <a:endParaRPr sz="1100" dirty="0">
+              <a:solidFill>
+                <a:srgbClr val="111111"/>
+              </a:solidFill>
+              <a:latin typeface="Consolas"/>
+            </a:endParaRPr>
           </a:p>
           <a:p>
             <a:pPr algn="l">
@@ -7917,13 +8712,49 @@
               </a:lnSpc>
             </a:pPr>
             <a:r>
-              <a:rPr sz="1100">
+              <a:rPr sz="1100" dirty="0">
                 <a:solidFill>
                   <a:srgbClr val="111111"/>
                 </a:solidFill>
                 <a:latin typeface="Consolas"/>
               </a:rPr>
-              <a:t>【I】[貼上 45 分鐘逐字稿]</a:t>
+              <a:t>【I】[</a:t>
+            </a:r>
+            <a:r>
+              <a:rPr sz="1100" dirty="0" err="1">
+                <a:solidFill>
+                  <a:srgbClr val="111111"/>
+                </a:solidFill>
+                <a:latin typeface="Consolas"/>
+              </a:rPr>
+              <a:t>貼上</a:t>
+            </a:r>
+            <a:r>
+              <a:rPr sz="1100" dirty="0">
+                <a:solidFill>
+                  <a:srgbClr val="111111"/>
+                </a:solidFill>
+                <a:latin typeface="Consolas"/>
+              </a:rPr>
+              <a:t> 45 </a:t>
+            </a:r>
+            <a:r>
+              <a:rPr sz="1100" dirty="0" err="1">
+                <a:solidFill>
+                  <a:srgbClr val="111111"/>
+                </a:solidFill>
+                <a:latin typeface="Consolas"/>
+              </a:rPr>
+              <a:t>分鐘逐字稿</a:t>
+            </a:r>
+            <a:r>
+              <a:rPr sz="1100" dirty="0">
+                <a:solidFill>
+                  <a:srgbClr val="111111"/>
+                </a:solidFill>
+                <a:latin typeface="Consolas"/>
+              </a:rPr>
+              <a:t>]</a:t>
             </a:r>
           </a:p>
           <a:p>
@@ -7933,14 +8764,101 @@
               </a:lnSpc>
             </a:pPr>
             <a:r>
-              <a:rPr sz="1100">
+              <a:rPr sz="1100" dirty="0">
                 <a:solidFill>
                   <a:srgbClr val="111111"/>
                 </a:solidFill>
                 <a:latin typeface="Consolas"/>
               </a:rPr>
-              <a:t>【K】四區塊：摘要/決議/待辦(含負責人)/未解議題</a:t>
-            </a:r>
+              <a:t>【</a:t>
+            </a:r>
+            <a:r>
+              <a:rPr sz="1100" dirty="0" err="1">
+                <a:solidFill>
+                  <a:srgbClr val="111111"/>
+                </a:solidFill>
+                <a:latin typeface="Consolas"/>
+              </a:rPr>
+              <a:t>K】四區塊：摘要</a:t>
+            </a:r>
+            <a:r>
+              <a:rPr sz="1100" dirty="0">
+                <a:solidFill>
+                  <a:srgbClr val="111111"/>
+                </a:solidFill>
+                <a:latin typeface="Consolas"/>
+              </a:rPr>
+              <a:t>/</a:t>
+            </a:r>
+            <a:r>
+              <a:rPr sz="1100" dirty="0" err="1">
+                <a:solidFill>
+                  <a:srgbClr val="111111"/>
+                </a:solidFill>
+                <a:latin typeface="Consolas"/>
+              </a:rPr>
+              <a:t>決議</a:t>
+            </a:r>
+            <a:r>
+              <a:rPr sz="1100" dirty="0">
+                <a:solidFill>
+                  <a:srgbClr val="111111"/>
+                </a:solidFill>
+                <a:latin typeface="Consolas"/>
+              </a:rPr>
+              <a:t>/</a:t>
+            </a:r>
+            <a:r>
+              <a:rPr sz="1100" dirty="0" err="1">
+                <a:solidFill>
+                  <a:srgbClr val="111111"/>
+                </a:solidFill>
+                <a:latin typeface="Consolas"/>
+              </a:rPr>
+              <a:t>待辦</a:t>
+            </a:r>
+            <a:r>
+              <a:rPr sz="1100" dirty="0">
+                <a:solidFill>
+                  <a:srgbClr val="111111"/>
+                </a:solidFill>
+                <a:latin typeface="Consolas"/>
+              </a:rPr>
+              <a:t>(</a:t>
+            </a:r>
+            <a:r>
+              <a:rPr sz="1100" dirty="0" err="1">
+                <a:solidFill>
+                  <a:srgbClr val="111111"/>
+                </a:solidFill>
+                <a:latin typeface="Consolas"/>
+              </a:rPr>
+              <a:t>含負責人</a:t>
+            </a:r>
+            <a:r>
+              <a:rPr sz="1100" dirty="0">
+                <a:solidFill>
+                  <a:srgbClr val="111111"/>
+                </a:solidFill>
+                <a:latin typeface="Consolas"/>
+              </a:rPr>
+              <a:t>)/</a:t>
+            </a:r>
+            <a:r>
+              <a:rPr sz="1100" dirty="0" err="1">
+                <a:solidFill>
+                  <a:srgbClr val="111111"/>
+                </a:solidFill>
+                <a:latin typeface="Consolas"/>
+              </a:rPr>
+              <a:t>未解議題</a:t>
+            </a:r>
+            <a:endParaRPr sz="1100" dirty="0">
+              <a:solidFill>
+                <a:srgbClr val="111111"/>
+              </a:solidFill>
+              <a:latin typeface="Consolas"/>
+            </a:endParaRPr>
           </a:p>
           <a:p>
             <a:pPr algn="l">
@@ -7949,7 +8867,7 @@
               </a:lnSpc>
             </a:pPr>
             <a:r>
-              <a:rPr sz="1100">
+              <a:rPr sz="1100" dirty="0">
                 <a:solidFill>
                   <a:srgbClr val="111111"/>
                 </a:solidFill>
@@ -7965,13 +8883,49 @@
               </a:lnSpc>
             </a:pPr>
             <a:r>
-              <a:rPr sz="1100">
+              <a:rPr sz="1100" dirty="0">
                 <a:solidFill>
                   <a:srgbClr val="111111"/>
                 </a:solidFill>
                 <a:latin typeface="Consolas"/>
               </a:rPr>
-              <a:t>【E】## Q2 規劃會議  日期:...</a:t>
+              <a:t>【E】## Q2 </a:t>
+            </a:r>
+            <a:r>
+              <a:rPr sz="1100" dirty="0" err="1">
+                <a:solidFill>
+                  <a:srgbClr val="111111"/>
+                </a:solidFill>
+                <a:latin typeface="Consolas"/>
+              </a:rPr>
+              <a:t>規劃會議</a:t>
+            </a:r>
+            <a:r>
+              <a:rPr sz="1100" dirty="0">
+                <a:solidFill>
+                  <a:srgbClr val="111111"/>
+                </a:solidFill>
+                <a:latin typeface="Consolas"/>
+              </a:rPr>
+              <a:t>  </a:t>
+            </a:r>
+            <a:r>
+              <a:rPr sz="1100" dirty="0" err="1">
+                <a:solidFill>
+                  <a:srgbClr val="111111"/>
+                </a:solidFill>
+                <a:latin typeface="Consolas"/>
+              </a:rPr>
+              <a:t>日期</a:t>
+            </a:r>
+            <a:r>
+              <a:rPr sz="1100" dirty="0">
+                <a:solidFill>
+                  <a:srgbClr val="111111"/>
+                </a:solidFill>
+                <a:latin typeface="Consolas"/>
+              </a:rPr>
+              <a:t>:...</a:t>
             </a:r>
           </a:p>
         </p:txBody>
@@ -9233,7 +10187,7 @@
               </a:lnSpc>
             </a:pPr>
             <a:r>
-              <a:rPr sz="1800" b="1" spc="-30">
+              <a:rPr sz="1800" b="1" spc="-30" dirty="0" err="1">
                 <a:solidFill>
                   <a:srgbClr val="111111"/>
                 </a:solidFill>
@@ -9241,6 +10195,12 @@
               </a:rPr>
               <a:t>情境</a:t>
             </a:r>
+            <a:endParaRPr sz="1800" b="1" spc="-30" dirty="0">
+              <a:solidFill>
+                <a:srgbClr val="111111"/>
+              </a:solidFill>
+              <a:latin typeface="Microsoft JhengHei"/>
+            </a:endParaRPr>
           </a:p>
         </p:txBody>
       </p:sp>
@@ -9641,7 +10601,7 @@
               </a:lnSpc>
             </a:pPr>
             <a:r>
-              <a:rPr sz="1800" b="1" spc="-30">
+              <a:rPr sz="1800" b="1" spc="-30" dirty="0" err="1">
                 <a:solidFill>
                   <a:srgbClr val="111111"/>
                 </a:solidFill>
@@ -9649,6 +10609,12 @@
               </a:rPr>
               <a:t>角色</a:t>
             </a:r>
+            <a:endParaRPr sz="1800" b="1" spc="-30" dirty="0">
+              <a:solidFill>
+                <a:srgbClr val="111111"/>
+              </a:solidFill>
+              <a:latin typeface="Microsoft JhengHei"/>
+            </a:endParaRPr>
           </a:p>
         </p:txBody>
       </p:sp>
@@ -10049,7 +11015,7 @@
               </a:lnSpc>
             </a:pPr>
             <a:r>
-              <a:rPr sz="1800" b="1" spc="-30">
+              <a:rPr sz="1800" b="1" spc="-30" dirty="0" err="1">
                 <a:solidFill>
                   <a:srgbClr val="111111"/>
                 </a:solidFill>
@@ -10057,6 +11023,12 @@
               </a:rPr>
               <a:t>驗收</a:t>
             </a:r>
+            <a:endParaRPr sz="1800" b="1" spc="-30" dirty="0">
+              <a:solidFill>
+                <a:srgbClr val="111111"/>
+              </a:solidFill>
+              <a:latin typeface="Microsoft JhengHei"/>
+            </a:endParaRPr>
           </a:p>
         </p:txBody>
       </p:sp>
@@ -12946,7 +13918,7 @@
               </a:lnSpc>
             </a:pPr>
             <a:r>
-              <a:rPr sz="3600" b="1" spc="-120">
+              <a:rPr sz="3600" b="1" spc="-120" dirty="0">
                 <a:solidFill>
                   <a:srgbClr val="111111"/>
                 </a:solidFill>
@@ -13823,14 +14795,38 @@
               </a:lnSpc>
             </a:pPr>
             <a:r>
-              <a:rPr sz="1400" b="0" spc="-10">
+              <a:rPr sz="1400" b="0" spc="-10" dirty="0" err="1">
                 <a:solidFill>
                   <a:srgbClr val="3A3A3A"/>
                 </a:solidFill>
                 <a:latin typeface="Microsoft JhengHei"/>
               </a:rPr>
-              <a:t>完整 STRIKE 六要素，一次到位</a:t>
-            </a:r>
+              <a:t>完整</a:t>
+            </a:r>
+            <a:r>
+              <a:rPr sz="1400" b="0" spc="-10" dirty="0">
+                <a:solidFill>
+                  <a:srgbClr val="3A3A3A"/>
+                </a:solidFill>
+                <a:latin typeface="Microsoft JhengHei"/>
+              </a:rPr>
+              <a:t> STRIKE </a:t>
+            </a:r>
+            <a:r>
+              <a:rPr sz="1400" b="0" spc="-10" dirty="0" err="1">
+                <a:solidFill>
+                  <a:srgbClr val="3A3A3A"/>
+                </a:solidFill>
+                <a:latin typeface="Microsoft JhengHei"/>
+              </a:rPr>
+              <a:t>六要素，一次到位</a:t>
+            </a:r>
+            <a:endParaRPr sz="1400" b="0" spc="-10" dirty="0">
+              <a:solidFill>
+                <a:srgbClr val="3A3A3A"/>
+              </a:solidFill>
+              <a:latin typeface="Microsoft JhengHei"/>
+            </a:endParaRPr>
           </a:p>
         </p:txBody>
       </p:sp>
@@ -14579,7 +15575,7 @@
               </a:lnSpc>
             </a:pPr>
             <a:r>
-              <a:rPr sz="1800" b="1" spc="-30">
+              <a:rPr sz="1800" b="1" spc="-30" dirty="0" err="1">
                 <a:solidFill>
                   <a:srgbClr val="111111"/>
                 </a:solidFill>
@@ -14587,6 +15583,12 @@
               </a:rPr>
               <a:t>零安裝</a:t>
             </a:r>
+            <a:endParaRPr sz="1800" b="1" spc="-30" dirty="0">
+              <a:solidFill>
+                <a:srgbClr val="111111"/>
+              </a:solidFill>
+              <a:latin typeface="Microsoft JhengHei"/>
+            </a:endParaRPr>
           </a:p>
         </p:txBody>
       </p:sp>
@@ -14731,7 +15733,7 @@
               </a:lnSpc>
             </a:pPr>
             <a:r>
-              <a:rPr sz="1800" b="1" spc="-30">
+              <a:rPr sz="1800" b="1" spc="-30" dirty="0">
                 <a:solidFill>
                   <a:srgbClr val="111111"/>
                 </a:solidFill>
@@ -14751,33 +15753,75 @@
         <p:spPr>
           <a:xfrm>
             <a:off x="5669280" y="3520440"/>
-            <a:ext cx="5760720" cy="457200"/>
-          </a:xfrm>
-          <a:prstGeom prst="rect">
-            <a:avLst/>
-          </a:prstGeom>
-          <a:noFill/>
-        </p:spPr>
-        <p:txBody>
-          <a:bodyPr wrap="square" lIns="45720" tIns="18288" rIns="45720" bIns="18288" anchor="t">
-            <a:spAutoFit/>
-          </a:bodyPr>
-          <a:lstStyle/>
-          <a:p>
-            <a:pPr algn="l">
-              <a:lnSpc>
-                <a:spcPct val="135000"/>
-              </a:lnSpc>
-            </a:pPr>
-            <a:r>
-              <a:rPr sz="1500" b="0" spc="-20">
+            <a:ext cx="5760720" cy="314766"/>
+          </a:xfrm>
+          <a:prstGeom prst="rect">
+            <a:avLst/>
+          </a:prstGeom>
+          <a:noFill/>
+        </p:spPr>
+        <p:txBody>
+          <a:bodyPr wrap="square" lIns="45720" tIns="18288" rIns="45720" bIns="18288" anchor="t">
+            <a:spAutoFit/>
+          </a:bodyPr>
+          <a:lstStyle/>
+          <a:p>
+            <a:pPr algn="l">
+              <a:lnSpc>
+                <a:spcPct val="135000"/>
+              </a:lnSpc>
+            </a:pPr>
+            <a:r>
+              <a:rPr sz="1500" b="0" spc="-20" dirty="0">
                 <a:solidFill>
                   <a:srgbClr val="3A3A3A"/>
                 </a:solidFill>
                 <a:latin typeface="Microsoft JhengHei"/>
               </a:rPr>
-              <a:t>放 S + R + K（設一次用多次）</a:t>
-            </a:r>
+              <a:t>放 S + R + </a:t>
+            </a:r>
+            <a:r>
+              <a:rPr sz="1500" b="0" spc="-20" dirty="0" err="1">
+                <a:solidFill>
+                  <a:srgbClr val="3A3A3A"/>
+                </a:solidFill>
+                <a:latin typeface="Microsoft JhengHei"/>
+              </a:rPr>
+              <a:t>K（設一次用多次</a:t>
+            </a:r>
+            <a:r>
+              <a:rPr sz="1500" b="0" spc="-20" dirty="0">
+                <a:solidFill>
+                  <a:srgbClr val="3A3A3A"/>
+                </a:solidFill>
+                <a:latin typeface="Microsoft JhengHei"/>
+              </a:rPr>
+              <a:t>）</a:t>
+            </a:r>
+            <a:r>
+              <a:rPr lang="en-US" sz="1500" b="0" spc="-20" dirty="0">
+                <a:solidFill>
+                  <a:srgbClr val="3A3A3A"/>
+                </a:solidFill>
+                <a:latin typeface="Microsoft JhengHei"/>
+              </a:rPr>
+              <a:t>  </a:t>
+            </a:r>
+            <a:r>
+              <a:rPr lang="zh-TW" altLang="en-US" sz="1500" b="0" spc="-20" dirty="0">
+                <a:solidFill>
+                  <a:srgbClr val="3A3A3A"/>
+                </a:solidFill>
+                <a:latin typeface="Microsoft JhengHei"/>
+              </a:rPr>
+              <a:t>寫成一個挖控模板</a:t>
+            </a:r>
+            <a:endParaRPr sz="1500" b="0" spc="-20" dirty="0">
+              <a:solidFill>
+                <a:srgbClr val="3A3A3A"/>
+              </a:solidFill>
+              <a:latin typeface="Microsoft JhengHei"/>
+            </a:endParaRPr>
           </a:p>
         </p:txBody>
       </p:sp>
@@ -14883,7 +15927,7 @@
               </a:lnSpc>
             </a:pPr>
             <a:r>
-              <a:rPr sz="1800" b="1" spc="-30">
+              <a:rPr sz="1800" b="1" spc="-30" dirty="0">
                 <a:solidFill>
                   <a:srgbClr val="111111"/>
                 </a:solidFill>
@@ -14922,13 +15966,22 @@
               </a:lnSpc>
             </a:pPr>
             <a:r>
-              <a:rPr sz="1500" b="0" spc="-20">
+              <a:rPr sz="1500" b="0" spc="-20" dirty="0" err="1">
                 <a:solidFill>
                   <a:srgbClr val="3A3A3A"/>
                 </a:solidFill>
                 <a:latin typeface="Microsoft JhengHei"/>
               </a:rPr>
-              <a:t>每次放 T + I + E</a:t>
+              <a:t>每次放</a:t>
+            </a:r>
+            <a:r>
+              <a:rPr sz="1500" b="0" spc="-20" dirty="0">
+                <a:solidFill>
+                  <a:srgbClr val="3A3A3A"/>
+                </a:solidFill>
+                <a:latin typeface="Microsoft JhengHei"/>
+              </a:rPr>
+              <a:t> T + I + E</a:t>
             </a:r>
           </a:p>
         </p:txBody>
@@ -15405,33 +16458,57 @@
         <p:spPr>
           <a:xfrm>
             <a:off x="731520" y="1188720"/>
-            <a:ext cx="10698480" cy="914400"/>
-          </a:xfrm>
-          <a:prstGeom prst="rect">
-            <a:avLst/>
-          </a:prstGeom>
-          <a:noFill/>
-        </p:spPr>
-        <p:txBody>
-          <a:bodyPr wrap="square" lIns="45720" tIns="18288" rIns="45720" bIns="18288" anchor="t">
-            <a:spAutoFit/>
-          </a:bodyPr>
-          <a:lstStyle/>
-          <a:p>
-            <a:pPr algn="l">
-              <a:lnSpc>
-                <a:spcPct val="135000"/>
-              </a:lnSpc>
-            </a:pPr>
-            <a:r>
-              <a:rPr sz="3800" b="1" spc="-130">
+            <a:ext cx="10698480" cy="666786"/>
+          </a:xfrm>
+          <a:prstGeom prst="rect">
+            <a:avLst/>
+          </a:prstGeom>
+          <a:noFill/>
+        </p:spPr>
+        <p:txBody>
+          <a:bodyPr wrap="square" lIns="45720" tIns="18288" rIns="45720" bIns="18288" anchor="t">
+            <a:spAutoFit/>
+          </a:bodyPr>
+          <a:lstStyle/>
+          <a:p>
+            <a:pPr>
+              <a:lnSpc>
+                <a:spcPct val="135000"/>
+              </a:lnSpc>
+            </a:pPr>
+            <a:r>
+              <a:rPr sz="3400" b="1" spc="-120" dirty="0" err="1">
                 <a:solidFill>
                   <a:srgbClr val="111111"/>
                 </a:solidFill>
                 <a:latin typeface="Microsoft JhengHei"/>
               </a:rPr>
-              <a:t>實作 1：STRIKE 填空套版</a:t>
-            </a:r>
+              <a:t>實作</a:t>
+            </a:r>
+            <a:r>
+              <a:rPr sz="3400" b="1" spc="-120" dirty="0">
+                <a:solidFill>
+                  <a:srgbClr val="111111"/>
+                </a:solidFill>
+                <a:latin typeface="Microsoft JhengHei"/>
+              </a:rPr>
+              <a:t> 1：STRIKE </a:t>
+            </a:r>
+            <a:r>
+              <a:rPr sz="3400" b="1" spc="-120" dirty="0" err="1">
+                <a:solidFill>
+                  <a:srgbClr val="111111"/>
+                </a:solidFill>
+                <a:latin typeface="Microsoft JhengHei"/>
+              </a:rPr>
+              <a:t>填空套版</a:t>
+            </a:r>
+            <a:endParaRPr sz="3400" b="1" spc="-120" dirty="0">
+              <a:solidFill>
+                <a:srgbClr val="111111"/>
+              </a:solidFill>
+              <a:latin typeface="Microsoft JhengHei"/>
+            </a:endParaRPr>
           </a:p>
         </p:txBody>
       </p:sp>
@@ -15943,13 +17020,40 @@
               </a:lnSpc>
             </a:pPr>
             <a:r>
-              <a:rPr sz="3400" b="1" spc="-120">
+              <a:rPr sz="3400" b="1" spc="-120" dirty="0" err="1">
                 <a:solidFill>
                   <a:srgbClr val="111111"/>
                 </a:solidFill>
                 <a:latin typeface="Microsoft JhengHei"/>
               </a:rPr>
-              <a:t>實作 2：用 STRIKE 寫出你的 PRD</a:t>
+              <a:t>實作</a:t>
+            </a:r>
+            <a:r>
+              <a:rPr sz="3400" b="1" spc="-120" dirty="0">
+                <a:solidFill>
+                  <a:srgbClr val="111111"/>
+                </a:solidFill>
+                <a:latin typeface="Microsoft JhengHei"/>
+              </a:rPr>
+              <a:t> 2：用 STRIKE </a:t>
+            </a:r>
+            <a:r>
+              <a:rPr sz="3400" b="1" spc="-120" dirty="0" err="1">
+                <a:solidFill>
+                  <a:srgbClr val="111111"/>
+                </a:solidFill>
+                <a:latin typeface="Microsoft JhengHei"/>
+              </a:rPr>
+              <a:t>寫出你的</a:t>
+            </a:r>
+            <a:r>
+              <a:rPr sz="3400" b="1" spc="-120" dirty="0">
+                <a:solidFill>
+                  <a:srgbClr val="111111"/>
+                </a:solidFill>
+                <a:latin typeface="Microsoft JhengHei"/>
+              </a:rPr>
+              <a:t> PRD</a:t>
             </a:r>
           </a:p>
         </p:txBody>
@@ -18168,7 +19272,7 @@
               </a:lnSpc>
             </a:pPr>
             <a:r>
-              <a:rPr sz="2000" b="1" spc="-30">
+              <a:rPr sz="2000" b="1" spc="-30" dirty="0" err="1">
                 <a:solidFill>
                   <a:srgbClr val="111111"/>
                 </a:solidFill>
@@ -18176,6 +19280,12 @@
               </a:rPr>
               <a:t>定義問題</a:t>
             </a:r>
+            <a:endParaRPr sz="2000" b="1" spc="-30" dirty="0">
+              <a:solidFill>
+                <a:srgbClr val="111111"/>
+              </a:solidFill>
+              <a:latin typeface="Microsoft JhengHei"/>
+            </a:endParaRPr>
           </a:p>
         </p:txBody>
       </p:sp>
@@ -18246,7 +19356,7 @@
               </a:lnSpc>
             </a:pPr>
             <a:r>
-              <a:rPr sz="2000" b="1" spc="-30">
+              <a:rPr sz="2000" b="1" spc="-30" dirty="0" err="1">
                 <a:solidFill>
                   <a:srgbClr val="111111"/>
                 </a:solidFill>
@@ -18254,6 +19364,12 @@
               </a:rPr>
               <a:t>描述需求</a:t>
             </a:r>
+            <a:endParaRPr sz="2000" b="1" spc="-30" dirty="0">
+              <a:solidFill>
+                <a:srgbClr val="111111"/>
+              </a:solidFill>
+              <a:latin typeface="Microsoft JhengHei"/>
+            </a:endParaRPr>
           </a:p>
         </p:txBody>
       </p:sp>
@@ -18324,7 +19440,7 @@
               </a:lnSpc>
             </a:pPr>
             <a:r>
-              <a:rPr sz="2000" b="1" spc="-30">
+              <a:rPr sz="2000" b="1" spc="-30" dirty="0" err="1">
                 <a:solidFill>
                   <a:srgbClr val="111111"/>
                 </a:solidFill>
@@ -18332,6 +19448,12 @@
               </a:rPr>
               <a:t>驗證結果</a:t>
             </a:r>
+            <a:endParaRPr sz="2000" b="1" spc="-30" dirty="0">
+              <a:solidFill>
+                <a:srgbClr val="111111"/>
+              </a:solidFill>
+              <a:latin typeface="Microsoft JhengHei"/>
+            </a:endParaRPr>
           </a:p>
         </p:txBody>
       </p:sp>
@@ -20633,7 +21755,7 @@
               </a:lnSpc>
             </a:pPr>
             <a:r>
-              <a:rPr sz="1400" b="0" spc="-20">
+              <a:rPr sz="1400" b="0" spc="-20" dirty="0" err="1">
                 <a:solidFill>
                   <a:srgbClr val="8A8A8A"/>
                 </a:solidFill>
@@ -20641,6 +21763,12 @@
               </a:rPr>
               <a:t>跑起來、點一點、貼資料試</a:t>
             </a:r>
+            <a:endParaRPr sz="1400" b="0" spc="-20" dirty="0">
+              <a:solidFill>
+                <a:srgbClr val="8A8A8A"/>
+              </a:solidFill>
+              <a:latin typeface="Microsoft JhengHei"/>
+            </a:endParaRPr>
           </a:p>
         </p:txBody>
       </p:sp>
@@ -22698,13 +23826,58 @@
               </a:lnSpc>
             </a:pPr>
             <a:r>
-              <a:rPr sz="1800" b="0" spc="-20">
+              <a:rPr sz="1800" b="0" spc="-20" dirty="0" err="1">
                 <a:solidFill>
                   <a:srgbClr val="3A3A3A"/>
                 </a:solidFill>
                 <a:latin typeface="Microsoft JhengHei"/>
               </a:rPr>
-              <a:t>講師把一份 PRD 丟進 Antigravity，全程走完五步流程，現場做出一個小工具。</a:t>
+              <a:t>講師把一份</a:t>
+            </a:r>
+            <a:r>
+              <a:rPr sz="1800" b="0" spc="-20" dirty="0">
+                <a:solidFill>
+                  <a:srgbClr val="3A3A3A"/>
+                </a:solidFill>
+                <a:latin typeface="Microsoft JhengHei"/>
+              </a:rPr>
+              <a:t> PRD </a:t>
+            </a:r>
+            <a:r>
+              <a:rPr sz="1800" b="0" spc="-20" dirty="0" err="1">
+                <a:solidFill>
+                  <a:srgbClr val="3A3A3A"/>
+                </a:solidFill>
+                <a:latin typeface="Microsoft JhengHei"/>
+              </a:rPr>
+              <a:t>丟進</a:t>
+            </a:r>
+            <a:r>
+              <a:rPr sz="1800" b="0" spc="-20" dirty="0">
+                <a:solidFill>
+                  <a:srgbClr val="3A3A3A"/>
+                </a:solidFill>
+                <a:latin typeface="Microsoft JhengHei"/>
+              </a:rPr>
+              <a:t> </a:t>
+            </a:r>
+            <a:r>
+              <a:rPr sz="1800" b="0" spc="-20" dirty="0" err="1">
+                <a:solidFill>
+                  <a:srgbClr val="3A3A3A"/>
+                </a:solidFill>
+                <a:latin typeface="Microsoft JhengHei"/>
+              </a:rPr>
+              <a:t>Antigravity，全程走完五步流程，現場做出一個小工具</a:t>
+            </a:r>
+            <a:r>
+              <a:rPr sz="1800" b="0" spc="-20" dirty="0">
+                <a:solidFill>
+                  <a:srgbClr val="3A3A3A"/>
+                </a:solidFill>
+                <a:latin typeface="Microsoft JhengHei"/>
+              </a:rPr>
+              <a:t>。</a:t>
             </a:r>
           </a:p>
         </p:txBody>
@@ -24886,13 +26059,31 @@
               </a:lnSpc>
             </a:pPr>
             <a:r>
-              <a:rPr sz="1800" b="0" spc="-20">
+              <a:rPr sz="1800" b="0" spc="-20" dirty="0">
                 <a:solidFill>
                   <a:srgbClr val="3A3A3A"/>
                 </a:solidFill>
                 <a:latin typeface="Microsoft JhengHei"/>
               </a:rPr>
-              <a:t>□   加匯出 CSV / JSON</a:t>
+              <a:t>□   </a:t>
+            </a:r>
+            <a:r>
+              <a:rPr sz="1800" b="0" spc="-20" dirty="0" err="1">
+                <a:solidFill>
+                  <a:srgbClr val="3A3A3A"/>
+                </a:solidFill>
+                <a:latin typeface="Microsoft JhengHei"/>
+              </a:rPr>
+              <a:t>加匯出</a:t>
+            </a:r>
+            <a:r>
+              <a:rPr sz="1800" b="0" spc="-20" dirty="0">
+                <a:solidFill>
+                  <a:srgbClr val="3A3A3A"/>
+                </a:solidFill>
+                <a:latin typeface="Microsoft JhengHei"/>
+              </a:rPr>
+              <a:t> CSV / JSON</a:t>
             </a:r>
           </a:p>
         </p:txBody>
@@ -24964,14 +26155,29 @@
               </a:lnSpc>
             </a:pPr>
             <a:r>
-              <a:rPr sz="1800" b="0" spc="-20">
+              <a:rPr sz="1800" b="0" spc="-20" dirty="0">
                 <a:solidFill>
                   <a:srgbClr val="3A3A3A"/>
                 </a:solidFill>
                 <a:latin typeface="Microsoft JhengHei"/>
               </a:rPr>
-              <a:t>□   加歷史紀錄</a:t>
-            </a:r>
+              <a:t>□   </a:t>
+            </a:r>
+            <a:r>
+              <a:rPr sz="1800" b="0" spc="-20" dirty="0" err="1">
+                <a:solidFill>
+                  <a:srgbClr val="3A3A3A"/>
+                </a:solidFill>
+                <a:latin typeface="Microsoft JhengHei"/>
+              </a:rPr>
+              <a:t>加歷史紀錄</a:t>
+            </a:r>
+            <a:endParaRPr sz="1800" b="0" spc="-20" dirty="0">
+              <a:solidFill>
+                <a:srgbClr val="3A3A3A"/>
+              </a:solidFill>
+              <a:latin typeface="Microsoft JhengHei"/>
+            </a:endParaRPr>
           </a:p>
         </p:txBody>
       </p:sp>
@@ -25003,14 +26209,47 @@
               </a:lnSpc>
             </a:pPr>
             <a:r>
-              <a:rPr sz="1800" b="0" spc="-20">
+              <a:rPr sz="1800" b="0" spc="-20" dirty="0">
                 <a:solidFill>
                   <a:srgbClr val="3A3A3A"/>
                 </a:solidFill>
                 <a:latin typeface="Microsoft JhengHei"/>
               </a:rPr>
-              <a:t>□   加搜尋 / 篩選</a:t>
-            </a:r>
+              <a:t>□   </a:t>
+            </a:r>
+            <a:r>
+              <a:rPr sz="1800" b="0" spc="-20" dirty="0" err="1">
+                <a:solidFill>
+                  <a:srgbClr val="3A3A3A"/>
+                </a:solidFill>
+                <a:latin typeface="Microsoft JhengHei"/>
+              </a:rPr>
+              <a:t>加搜尋</a:t>
+            </a:r>
+            <a:r>
+              <a:rPr sz="1800" b="0" spc="-20" dirty="0">
+                <a:solidFill>
+                  <a:srgbClr val="3A3A3A"/>
+                </a:solidFill>
+                <a:latin typeface="Microsoft JhengHei"/>
+              </a:rPr>
+              <a:t> / </a:t>
+            </a:r>
+            <a:r>
+              <a:rPr sz="1800" b="0" spc="-20" dirty="0" err="1">
+                <a:solidFill>
+                  <a:srgbClr val="3A3A3A"/>
+                </a:solidFill>
+                <a:latin typeface="Microsoft JhengHei"/>
+              </a:rPr>
+              <a:t>篩選</a:t>
+            </a:r>
+            <a:endParaRPr sz="1800" b="0" spc="-20" dirty="0">
+              <a:solidFill>
+                <a:srgbClr val="3A3A3A"/>
+              </a:solidFill>
+              <a:latin typeface="Microsoft JhengHei"/>
+            </a:endParaRPr>
           </a:p>
         </p:txBody>
       </p:sp>
@@ -35137,13 +36376,40 @@
               </a:lnSpc>
             </a:pPr>
             <a:r>
-              <a:rPr sz="2000" b="0" spc="-30">
+              <a:rPr sz="2000" b="0" spc="-30" dirty="0" err="1">
                 <a:solidFill>
                   <a:srgbClr val="111111"/>
                 </a:solidFill>
                 <a:latin typeface="Microsoft JhengHei"/>
               </a:rPr>
-              <a:t>最大的 AHA moment 是哪個？</a:t>
+              <a:t>最大的</a:t>
+            </a:r>
+            <a:r>
+              <a:rPr sz="2000" b="0" spc="-30" dirty="0">
+                <a:solidFill>
+                  <a:srgbClr val="111111"/>
+                </a:solidFill>
+                <a:latin typeface="Microsoft JhengHei"/>
+              </a:rPr>
+              <a:t> AHA moment </a:t>
+            </a:r>
+            <a:r>
+              <a:rPr sz="2000" b="0" spc="-30" dirty="0" err="1">
+                <a:solidFill>
+                  <a:srgbClr val="111111"/>
+                </a:solidFill>
+                <a:latin typeface="Microsoft JhengHei"/>
+              </a:rPr>
+              <a:t>是哪個</a:t>
+            </a:r>
+            <a:r>
+              <a:rPr sz="2000" b="0" spc="-30" dirty="0">
+                <a:solidFill>
+                  <a:srgbClr val="111111"/>
+                </a:solidFill>
+                <a:latin typeface="Microsoft JhengHei"/>
+              </a:rPr>
+              <a:t>？</a:t>
             </a:r>
           </a:p>
         </p:txBody>
@@ -35893,13 +37159,22 @@
               </a:lnSpc>
             </a:pPr>
             <a:r>
-              <a:rPr sz="1600" b="0" spc="-20">
+              <a:rPr sz="1600" b="0" spc="-20" dirty="0" err="1">
                 <a:solidFill>
                   <a:srgbClr val="111111"/>
                 </a:solidFill>
                 <a:latin typeface="Microsoft JhengHei"/>
               </a:rPr>
-              <a:t>找痛點（你今天要做什麼）</a:t>
+              <a:t>找痛點（你今天要做什麼</a:t>
+            </a:r>
+            <a:r>
+              <a:rPr sz="1600" b="0" spc="-20" dirty="0">
+                <a:solidFill>
+                  <a:srgbClr val="111111"/>
+                </a:solidFill>
+                <a:latin typeface="Microsoft JhengHei"/>
+              </a:rPr>
+              <a:t>）</a:t>
             </a:r>
           </a:p>
         </p:txBody>
@@ -36045,13 +37320,31 @@
               </a:lnSpc>
             </a:pPr>
             <a:r>
-              <a:rPr sz="1600" b="0" spc="-20">
+              <a:rPr sz="1600" b="0" spc="-20" dirty="0">
                 <a:solidFill>
                   <a:srgbClr val="111111"/>
                 </a:solidFill>
                 <a:latin typeface="Microsoft JhengHei"/>
               </a:rPr>
-              <a:t>STRIKE 戰法 × AI Studio</a:t>
+              <a:t>STRIKE </a:t>
+            </a:r>
+            <a:r>
+              <a:rPr sz="1600" b="0" spc="-20" dirty="0" err="1">
+                <a:solidFill>
+                  <a:srgbClr val="111111"/>
+                </a:solidFill>
+                <a:latin typeface="Microsoft JhengHei"/>
+              </a:rPr>
+              <a:t>戰法</a:t>
+            </a:r>
+            <a:r>
+              <a:rPr sz="1600" b="0" spc="-20" dirty="0">
+                <a:solidFill>
+                  <a:srgbClr val="111111"/>
+                </a:solidFill>
+                <a:latin typeface="Microsoft JhengHei"/>
+              </a:rPr>
+              <a:t> × AI Studio</a:t>
             </a:r>
           </a:p>
         </p:txBody>
@@ -46585,32 +47878,134 @@
         <p:spPr>
           <a:xfrm>
             <a:off x="731520" y="1965960"/>
-            <a:ext cx="10698480" cy="457200"/>
-          </a:xfrm>
-          <a:prstGeom prst="rect">
-            <a:avLst/>
-          </a:prstGeom>
-          <a:noFill/>
-        </p:spPr>
-        <p:txBody>
-          <a:bodyPr wrap="square" lIns="45720" tIns="18288" rIns="45720" bIns="18288" anchor="t">
-            <a:spAutoFit/>
-          </a:bodyPr>
-          <a:lstStyle/>
-          <a:p>
-            <a:pPr algn="l">
-              <a:lnSpc>
-                <a:spcPct val="135000"/>
-              </a:lnSpc>
-            </a:pPr>
-            <a:r>
-              <a:rPr sz="1600" b="0" spc="-20">
+            <a:ext cx="10698480" cy="334900"/>
+          </a:xfrm>
+          <a:prstGeom prst="rect">
+            <a:avLst/>
+          </a:prstGeom>
+          <a:noFill/>
+        </p:spPr>
+        <p:txBody>
+          <a:bodyPr wrap="square" lIns="45720" tIns="18288" rIns="45720" bIns="18288" anchor="t">
+            <a:spAutoFit/>
+          </a:bodyPr>
+          <a:lstStyle/>
+          <a:p>
+            <a:pPr>
+              <a:lnSpc>
+                <a:spcPct val="135000"/>
+              </a:lnSpc>
+            </a:pPr>
+            <a:r>
+              <a:rPr sz="1600" spc="-20" dirty="0" err="1">
                 <a:solidFill>
                   <a:srgbClr val="8A8A8A"/>
                 </a:solidFill>
                 <a:latin typeface="Microsoft JhengHei"/>
               </a:rPr>
-              <a:t>初學者第一個專案：① + ③ 過關就行。</a:t>
+              <a:t>初學者第一個專案</a:t>
+            </a:r>
+            <a:r>
+              <a:rPr sz="1600" spc="-20" dirty="0">
+                <a:solidFill>
+                  <a:srgbClr val="8A8A8A"/>
+                </a:solidFill>
+                <a:latin typeface="Microsoft JhengHei"/>
+              </a:rPr>
+              <a:t>：</a:t>
+            </a:r>
+            <a:r>
+              <a:rPr lang="zh-TW" altLang="en-US" sz="1600" spc="-20" dirty="0">
+                <a:solidFill>
+                  <a:srgbClr val="8A8A8A"/>
+                </a:solidFill>
+                <a:latin typeface="微軟正黑體" panose="020B0604030504040204" pitchFamily="34" charset="-120"/>
+                <a:ea typeface="微軟正黑體" panose="020B0604030504040204" pitchFamily="34" charset="-120"/>
+              </a:rPr>
+              <a:t>①</a:t>
+            </a:r>
+            <a:r>
+              <a:rPr lang="zh-TW" altLang="en-US" sz="1600" spc="-20" dirty="0">
+                <a:solidFill>
+                  <a:srgbClr val="8A8A8A"/>
+                </a:solidFill>
+                <a:latin typeface="Microsoft JhengHei"/>
+              </a:rPr>
+              <a:t> </a:t>
+            </a:r>
+            <a:r>
+              <a:rPr lang="en-US" altLang="zh-TW" sz="1600" spc="-20" dirty="0">
+                <a:solidFill>
+                  <a:srgbClr val="8A8A8A"/>
+                </a:solidFill>
+                <a:latin typeface="Microsoft JhengHei"/>
+              </a:rPr>
+              <a:t>+</a:t>
+            </a:r>
+            <a:r>
+              <a:rPr lang="zh-TW" altLang="en-US" sz="1600" spc="-20" dirty="0">
+                <a:solidFill>
+                  <a:srgbClr val="8A8A8A"/>
+                </a:solidFill>
+                <a:latin typeface="Microsoft JhengHei"/>
+              </a:rPr>
+              <a:t> </a:t>
+            </a:r>
+            <a:r>
+              <a:rPr lang="zh-TW" altLang="en-US" sz="1600" spc="-20" dirty="0">
+                <a:solidFill>
+                  <a:srgbClr val="8A8A8A"/>
+                </a:solidFill>
+                <a:latin typeface="微軟正黑體" panose="020B0604030504040204" pitchFamily="34" charset="-120"/>
+                <a:ea typeface="微軟正黑體" panose="020B0604030504040204" pitchFamily="34" charset="-120"/>
+              </a:rPr>
+              <a:t>②</a:t>
+            </a:r>
+            <a:r>
+              <a:rPr lang="en-US" altLang="zh-TW" sz="1600" spc="-20" dirty="0">
+                <a:solidFill>
+                  <a:srgbClr val="8A8A8A"/>
+                </a:solidFill>
+                <a:latin typeface="Microsoft JhengHei"/>
+              </a:rPr>
+              <a:t> + </a:t>
+            </a:r>
+            <a:r>
+              <a:rPr lang="zh-TW" altLang="en-US" sz="1600" spc="-20" dirty="0">
+                <a:solidFill>
+                  <a:srgbClr val="8A8A8A"/>
+                </a:solidFill>
+                <a:latin typeface="微軟正黑體" panose="020B0604030504040204" pitchFamily="34" charset="-120"/>
+                <a:ea typeface="微軟正黑體" panose="020B0604030504040204" pitchFamily="34" charset="-120"/>
+              </a:rPr>
+              <a:t>③</a:t>
+            </a:r>
+            <a:r>
+              <a:rPr lang="zh-TW" altLang="en-US" sz="1600" spc="-20" dirty="0">
+                <a:solidFill>
+                  <a:srgbClr val="8A8A8A"/>
+                </a:solidFill>
+                <a:latin typeface="Microsoft JhengHei"/>
+              </a:rPr>
+              <a:t> </a:t>
+            </a:r>
+            <a:r>
+              <a:rPr sz="1600" spc="-20" dirty="0" err="1">
+                <a:solidFill>
+                  <a:srgbClr val="8A8A8A"/>
+                </a:solidFill>
+                <a:latin typeface="Microsoft JhengHei"/>
+              </a:rPr>
+              <a:t>過關就行</a:t>
+            </a:r>
+            <a:r>
+              <a:rPr sz="1600" spc="-20" dirty="0">
+                <a:solidFill>
+                  <a:srgbClr val="8A8A8A"/>
+                </a:solidFill>
+                <a:latin typeface="Microsoft JhengHei"/>
+              </a:rPr>
+              <a:t>。</a:t>
             </a:r>
           </a:p>
         </p:txBody>
@@ -46895,7 +48290,7 @@
               </a:lnSpc>
             </a:pPr>
             <a:r>
-              <a:rPr sz="2200" b="1" spc="-50">
+              <a:rPr sz="2200" b="1" spc="-50" dirty="0" err="1">
                 <a:solidFill>
                   <a:srgbClr val="111111"/>
                 </a:solidFill>
@@ -46903,6 +48298,12 @@
               </a:rPr>
               <a:t>正在付錢的痛</a:t>
             </a:r>
+            <a:endParaRPr sz="2200" b="1" spc="-50" dirty="0">
+              <a:solidFill>
+                <a:srgbClr val="111111"/>
+              </a:solidFill>
+              <a:latin typeface="Microsoft JhengHei"/>
+            </a:endParaRPr>
           </a:p>
         </p:txBody>
       </p:sp>
@@ -46934,7 +48335,7 @@
               </a:lnSpc>
             </a:pPr>
             <a:r>
-              <a:rPr sz="1400" b="0" spc="-10">
+              <a:rPr sz="1400" b="0" spc="-10" dirty="0" err="1">
                 <a:solidFill>
                   <a:srgbClr val="8A8A8A"/>
                 </a:solidFill>
@@ -46942,6 +48343,12 @@
               </a:rPr>
               <a:t>他現在花錢、花時間、花精力在解決</a:t>
             </a:r>
+            <a:endParaRPr sz="1400" b="0" spc="-10" dirty="0">
+              <a:solidFill>
+                <a:srgbClr val="8A8A8A"/>
+              </a:solidFill>
+              <a:latin typeface="Microsoft JhengHei"/>
+            </a:endParaRPr>
           </a:p>
         </p:txBody>
       </p:sp>
@@ -47060,7 +48467,7 @@
               </a:lnSpc>
             </a:pPr>
             <a:r>
-              <a:rPr sz="2200" b="1" spc="-50">
+              <a:rPr sz="2200" b="1" spc="-50" dirty="0" err="1">
                 <a:solidFill>
                   <a:srgbClr val="111111"/>
                 </a:solidFill>
@@ -47068,6 +48475,12 @@
               </a:rPr>
               <a:t>手工可交付</a:t>
             </a:r>
+            <a:endParaRPr sz="2200" b="1" spc="-50" dirty="0">
+              <a:solidFill>
+                <a:srgbClr val="111111"/>
+              </a:solidFill>
+              <a:latin typeface="Microsoft JhengHei"/>
+            </a:endParaRPr>
           </a:p>
         </p:txBody>
       </p:sp>
@@ -47206,26 +48619,26 @@
         <p:spPr>
           <a:xfrm>
             <a:off x="6583680" y="4983480"/>
-            <a:ext cx="4572000" cy="548640"/>
-          </a:xfrm>
-          <a:prstGeom prst="rect">
-            <a:avLst/>
-          </a:prstGeom>
-          <a:noFill/>
-        </p:spPr>
-        <p:txBody>
-          <a:bodyPr wrap="square" lIns="45720" tIns="18288" rIns="45720" bIns="18288" anchor="t">
-            <a:spAutoFit/>
-          </a:bodyPr>
-          <a:lstStyle/>
-          <a:p>
-            <a:pPr algn="l">
-              <a:lnSpc>
-                <a:spcPct val="135000"/>
-              </a:lnSpc>
-            </a:pPr>
-            <a:r>
-              <a:rPr sz="2200" b="1" spc="-50">
+            <a:ext cx="4572000" cy="444481"/>
+          </a:xfrm>
+          <a:prstGeom prst="rect">
+            <a:avLst/>
+          </a:prstGeom>
+          <a:noFill/>
+        </p:spPr>
+        <p:txBody>
+          <a:bodyPr wrap="square" lIns="45720" tIns="18288" rIns="45720" bIns="18288" anchor="t">
+            <a:spAutoFit/>
+          </a:bodyPr>
+          <a:lstStyle/>
+          <a:p>
+            <a:pPr algn="l">
+              <a:lnSpc>
+                <a:spcPct val="135000"/>
+              </a:lnSpc>
+            </a:pPr>
+            <a:r>
+              <a:rPr sz="2200" b="1" spc="-50" dirty="0" err="1">
                 <a:solidFill>
                   <a:srgbClr val="111111"/>
                 </a:solidFill>
@@ -47233,6 +48646,21 @@
               </a:rPr>
               <a:t>收款管道</a:t>
             </a:r>
+            <a:r>
+              <a:rPr lang="en-US" sz="2200" b="1" spc="-50" dirty="0">
+                <a:solidFill>
+                  <a:srgbClr val="111111"/>
+                </a:solidFill>
+                <a:latin typeface="Microsoft JhengHei"/>
+              </a:rPr>
+              <a:t> </a:t>
+            </a:r>
+            <a:endParaRPr sz="2200" b="1" spc="-50" dirty="0">
+              <a:solidFill>
+                <a:srgbClr val="111111"/>
+              </a:solidFill>
+              <a:latin typeface="Microsoft JhengHei"/>
+            </a:endParaRPr>
           </a:p>
         </p:txBody>
       </p:sp>
@@ -47790,7 +49218,7 @@
               </a:lnSpc>
             </a:pPr>
             <a:r>
-              <a:rPr sz="1800" b="0" spc="-20">
+              <a:rPr sz="1800" b="0" spc="-20" dirty="0" err="1">
                 <a:solidFill>
                   <a:srgbClr val="8A8A8A"/>
                 </a:solidFill>
@@ -47798,6 +49226,12 @@
               </a:rPr>
               <a:t>小企業老闆</a:t>
             </a:r>
+            <a:endParaRPr sz="1800" b="0" spc="-20" dirty="0">
+              <a:solidFill>
+                <a:srgbClr val="8A8A8A"/>
+              </a:solidFill>
+              <a:latin typeface="Microsoft JhengHei"/>
+            </a:endParaRPr>
           </a:p>
         </p:txBody>
       </p:sp>
@@ -47829,7 +49263,7 @@
               </a:lnSpc>
             </a:pPr>
             <a:r>
-              <a:rPr sz="1800" b="0" spc="-20">
+              <a:rPr sz="1800" b="0" spc="-20" dirty="0" err="1">
                 <a:solidFill>
                   <a:srgbClr val="111111"/>
                 </a:solidFill>
@@ -47837,6 +49271,12 @@
               </a:rPr>
               <a:t>我認識的王太太，開早餐店，每天晚上手動記帳</a:t>
             </a:r>
+            <a:endParaRPr sz="1800" b="0" spc="-20" dirty="0">
+              <a:solidFill>
+                <a:srgbClr val="111111"/>
+              </a:solidFill>
+              <a:latin typeface="Microsoft JhengHei"/>
+            </a:endParaRPr>
           </a:p>
         </p:txBody>
       </p:sp>
@@ -47903,7 +49343,7 @@
               </a:lnSpc>
             </a:pPr>
             <a:r>
-              <a:rPr sz="1800" b="0" spc="-20">
+              <a:rPr sz="1800" b="0" spc="-20" dirty="0" err="1">
                 <a:solidFill>
                   <a:srgbClr val="8A8A8A"/>
                 </a:solidFill>
@@ -47911,6 +49351,12 @@
               </a:rPr>
               <a:t>想學英文的人</a:t>
             </a:r>
+            <a:endParaRPr sz="1800" b="0" spc="-20" dirty="0">
+              <a:solidFill>
+                <a:srgbClr val="8A8A8A"/>
+              </a:solidFill>
+              <a:latin typeface="Microsoft JhengHei"/>
+            </a:endParaRPr>
           </a:p>
         </p:txBody>
       </p:sp>
@@ -47942,13 +49388,22 @@
               </a:lnSpc>
             </a:pPr>
             <a:r>
-              <a:rPr sz="1800" b="0" spc="-20">
+              <a:rPr sz="1800" b="0" spc="-20" dirty="0" err="1">
                 <a:solidFill>
                   <a:srgbClr val="111111"/>
                 </a:solidFill>
                 <a:latin typeface="Microsoft JhengHei"/>
               </a:rPr>
-              <a:t>我表弟，下個月要考多益 750 分</a:t>
+              <a:t>我表弟，下個月要考多益</a:t>
+            </a:r>
+            <a:r>
+              <a:rPr sz="1800" b="0" spc="-20" dirty="0">
+                <a:solidFill>
+                  <a:srgbClr val="111111"/>
+                </a:solidFill>
+                <a:latin typeface="Microsoft JhengHei"/>
+              </a:rPr>
+              <a:t> 750 分</a:t>
             </a:r>
           </a:p>
         </p:txBody>

--- a/class_plan/vibe_coding_workshop.pptx
+++ b/class_plan/vibe_coding_workshop.pptx
@@ -31408,8 +31408,8 @@
         </p:nvSpPr>
         <p:spPr>
           <a:xfrm>
-            <a:off x="731520" y="4617720"/>
-            <a:ext cx="10698480" cy="457200"/>
+            <a:off x="731520" y="4572000"/>
+            <a:ext cx="10698480" cy="411480"/>
           </a:xfrm>
           <a:prstGeom prst="rect">
             <a:avLst/>
@@ -31447,8 +31447,8 @@
         </p:nvSpPr>
         <p:spPr>
           <a:xfrm>
-            <a:off x="731520" y="5074920"/>
-            <a:ext cx="10698480" cy="457200"/>
+            <a:off x="731520" y="4983480"/>
+            <a:ext cx="10698480" cy="411480"/>
           </a:xfrm>
           <a:prstGeom prst="rect">
             <a:avLst/>
@@ -31486,8 +31486,8 @@
         </p:nvSpPr>
         <p:spPr>
           <a:xfrm>
-            <a:off x="731520" y="5669280"/>
-            <a:ext cx="10698480" cy="548640"/>
+            <a:off x="731520" y="5532120"/>
+            <a:ext cx="10698480" cy="502920"/>
           </a:xfrm>
           <a:prstGeom prst="roundRect">
             <a:avLst>
@@ -32633,7 +32633,7 @@
         </p:nvSpPr>
         <p:spPr>
           <a:xfrm>
-            <a:off x="731520" y="3200400"/>
+            <a:off x="731520" y="3154680"/>
             <a:ext cx="10698480" cy="365760"/>
           </a:xfrm>
           <a:prstGeom prst="rect">
@@ -32672,7 +32672,7 @@
         </p:nvSpPr>
         <p:spPr>
           <a:xfrm>
-            <a:off x="914400" y="3657600"/>
+            <a:off x="914400" y="3611880"/>
             <a:ext cx="4572000" cy="365760"/>
           </a:xfrm>
           <a:prstGeom prst="rect">
@@ -32711,7 +32711,7 @@
         </p:nvSpPr>
         <p:spPr>
           <a:xfrm>
-            <a:off x="5760720" y="3657600"/>
+            <a:off x="5760720" y="3611880"/>
             <a:ext cx="5669280" cy="365760"/>
           </a:xfrm>
           <a:prstGeom prst="rect">
@@ -32750,7 +32750,7 @@
         </p:nvSpPr>
         <p:spPr>
           <a:xfrm>
-            <a:off x="914400" y="4114800"/>
+            <a:off x="914400" y="4023360"/>
             <a:ext cx="4572000" cy="365760"/>
           </a:xfrm>
           <a:prstGeom prst="rect">
@@ -32789,7 +32789,7 @@
         </p:nvSpPr>
         <p:spPr>
           <a:xfrm>
-            <a:off x="5760720" y="4114800"/>
+            <a:off x="5760720" y="4023360"/>
             <a:ext cx="5669280" cy="365760"/>
           </a:xfrm>
           <a:prstGeom prst="rect">
@@ -32828,7 +32828,7 @@
         </p:nvSpPr>
         <p:spPr>
           <a:xfrm>
-            <a:off x="914400" y="4572000"/>
+            <a:off x="914400" y="4434840"/>
             <a:ext cx="4572000" cy="365760"/>
           </a:xfrm>
           <a:prstGeom prst="rect">
@@ -32867,7 +32867,7 @@
         </p:nvSpPr>
         <p:spPr>
           <a:xfrm>
-            <a:off x="5760720" y="4572000"/>
+            <a:off x="5760720" y="4434840"/>
             <a:ext cx="5669280" cy="365760"/>
           </a:xfrm>
           <a:prstGeom prst="rect">
@@ -32906,7 +32906,7 @@
         </p:nvSpPr>
         <p:spPr>
           <a:xfrm>
-            <a:off x="914400" y="5029200"/>
+            <a:off x="914400" y="4846320"/>
             <a:ext cx="4572000" cy="365760"/>
           </a:xfrm>
           <a:prstGeom prst="rect">
@@ -32945,7 +32945,7 @@
         </p:nvSpPr>
         <p:spPr>
           <a:xfrm>
-            <a:off x="5760720" y="5029200"/>
+            <a:off x="5760720" y="4846320"/>
             <a:ext cx="5669280" cy="365760"/>
           </a:xfrm>
           <a:prstGeom prst="rect">
@@ -32984,7 +32984,7 @@
         </p:nvCxnSpPr>
         <p:spPr>
           <a:xfrm>
-            <a:off x="731520" y="5669280"/>
+            <a:off x="731520" y="5440680"/>
             <a:ext cx="10698480" cy="0"/>
           </a:xfrm>
           <a:prstGeom prst="line">
@@ -33019,7 +33019,7 @@
         </p:nvSpPr>
         <p:spPr>
           <a:xfrm>
-            <a:off x="731520" y="5852160"/>
+            <a:off x="731520" y="5623560"/>
             <a:ext cx="10698480" cy="457200"/>
           </a:xfrm>
           <a:prstGeom prst="rect">
@@ -33273,26 +33273,26 @@
         <p:spPr>
           <a:xfrm>
             <a:off x="731520" y="1005840"/>
-            <a:ext cx="10698480" cy="914400"/>
-          </a:xfrm>
-          <a:prstGeom prst="rect">
-            <a:avLst/>
-          </a:prstGeom>
-          <a:noFill/>
-        </p:spPr>
-        <p:txBody>
-          <a:bodyPr wrap="square" lIns="45720" rIns="45720" tIns="18288" bIns="18288" anchor="t">
-            <a:spAutoFit/>
-          </a:bodyPr>
-          <a:lstStyle/>
-          <a:p>
-            <a:pPr algn="l">
-              <a:lnSpc>
-                <a:spcPct val="135000"/>
-              </a:lnSpc>
-            </a:pPr>
-            <a:r>
-              <a:rPr sz="3200" b="1" spc="-120">
+            <a:ext cx="10698480" cy="731520"/>
+          </a:xfrm>
+          <a:prstGeom prst="rect">
+            <a:avLst/>
+          </a:prstGeom>
+          <a:noFill/>
+        </p:spPr>
+        <p:txBody>
+          <a:bodyPr wrap="square" lIns="45720" rIns="45720" tIns="18288" bIns="18288" anchor="t">
+            <a:spAutoFit/>
+          </a:bodyPr>
+          <a:lstStyle/>
+          <a:p>
+            <a:pPr algn="l">
+              <a:lnSpc>
+                <a:spcPct val="135000"/>
+              </a:lnSpc>
+            </a:pPr>
+            <a:r>
+              <a:rPr sz="3000" b="1" spc="-120">
                 <a:solidFill>
                   <a:srgbClr val="111111"/>
                 </a:solidFill>
@@ -33303,130 +33303,727 @@
           </a:p>
         </p:txBody>
       </p:sp>
-      <p:sp>
-        <p:nvSpPr>
-          <p:cNvPr id="5" name="Rounded Rectangle 4"/>
-          <p:cNvSpPr/>
-          <p:nvPr/>
-        </p:nvSpPr>
-        <p:spPr>
-          <a:xfrm>
-            <a:off x="365760" y="2103120"/>
-            <a:ext cx="11430000" cy="2194560"/>
-          </a:xfrm>
-          <a:prstGeom prst="roundRect">
-            <a:avLst>
-              <a:gd name="adj" fmla="val 3000"/>
-            </a:avLst>
-          </a:prstGeom>
-          <a:solidFill>
-            <a:srgbClr val="FAFAFA"/>
-          </a:solidFill>
-          <a:ln w="9525">
-            <a:solidFill>
-              <a:srgbClr val="E5E5E5"/>
-            </a:solidFill>
-          </a:ln>
-        </p:spPr>
-        <p:style>
-          <a:lnRef idx="1">
-            <a:schemeClr val="accent1"/>
-          </a:lnRef>
-          <a:fillRef idx="3">
-            <a:schemeClr val="accent1"/>
-          </a:fillRef>
-          <a:effectRef idx="2">
-            <a:schemeClr val="accent1"/>
-          </a:effectRef>
-          <a:fontRef idx="minor">
-            <a:schemeClr val="lt1"/>
-          </a:fontRef>
-        </p:style>
-        <p:txBody>
-          <a:bodyPr rtlCol="0" anchor="ctr" wrap="square" lIns="274320" rIns="274320" tIns="182880" bIns="182880"/>
-          <a:lstStyle/>
-          <a:p>
-            <a:pPr algn="l">
-              <a:lnSpc>
-                <a:spcPct val="130000"/>
-              </a:lnSpc>
-            </a:pPr>
-            <a:r>
-              <a:rPr sz="1200">
-                <a:solidFill>
-                  <a:srgbClr val="111111"/>
-                </a:solidFill>
-                <a:latin typeface="Consolas"/>
-              </a:rPr>
-              <a:t>                AI Studio   Antigravity      Gemini CLI    Claude Code   Cursor</a:t>
-            </a:r>
-          </a:p>
-          <a:p>
-            <a:pPr algn="l">
-              <a:lnSpc>
-                <a:spcPct val="130000"/>
-              </a:lnSpc>
-            </a:pPr>
-            <a:r>
-              <a:rPr sz="1200">
-                <a:solidFill>
-                  <a:srgbClr val="111111"/>
-                </a:solidFill>
-                <a:latin typeface="Consolas"/>
-              </a:rPr>
-              <a:t>專案記憶        ❌          AGENTS.md *      GEMINI.md     CLAUDE.md     .cursor/rules/</a:t>
-            </a:r>
-          </a:p>
-          <a:p>
-            <a:pPr algn="l">
-              <a:lnSpc>
-                <a:spcPct val="130000"/>
-              </a:lnSpc>
-            </a:pPr>
-            <a:r>
-              <a:rPr sz="1200">
-                <a:solidFill>
-                  <a:srgbClr val="111111"/>
-                </a:solidFill>
-                <a:latin typeface="Consolas"/>
-              </a:rPr>
-              <a:t>@ 檔案引用      ❌          ✅              ✅            ✅            ✅</a:t>
-            </a:r>
-          </a:p>
-          <a:p>
-            <a:pPr algn="l">
-              <a:lnSpc>
-                <a:spcPct val="130000"/>
-              </a:lnSpc>
-            </a:pPr>
-            <a:r>
-              <a:rPr sz="1200">
-                <a:solidFill>
-                  <a:srgbClr val="111111"/>
-                </a:solidFill>
-                <a:latin typeface="Consolas"/>
-              </a:rPr>
-              <a:t>STRIKE          ✅          ✅              ✅            ✅            ✅</a:t>
-            </a:r>
-          </a:p>
-          <a:p>
-            <a:pPr algn="l">
-              <a:lnSpc>
-                <a:spcPct val="130000"/>
-              </a:lnSpc>
-            </a:pPr>
-            <a:r>
-              <a:rPr sz="1200">
-                <a:solidFill>
-                  <a:srgbClr val="111111"/>
-                </a:solidFill>
-                <a:latin typeface="Consolas"/>
-              </a:rPr>
-              <a:t>MCP             ❌          ✅              ✅            ✅            ✅</a:t>
-            </a:r>
-          </a:p>
-        </p:txBody>
-      </p:sp>
+      <p:graphicFrame>
+        <p:nvGraphicFramePr>
+          <p:cNvPr id="5" name="Table 4"/>
+          <p:cNvGraphicFramePr>
+            <a:graphicFrameLocks noGrp="1"/>
+          </p:cNvGraphicFramePr>
+          <p:nvPr/>
+        </p:nvGraphicFramePr>
+        <p:xfrm>
+          <a:off x="548640" y="1874519"/>
+          <a:ext cx="10424160" cy="2468880"/>
+        </p:xfrm>
+        <a:graphic>
+          <a:graphicData uri="http://schemas.openxmlformats.org/drawingml/2006/table">
+            <a:tbl>
+              <a:tblPr firstRow="1" bandRow="1">
+                <a:tableStyleId>{5C22544A-7EE6-4342-B048-85BDC9FD1C3A}</a:tableStyleId>
+              </a:tblPr>
+              <a:tblGrid>
+                <a:gridCol w="1828800"/>
+                <a:gridCol w="1554480"/>
+                <a:gridCol w="1828800"/>
+                <a:gridCol w="1691640"/>
+                <a:gridCol w="1691640"/>
+                <a:gridCol w="1828800"/>
+              </a:tblGrid>
+              <a:tr h="493776">
+                <a:tc>
+                  <a:txBody>
+                    <a:bodyPr/>
+                    <a:lstStyle/>
+                    <a:p>
+                      <a:pPr algn="ctr"/>
+                    </a:p>
+                  </a:txBody>
+                  <a:tcPr marL="73152" marR="73152" marT="45720" marB="45720" anchor="ctr">
+                    <a:solidFill>
+                      <a:srgbClr val="F5F5F3"/>
+                    </a:solidFill>
+                  </a:tcPr>
+                </a:tc>
+                <a:tc>
+                  <a:txBody>
+                    <a:bodyPr/>
+                    <a:lstStyle/>
+                    <a:p>
+                      <a:pPr algn="ctr"/>
+                      <a:r>
+                        <a:rPr sz="1300" b="1">
+                          <a:solidFill>
+                            <a:srgbClr val="111111"/>
+                          </a:solidFill>
+                          <a:latin typeface="Microsoft JhengHei"/>
+                        </a:rPr>
+                        <a:t>AI Studio</a:t>
+                      </a:r>
+                    </a:p>
+                  </a:txBody>
+                  <a:tcPr marL="73152" marR="73152" marT="45720" marB="45720" anchor="ctr">
+                    <a:solidFill>
+                      <a:srgbClr val="F5F5F3"/>
+                    </a:solidFill>
+                  </a:tcPr>
+                </a:tc>
+                <a:tc>
+                  <a:txBody>
+                    <a:bodyPr/>
+                    <a:lstStyle/>
+                    <a:p>
+                      <a:pPr algn="ctr"/>
+                      <a:r>
+                        <a:rPr sz="1300" b="1">
+                          <a:solidFill>
+                            <a:srgbClr val="111111"/>
+                          </a:solidFill>
+                          <a:latin typeface="Microsoft JhengHei"/>
+                        </a:rPr>
+                        <a:t>Antigravity</a:t>
+                      </a:r>
+                    </a:p>
+                  </a:txBody>
+                  <a:tcPr marL="73152" marR="73152" marT="45720" marB="45720" anchor="ctr">
+                    <a:solidFill>
+                      <a:srgbClr val="F5F5F3"/>
+                    </a:solidFill>
+                  </a:tcPr>
+                </a:tc>
+                <a:tc>
+                  <a:txBody>
+                    <a:bodyPr/>
+                    <a:lstStyle/>
+                    <a:p>
+                      <a:pPr algn="ctr"/>
+                      <a:r>
+                        <a:rPr sz="1300" b="1">
+                          <a:solidFill>
+                            <a:srgbClr val="111111"/>
+                          </a:solidFill>
+                          <a:latin typeface="Microsoft JhengHei"/>
+                        </a:rPr>
+                        <a:t>Gemini CLI</a:t>
+                      </a:r>
+                    </a:p>
+                  </a:txBody>
+                  <a:tcPr marL="73152" marR="73152" marT="45720" marB="45720" anchor="ctr">
+                    <a:solidFill>
+                      <a:srgbClr val="F5F5F3"/>
+                    </a:solidFill>
+                  </a:tcPr>
+                </a:tc>
+                <a:tc>
+                  <a:txBody>
+                    <a:bodyPr/>
+                    <a:lstStyle/>
+                    <a:p>
+                      <a:pPr algn="ctr"/>
+                      <a:r>
+                        <a:rPr sz="1300" b="1">
+                          <a:solidFill>
+                            <a:srgbClr val="111111"/>
+                          </a:solidFill>
+                          <a:latin typeface="Microsoft JhengHei"/>
+                        </a:rPr>
+                        <a:t>Claude Code</a:t>
+                      </a:r>
+                    </a:p>
+                  </a:txBody>
+                  <a:tcPr marL="73152" marR="73152" marT="45720" marB="45720" anchor="ctr">
+                    <a:solidFill>
+                      <a:srgbClr val="F5F5F3"/>
+                    </a:solidFill>
+                  </a:tcPr>
+                </a:tc>
+                <a:tc>
+                  <a:txBody>
+                    <a:bodyPr/>
+                    <a:lstStyle/>
+                    <a:p>
+                      <a:pPr algn="ctr"/>
+                      <a:r>
+                        <a:rPr sz="1300" b="1">
+                          <a:solidFill>
+                            <a:srgbClr val="111111"/>
+                          </a:solidFill>
+                          <a:latin typeface="Microsoft JhengHei"/>
+                        </a:rPr>
+                        <a:t>Cursor</a:t>
+                      </a:r>
+                    </a:p>
+                  </a:txBody>
+                  <a:tcPr marL="73152" marR="73152" marT="45720" marB="45720" anchor="ctr">
+                    <a:solidFill>
+                      <a:srgbClr val="F5F5F3"/>
+                    </a:solidFill>
+                  </a:tcPr>
+                </a:tc>
+              </a:tr>
+              <a:tr h="493776">
+                <a:tc>
+                  <a:txBody>
+                    <a:bodyPr/>
+                    <a:lstStyle/>
+                    <a:p>
+                      <a:pPr algn="l"/>
+                      <a:r>
+                        <a:rPr sz="1300" b="1">
+                          <a:solidFill>
+                            <a:srgbClr val="111111"/>
+                          </a:solidFill>
+                          <a:latin typeface="Microsoft JhengHei"/>
+                        </a:rPr>
+                        <a:t>專案記憶</a:t>
+                      </a:r>
+                    </a:p>
+                  </a:txBody>
+                  <a:tcPr marL="73152" marR="73152" marT="45720" marB="45720" anchor="ctr">
+                    <a:solidFill>
+                      <a:srgbClr val="FFFFFF"/>
+                    </a:solidFill>
+                  </a:tcPr>
+                </a:tc>
+                <a:tc>
+                  <a:txBody>
+                    <a:bodyPr/>
+                    <a:lstStyle/>
+                    <a:p>
+                      <a:pPr algn="ctr"/>
+                      <a:r>
+                        <a:rPr sz="1300" b="0">
+                          <a:solidFill>
+                            <a:srgbClr val="111111"/>
+                          </a:solidFill>
+                          <a:latin typeface="Microsoft JhengHei"/>
+                        </a:rPr>
+                        <a:t>❌</a:t>
+                      </a:r>
+                    </a:p>
+                  </a:txBody>
+                  <a:tcPr marL="73152" marR="73152" marT="45720" marB="45720" anchor="ctr">
+                    <a:solidFill>
+                      <a:srgbClr val="FFFFFF"/>
+                    </a:solidFill>
+                  </a:tcPr>
+                </a:tc>
+                <a:tc>
+                  <a:txBody>
+                    <a:bodyPr/>
+                    <a:lstStyle/>
+                    <a:p>
+                      <a:pPr algn="ctr"/>
+                      <a:r>
+                        <a:rPr sz="1300" b="0">
+                          <a:solidFill>
+                            <a:srgbClr val="111111"/>
+                          </a:solidFill>
+                          <a:latin typeface="Consolas"/>
+                        </a:rPr>
+                        <a:t>AGENTS.md *</a:t>
+                      </a:r>
+                    </a:p>
+                  </a:txBody>
+                  <a:tcPr marL="73152" marR="73152" marT="45720" marB="45720" anchor="ctr">
+                    <a:solidFill>
+                      <a:srgbClr val="FEF7E6"/>
+                    </a:solidFill>
+                  </a:tcPr>
+                </a:tc>
+                <a:tc>
+                  <a:txBody>
+                    <a:bodyPr/>
+                    <a:lstStyle/>
+                    <a:p>
+                      <a:pPr algn="ctr"/>
+                      <a:r>
+                        <a:rPr sz="1300" b="0">
+                          <a:solidFill>
+                            <a:srgbClr val="111111"/>
+                          </a:solidFill>
+                          <a:latin typeface="Consolas"/>
+                        </a:rPr>
+                        <a:t>GEMINI.md</a:t>
+                      </a:r>
+                    </a:p>
+                  </a:txBody>
+                  <a:tcPr marL="73152" marR="73152" marT="45720" marB="45720" anchor="ctr">
+                    <a:solidFill>
+                      <a:srgbClr val="FFFFFF"/>
+                    </a:solidFill>
+                  </a:tcPr>
+                </a:tc>
+                <a:tc>
+                  <a:txBody>
+                    <a:bodyPr/>
+                    <a:lstStyle/>
+                    <a:p>
+                      <a:pPr algn="ctr"/>
+                      <a:r>
+                        <a:rPr sz="1300" b="0">
+                          <a:solidFill>
+                            <a:srgbClr val="111111"/>
+                          </a:solidFill>
+                          <a:latin typeface="Consolas"/>
+                        </a:rPr>
+                        <a:t>CLAUDE.md</a:t>
+                      </a:r>
+                    </a:p>
+                  </a:txBody>
+                  <a:tcPr marL="73152" marR="73152" marT="45720" marB="45720" anchor="ctr">
+                    <a:solidFill>
+                      <a:srgbClr val="FFFFFF"/>
+                    </a:solidFill>
+                  </a:tcPr>
+                </a:tc>
+                <a:tc>
+                  <a:txBody>
+                    <a:bodyPr/>
+                    <a:lstStyle/>
+                    <a:p>
+                      <a:pPr algn="ctr"/>
+                      <a:r>
+                        <a:rPr sz="1300" b="0">
+                          <a:solidFill>
+                            <a:srgbClr val="111111"/>
+                          </a:solidFill>
+                          <a:latin typeface="Consolas"/>
+                        </a:rPr>
+                        <a:t>.cursor/rules/</a:t>
+                      </a:r>
+                    </a:p>
+                  </a:txBody>
+                  <a:tcPr marL="73152" marR="73152" marT="45720" marB="45720" anchor="ctr">
+                    <a:solidFill>
+                      <a:srgbClr val="FFFFFF"/>
+                    </a:solidFill>
+                  </a:tcPr>
+                </a:tc>
+              </a:tr>
+              <a:tr h="493776">
+                <a:tc>
+                  <a:txBody>
+                    <a:bodyPr/>
+                    <a:lstStyle/>
+                    <a:p>
+                      <a:pPr algn="l"/>
+                      <a:r>
+                        <a:rPr sz="1300" b="1">
+                          <a:solidFill>
+                            <a:srgbClr val="111111"/>
+                          </a:solidFill>
+                          <a:latin typeface="Microsoft JhengHei"/>
+                        </a:rPr>
+                        <a:t>@ 檔案引用</a:t>
+                      </a:r>
+                    </a:p>
+                  </a:txBody>
+                  <a:tcPr marL="73152" marR="73152" marT="45720" marB="45720" anchor="ctr">
+                    <a:solidFill>
+                      <a:srgbClr val="FFFFFF"/>
+                    </a:solidFill>
+                  </a:tcPr>
+                </a:tc>
+                <a:tc>
+                  <a:txBody>
+                    <a:bodyPr/>
+                    <a:lstStyle/>
+                    <a:p>
+                      <a:pPr algn="ctr"/>
+                      <a:r>
+                        <a:rPr sz="1300" b="0">
+                          <a:solidFill>
+                            <a:srgbClr val="111111"/>
+                          </a:solidFill>
+                          <a:latin typeface="Microsoft JhengHei"/>
+                        </a:rPr>
+                        <a:t>❌</a:t>
+                      </a:r>
+                    </a:p>
+                  </a:txBody>
+                  <a:tcPr marL="73152" marR="73152" marT="45720" marB="45720" anchor="ctr">
+                    <a:solidFill>
+                      <a:srgbClr val="FFFFFF"/>
+                    </a:solidFill>
+                  </a:tcPr>
+                </a:tc>
+                <a:tc>
+                  <a:txBody>
+                    <a:bodyPr/>
+                    <a:lstStyle/>
+                    <a:p>
+                      <a:pPr algn="ctr"/>
+                      <a:r>
+                        <a:rPr sz="1300" b="0">
+                          <a:solidFill>
+                            <a:srgbClr val="111111"/>
+                          </a:solidFill>
+                          <a:latin typeface="Microsoft JhengHei"/>
+                        </a:rPr>
+                        <a:t>✅</a:t>
+                      </a:r>
+                    </a:p>
+                  </a:txBody>
+                  <a:tcPr marL="73152" marR="73152" marT="45720" marB="45720" anchor="ctr">
+                    <a:solidFill>
+                      <a:srgbClr val="FFFFFF"/>
+                    </a:solidFill>
+                  </a:tcPr>
+                </a:tc>
+                <a:tc>
+                  <a:txBody>
+                    <a:bodyPr/>
+                    <a:lstStyle/>
+                    <a:p>
+                      <a:pPr algn="ctr"/>
+                      <a:r>
+                        <a:rPr sz="1300" b="0">
+                          <a:solidFill>
+                            <a:srgbClr val="111111"/>
+                          </a:solidFill>
+                          <a:latin typeface="Microsoft JhengHei"/>
+                        </a:rPr>
+                        <a:t>✅</a:t>
+                      </a:r>
+                    </a:p>
+                  </a:txBody>
+                  <a:tcPr marL="73152" marR="73152" marT="45720" marB="45720" anchor="ctr">
+                    <a:solidFill>
+                      <a:srgbClr val="FFFFFF"/>
+                    </a:solidFill>
+                  </a:tcPr>
+                </a:tc>
+                <a:tc>
+                  <a:txBody>
+                    <a:bodyPr/>
+                    <a:lstStyle/>
+                    <a:p>
+                      <a:pPr algn="ctr"/>
+                      <a:r>
+                        <a:rPr sz="1300" b="0">
+                          <a:solidFill>
+                            <a:srgbClr val="111111"/>
+                          </a:solidFill>
+                          <a:latin typeface="Microsoft JhengHei"/>
+                        </a:rPr>
+                        <a:t>✅</a:t>
+                      </a:r>
+                    </a:p>
+                  </a:txBody>
+                  <a:tcPr marL="73152" marR="73152" marT="45720" marB="45720" anchor="ctr">
+                    <a:solidFill>
+                      <a:srgbClr val="FFFFFF"/>
+                    </a:solidFill>
+                  </a:tcPr>
+                </a:tc>
+                <a:tc>
+                  <a:txBody>
+                    <a:bodyPr/>
+                    <a:lstStyle/>
+                    <a:p>
+                      <a:pPr algn="ctr"/>
+                      <a:r>
+                        <a:rPr sz="1300" b="0">
+                          <a:solidFill>
+                            <a:srgbClr val="111111"/>
+                          </a:solidFill>
+                          <a:latin typeface="Microsoft JhengHei"/>
+                        </a:rPr>
+                        <a:t>✅</a:t>
+                      </a:r>
+                    </a:p>
+                  </a:txBody>
+                  <a:tcPr marL="73152" marR="73152" marT="45720" marB="45720" anchor="ctr">
+                    <a:solidFill>
+                      <a:srgbClr val="FFFFFF"/>
+                    </a:solidFill>
+                  </a:tcPr>
+                </a:tc>
+              </a:tr>
+              <a:tr h="493776">
+                <a:tc>
+                  <a:txBody>
+                    <a:bodyPr/>
+                    <a:lstStyle/>
+                    <a:p>
+                      <a:pPr algn="l"/>
+                      <a:r>
+                        <a:rPr sz="1300" b="1">
+                          <a:solidFill>
+                            <a:srgbClr val="111111"/>
+                          </a:solidFill>
+                          <a:latin typeface="Microsoft JhengHei"/>
+                        </a:rPr>
+                        <a:t>STRIKE</a:t>
+                      </a:r>
+                    </a:p>
+                  </a:txBody>
+                  <a:tcPr marL="73152" marR="73152" marT="45720" marB="45720" anchor="ctr">
+                    <a:solidFill>
+                      <a:srgbClr val="FFFFFF"/>
+                    </a:solidFill>
+                  </a:tcPr>
+                </a:tc>
+                <a:tc>
+                  <a:txBody>
+                    <a:bodyPr/>
+                    <a:lstStyle/>
+                    <a:p>
+                      <a:pPr algn="ctr"/>
+                      <a:r>
+                        <a:rPr sz="1300" b="0">
+                          <a:solidFill>
+                            <a:srgbClr val="111111"/>
+                          </a:solidFill>
+                          <a:latin typeface="Microsoft JhengHei"/>
+                        </a:rPr>
+                        <a:t>✅</a:t>
+                      </a:r>
+                    </a:p>
+                  </a:txBody>
+                  <a:tcPr marL="73152" marR="73152" marT="45720" marB="45720" anchor="ctr">
+                    <a:solidFill>
+                      <a:srgbClr val="FFFFFF"/>
+                    </a:solidFill>
+                  </a:tcPr>
+                </a:tc>
+                <a:tc>
+                  <a:txBody>
+                    <a:bodyPr/>
+                    <a:lstStyle/>
+                    <a:p>
+                      <a:pPr algn="ctr"/>
+                      <a:r>
+                        <a:rPr sz="1300" b="0">
+                          <a:solidFill>
+                            <a:srgbClr val="111111"/>
+                          </a:solidFill>
+                          <a:latin typeface="Microsoft JhengHei"/>
+                        </a:rPr>
+                        <a:t>✅</a:t>
+                      </a:r>
+                    </a:p>
+                  </a:txBody>
+                  <a:tcPr marL="73152" marR="73152" marT="45720" marB="45720" anchor="ctr">
+                    <a:solidFill>
+                      <a:srgbClr val="FFFFFF"/>
+                    </a:solidFill>
+                  </a:tcPr>
+                </a:tc>
+                <a:tc>
+                  <a:txBody>
+                    <a:bodyPr/>
+                    <a:lstStyle/>
+                    <a:p>
+                      <a:pPr algn="ctr"/>
+                      <a:r>
+                        <a:rPr sz="1300" b="0">
+                          <a:solidFill>
+                            <a:srgbClr val="111111"/>
+                          </a:solidFill>
+                          <a:latin typeface="Microsoft JhengHei"/>
+                        </a:rPr>
+                        <a:t>✅</a:t>
+                      </a:r>
+                    </a:p>
+                  </a:txBody>
+                  <a:tcPr marL="73152" marR="73152" marT="45720" marB="45720" anchor="ctr">
+                    <a:solidFill>
+                      <a:srgbClr val="FFFFFF"/>
+                    </a:solidFill>
+                  </a:tcPr>
+                </a:tc>
+                <a:tc>
+                  <a:txBody>
+                    <a:bodyPr/>
+                    <a:lstStyle/>
+                    <a:p>
+                      <a:pPr algn="ctr"/>
+                      <a:r>
+                        <a:rPr sz="1300" b="0">
+                          <a:solidFill>
+                            <a:srgbClr val="111111"/>
+                          </a:solidFill>
+                          <a:latin typeface="Microsoft JhengHei"/>
+                        </a:rPr>
+                        <a:t>✅</a:t>
+                      </a:r>
+                    </a:p>
+                  </a:txBody>
+                  <a:tcPr marL="73152" marR="73152" marT="45720" marB="45720" anchor="ctr">
+                    <a:solidFill>
+                      <a:srgbClr val="FFFFFF"/>
+                    </a:solidFill>
+                  </a:tcPr>
+                </a:tc>
+                <a:tc>
+                  <a:txBody>
+                    <a:bodyPr/>
+                    <a:lstStyle/>
+                    <a:p>
+                      <a:pPr algn="ctr"/>
+                      <a:r>
+                        <a:rPr sz="1300" b="0">
+                          <a:solidFill>
+                            <a:srgbClr val="111111"/>
+                          </a:solidFill>
+                          <a:latin typeface="Microsoft JhengHei"/>
+                        </a:rPr>
+                        <a:t>✅</a:t>
+                      </a:r>
+                    </a:p>
+                  </a:txBody>
+                  <a:tcPr marL="73152" marR="73152" marT="45720" marB="45720" anchor="ctr">
+                    <a:solidFill>
+                      <a:srgbClr val="FFFFFF"/>
+                    </a:solidFill>
+                  </a:tcPr>
+                </a:tc>
+              </a:tr>
+              <a:tr h="493776">
+                <a:tc>
+                  <a:txBody>
+                    <a:bodyPr/>
+                    <a:lstStyle/>
+                    <a:p>
+                      <a:pPr algn="l"/>
+                      <a:r>
+                        <a:rPr sz="1300" b="1">
+                          <a:solidFill>
+                            <a:srgbClr val="111111"/>
+                          </a:solidFill>
+                          <a:latin typeface="Microsoft JhengHei"/>
+                        </a:rPr>
+                        <a:t>MCP</a:t>
+                      </a:r>
+                    </a:p>
+                  </a:txBody>
+                  <a:tcPr marL="73152" marR="73152" marT="45720" marB="45720" anchor="ctr">
+                    <a:solidFill>
+                      <a:srgbClr val="FFFFFF"/>
+                    </a:solidFill>
+                  </a:tcPr>
+                </a:tc>
+                <a:tc>
+                  <a:txBody>
+                    <a:bodyPr/>
+                    <a:lstStyle/>
+                    <a:p>
+                      <a:pPr algn="ctr"/>
+                      <a:r>
+                        <a:rPr sz="1300" b="0">
+                          <a:solidFill>
+                            <a:srgbClr val="111111"/>
+                          </a:solidFill>
+                          <a:latin typeface="Microsoft JhengHei"/>
+                        </a:rPr>
+                        <a:t>❌</a:t>
+                      </a:r>
+                    </a:p>
+                  </a:txBody>
+                  <a:tcPr marL="73152" marR="73152" marT="45720" marB="45720" anchor="ctr">
+                    <a:solidFill>
+                      <a:srgbClr val="FFFFFF"/>
+                    </a:solidFill>
+                  </a:tcPr>
+                </a:tc>
+                <a:tc>
+                  <a:txBody>
+                    <a:bodyPr/>
+                    <a:lstStyle/>
+                    <a:p>
+                      <a:pPr algn="ctr"/>
+                      <a:r>
+                        <a:rPr sz="1300" b="0">
+                          <a:solidFill>
+                            <a:srgbClr val="111111"/>
+                          </a:solidFill>
+                          <a:latin typeface="Microsoft JhengHei"/>
+                        </a:rPr>
+                        <a:t>✅</a:t>
+                      </a:r>
+                    </a:p>
+                  </a:txBody>
+                  <a:tcPr marL="73152" marR="73152" marT="45720" marB="45720" anchor="ctr">
+                    <a:solidFill>
+                      <a:srgbClr val="FFFFFF"/>
+                    </a:solidFill>
+                  </a:tcPr>
+                </a:tc>
+                <a:tc>
+                  <a:txBody>
+                    <a:bodyPr/>
+                    <a:lstStyle/>
+                    <a:p>
+                      <a:pPr algn="ctr"/>
+                      <a:r>
+                        <a:rPr sz="1300" b="0">
+                          <a:solidFill>
+                            <a:srgbClr val="111111"/>
+                          </a:solidFill>
+                          <a:latin typeface="Microsoft JhengHei"/>
+                        </a:rPr>
+                        <a:t>✅</a:t>
+                      </a:r>
+                    </a:p>
+                  </a:txBody>
+                  <a:tcPr marL="73152" marR="73152" marT="45720" marB="45720" anchor="ctr">
+                    <a:solidFill>
+                      <a:srgbClr val="FFFFFF"/>
+                    </a:solidFill>
+                  </a:tcPr>
+                </a:tc>
+                <a:tc>
+                  <a:txBody>
+                    <a:bodyPr/>
+                    <a:lstStyle/>
+                    <a:p>
+                      <a:pPr algn="ctr"/>
+                      <a:r>
+                        <a:rPr sz="1300" b="0">
+                          <a:solidFill>
+                            <a:srgbClr val="111111"/>
+                          </a:solidFill>
+                          <a:latin typeface="Microsoft JhengHei"/>
+                        </a:rPr>
+                        <a:t>✅</a:t>
+                      </a:r>
+                    </a:p>
+                  </a:txBody>
+                  <a:tcPr marL="73152" marR="73152" marT="45720" marB="45720" anchor="ctr">
+                    <a:solidFill>
+                      <a:srgbClr val="FFFFFF"/>
+                    </a:solidFill>
+                  </a:tcPr>
+                </a:tc>
+                <a:tc>
+                  <a:txBody>
+                    <a:bodyPr/>
+                    <a:lstStyle/>
+                    <a:p>
+                      <a:pPr algn="ctr"/>
+                      <a:r>
+                        <a:rPr sz="1300" b="0">
+                          <a:solidFill>
+                            <a:srgbClr val="111111"/>
+                          </a:solidFill>
+                          <a:latin typeface="Microsoft JhengHei"/>
+                        </a:rPr>
+                        <a:t>✅</a:t>
+                      </a:r>
+                    </a:p>
+                  </a:txBody>
+                  <a:tcPr marL="73152" marR="73152" marT="45720" marB="45720" anchor="ctr">
+                    <a:solidFill>
+                      <a:srgbClr val="FFFFFF"/>
+                    </a:solidFill>
+                  </a:tcPr>
+                </a:tc>
+              </a:tr>
+            </a:tbl>
+          </a:graphicData>
+        </a:graphic>
+      </p:graphicFrame>
       <p:sp>
         <p:nvSpPr>
           <p:cNvPr id="6" name="TextBox 5"/>
@@ -33435,7 +34032,7 @@
         </p:nvSpPr>
         <p:spPr>
           <a:xfrm>
-            <a:off x="731520" y="4526280"/>
+            <a:off x="731520" y="4480560"/>
             <a:ext cx="10698480" cy="365760"/>
           </a:xfrm>
           <a:prstGeom prst="rect">
@@ -33461,7 +34058,7 @@
                 </a:solidFill>
                 <a:latin typeface="Microsoft JhengHei"/>
               </a:rPr>
-              <a:t>*  Antigravity 還會讀 ~/.gemini/GEMINI.md 做全域設定（跟 Gemini CLI 共用——同一家人）</a:t>
+              <a:t>*  Antigravity 與 Gemini CLI 共用 ~/.gemini/GEMINI.md 做全域設定（同一家人）</a:t>
             </a:r>
           </a:p>
         </p:txBody>
@@ -33474,7 +34071,7 @@
         </p:nvCxnSpPr>
         <p:spPr>
           <a:xfrm>
-            <a:off x="731520" y="5074920"/>
+            <a:off x="731520" y="4983480"/>
             <a:ext cx="10698480" cy="0"/>
           </a:xfrm>
           <a:prstGeom prst="line">
@@ -33509,7 +34106,7 @@
         </p:nvSpPr>
         <p:spPr>
           <a:xfrm>
-            <a:off x="731520" y="5257800"/>
+            <a:off x="731520" y="5166360"/>
             <a:ext cx="10698480" cy="457200"/>
           </a:xfrm>
           <a:prstGeom prst="rect">
@@ -33548,8 +34145,8 @@
         </p:nvSpPr>
         <p:spPr>
           <a:xfrm>
-            <a:off x="731520" y="5715000"/>
-            <a:ext cx="10698480" cy="457200"/>
+            <a:off x="731520" y="5623560"/>
+            <a:ext cx="10698480" cy="411480"/>
           </a:xfrm>
           <a:prstGeom prst="rect">
             <a:avLst/>

--- a/class_plan/vibe_coding_workshop.pptx
+++ b/class_plan/vibe_coding_workshop.pptx
@@ -3548,7 +3548,7 @@
         <p:spPr>
           <a:xfrm>
             <a:off x="731520" y="1097280"/>
-            <a:ext cx="7315200" cy="274320"/>
+            <a:ext cx="3657600" cy="274320"/>
           </a:xfrm>
           <a:prstGeom prst="rect">
             <a:avLst/>
@@ -4035,7 +4035,7 @@
         <p:spPr>
           <a:xfrm>
             <a:off x="731520" y="640080"/>
-            <a:ext cx="7315200" cy="274320"/>
+            <a:ext cx="3657600" cy="274320"/>
           </a:xfrm>
           <a:prstGeom prst="rect">
             <a:avLst/>
@@ -4956,7 +4956,7 @@
         </p:nvCxnSpPr>
         <p:spPr>
           <a:xfrm>
-            <a:off x="731520" y="5760720"/>
+            <a:off x="731520" y="5623560"/>
             <a:ext cx="10698480" cy="0"/>
           </a:xfrm>
           <a:prstGeom prst="line">
@@ -4991,7 +4991,7 @@
         </p:nvSpPr>
         <p:spPr>
           <a:xfrm>
-            <a:off x="731520" y="5897880"/>
+            <a:off x="731520" y="5760720"/>
             <a:ext cx="2743200" cy="274320"/>
           </a:xfrm>
           <a:prstGeom prst="rect">
@@ -5030,27 +5030,27 @@
         </p:nvSpPr>
         <p:spPr>
           <a:xfrm>
-            <a:off x="731520" y="6126480"/>
-            <a:ext cx="10698480" cy="457200"/>
-          </a:xfrm>
-          <a:prstGeom prst="rect">
-            <a:avLst/>
-          </a:prstGeom>
-          <a:noFill/>
-        </p:spPr>
-        <p:txBody>
-          <a:bodyPr wrap="square" lIns="45720" rIns="45720" tIns="18288" bIns="18288" anchor="t">
-            <a:spAutoFit/>
-          </a:bodyPr>
-          <a:lstStyle/>
-          <a:p>
-            <a:pPr algn="l">
-              <a:lnSpc>
-                <a:spcPct val="135000"/>
-              </a:lnSpc>
-            </a:pPr>
-            <a:r>
-              <a:rPr sz="2200" b="1" spc="-30">
+            <a:off x="731520" y="5989320"/>
+            <a:ext cx="10698480" cy="365760"/>
+          </a:xfrm>
+          <a:prstGeom prst="rect">
+            <a:avLst/>
+          </a:prstGeom>
+          <a:noFill/>
+        </p:spPr>
+        <p:txBody>
+          <a:bodyPr wrap="square" lIns="45720" rIns="45720" tIns="18288" bIns="18288" anchor="t">
+            <a:spAutoFit/>
+          </a:bodyPr>
+          <a:lstStyle/>
+          <a:p>
+            <a:pPr algn="l">
+              <a:lnSpc>
+                <a:spcPct val="135000"/>
+              </a:lnSpc>
+            </a:pPr>
+            <a:r>
+              <a:rPr sz="2000" b="1" spc="-30">
                 <a:solidFill>
                   <a:srgbClr val="111111"/>
                 </a:solidFill>
@@ -5500,7 +5500,7 @@
         </p:nvCxnSpPr>
         <p:spPr>
           <a:xfrm>
-            <a:off x="731520" y="5760720"/>
+            <a:off x="731520" y="5623560"/>
             <a:ext cx="10698480" cy="0"/>
           </a:xfrm>
           <a:prstGeom prst="line">
@@ -5535,7 +5535,7 @@
         </p:nvSpPr>
         <p:spPr>
           <a:xfrm>
-            <a:off x="731520" y="5897880"/>
+            <a:off x="731520" y="5760720"/>
             <a:ext cx="2743200" cy="274320"/>
           </a:xfrm>
           <a:prstGeom prst="rect">
@@ -5574,27 +5574,27 @@
         </p:nvSpPr>
         <p:spPr>
           <a:xfrm>
-            <a:off x="731520" y="6126480"/>
-            <a:ext cx="10698480" cy="457200"/>
-          </a:xfrm>
-          <a:prstGeom prst="rect">
-            <a:avLst/>
-          </a:prstGeom>
-          <a:noFill/>
-        </p:spPr>
-        <p:txBody>
-          <a:bodyPr wrap="square" lIns="45720" rIns="45720" tIns="18288" bIns="18288" anchor="t">
-            <a:spAutoFit/>
-          </a:bodyPr>
-          <a:lstStyle/>
-          <a:p>
-            <a:pPr algn="l">
-              <a:lnSpc>
-                <a:spcPct val="135000"/>
-              </a:lnSpc>
-            </a:pPr>
-            <a:r>
-              <a:rPr sz="2200" b="1" spc="-30">
+            <a:off x="731520" y="5989320"/>
+            <a:ext cx="10698480" cy="365760"/>
+          </a:xfrm>
+          <a:prstGeom prst="rect">
+            <a:avLst/>
+          </a:prstGeom>
+          <a:noFill/>
+        </p:spPr>
+        <p:txBody>
+          <a:bodyPr wrap="square" lIns="45720" rIns="45720" tIns="18288" bIns="18288" anchor="t">
+            <a:spAutoFit/>
+          </a:bodyPr>
+          <a:lstStyle/>
+          <a:p>
+            <a:pPr algn="l">
+              <a:lnSpc>
+                <a:spcPct val="135000"/>
+              </a:lnSpc>
+            </a:pPr>
+            <a:r>
+              <a:rPr sz="2000" b="1" spc="-30">
                 <a:solidFill>
                   <a:srgbClr val="111111"/>
                 </a:solidFill>
@@ -6546,7 +6546,7 @@
         <p:spPr>
           <a:xfrm>
             <a:off x="731520" y="1371600"/>
-            <a:ext cx="7315200" cy="274320"/>
+            <a:ext cx="3657600" cy="274320"/>
           </a:xfrm>
           <a:prstGeom prst="rect">
             <a:avLst/>
@@ -7139,7 +7139,7 @@
         <p:spPr>
           <a:xfrm>
             <a:off x="731520" y="1097280"/>
-            <a:ext cx="7315200" cy="274320"/>
+            <a:ext cx="3657600" cy="274320"/>
           </a:xfrm>
           <a:prstGeom prst="rect">
             <a:avLst/>
@@ -7486,7 +7486,7 @@
         <p:spPr>
           <a:xfrm>
             <a:off x="731520" y="640080"/>
-            <a:ext cx="7315200" cy="274320"/>
+            <a:ext cx="3657600" cy="274320"/>
           </a:xfrm>
           <a:prstGeom prst="rect">
             <a:avLst/>
@@ -7603,7 +7603,7 @@
         <p:spPr>
           <a:xfrm>
             <a:off x="731520" y="2468880"/>
-            <a:ext cx="7315200" cy="274320"/>
+            <a:ext cx="3657600" cy="274320"/>
           </a:xfrm>
           <a:prstGeom prst="rect">
             <a:avLst/>
@@ -7702,7 +7702,7 @@
         <p:spPr>
           <a:xfrm>
             <a:off x="6263640" y="2468880"/>
-            <a:ext cx="7315200" cy="274320"/>
+            <a:ext cx="3657600" cy="274320"/>
           </a:xfrm>
           <a:prstGeom prst="rect">
             <a:avLst/>
@@ -8111,7 +8111,7 @@
         <p:spPr>
           <a:xfrm>
             <a:off x="731520" y="640080"/>
-            <a:ext cx="7315200" cy="274320"/>
+            <a:ext cx="3657600" cy="274320"/>
           </a:xfrm>
           <a:prstGeom prst="rect">
             <a:avLst/>
@@ -8867,7 +8867,7 @@
         <p:spPr>
           <a:xfrm>
             <a:off x="731520" y="640080"/>
-            <a:ext cx="7315200" cy="274320"/>
+            <a:ext cx="3657600" cy="274320"/>
           </a:xfrm>
           <a:prstGeom prst="rect">
             <a:avLst/>
@@ -10377,7 +10377,7 @@
         <p:spPr>
           <a:xfrm>
             <a:off x="731520" y="640080"/>
-            <a:ext cx="7315200" cy="274320"/>
+            <a:ext cx="3657600" cy="274320"/>
           </a:xfrm>
           <a:prstGeom prst="rect">
             <a:avLst/>
@@ -11086,7 +11086,7 @@
         <p:spPr>
           <a:xfrm>
             <a:off x="731520" y="640080"/>
-            <a:ext cx="7315200" cy="274320"/>
+            <a:ext cx="3657600" cy="274320"/>
           </a:xfrm>
           <a:prstGeom prst="rect">
             <a:avLst/>
@@ -11596,7 +11596,7 @@
         <p:spPr>
           <a:xfrm>
             <a:off x="731520" y="640080"/>
-            <a:ext cx="7315200" cy="274320"/>
+            <a:ext cx="3657600" cy="274320"/>
           </a:xfrm>
           <a:prstGeom prst="rect">
             <a:avLst/>
@@ -12434,7 +12434,7 @@
         <p:spPr>
           <a:xfrm>
             <a:off x="731520" y="1188720"/>
-            <a:ext cx="7315200" cy="274320"/>
+            <a:ext cx="3657600" cy="274320"/>
           </a:xfrm>
           <a:prstGeom prst="rect">
             <a:avLst/>
@@ -13151,7 +13151,7 @@
         <p:spPr>
           <a:xfrm>
             <a:off x="731520" y="640080"/>
-            <a:ext cx="7315200" cy="274320"/>
+            <a:ext cx="3657600" cy="274320"/>
           </a:xfrm>
           <a:prstGeom prst="rect">
             <a:avLst/>
@@ -14207,7 +14207,7 @@
         <p:spPr>
           <a:xfrm>
             <a:off x="731520" y="640080"/>
-            <a:ext cx="7315200" cy="274320"/>
+            <a:ext cx="3657600" cy="274320"/>
           </a:xfrm>
           <a:prstGeom prst="rect">
             <a:avLst/>
@@ -16264,7 +16264,7 @@
         <p:spPr>
           <a:xfrm>
             <a:off x="731520" y="640080"/>
-            <a:ext cx="7315200" cy="274320"/>
+            <a:ext cx="3657600" cy="274320"/>
           </a:xfrm>
           <a:prstGeom prst="rect">
             <a:avLst/>
@@ -16791,7 +16791,7 @@
         <p:spPr>
           <a:xfrm>
             <a:off x="731520" y="4709160"/>
-            <a:ext cx="7315200" cy="274320"/>
+            <a:ext cx="3657600" cy="274320"/>
           </a:xfrm>
           <a:prstGeom prst="rect">
             <a:avLst/>
@@ -17333,7 +17333,7 @@
         <p:spPr>
           <a:xfrm>
             <a:off x="731520" y="1097280"/>
-            <a:ext cx="7315200" cy="274320"/>
+            <a:ext cx="3657600" cy="274320"/>
           </a:xfrm>
           <a:prstGeom prst="rect">
             <a:avLst/>
@@ -17680,7 +17680,7 @@
         <p:spPr>
           <a:xfrm>
             <a:off x="731520" y="640080"/>
-            <a:ext cx="7315200" cy="274320"/>
+            <a:ext cx="3657600" cy="274320"/>
           </a:xfrm>
           <a:prstGeom prst="rect">
             <a:avLst/>
@@ -17832,7 +17832,7 @@
         <p:spPr>
           <a:xfrm>
             <a:off x="731520" y="3063240"/>
-            <a:ext cx="7315200" cy="274320"/>
+            <a:ext cx="3657600" cy="274320"/>
           </a:xfrm>
           <a:prstGeom prst="rect">
             <a:avLst/>
@@ -17871,7 +17871,7 @@
         <p:spPr>
           <a:xfrm>
             <a:off x="6263640" y="3063240"/>
-            <a:ext cx="7315200" cy="274320"/>
+            <a:ext cx="3657600" cy="274320"/>
           </a:xfrm>
           <a:prstGeom prst="rect">
             <a:avLst/>
@@ -18397,7 +18397,7 @@
         <p:spPr>
           <a:xfrm>
             <a:off x="731520" y="640080"/>
-            <a:ext cx="7315200" cy="274320"/>
+            <a:ext cx="3657600" cy="274320"/>
           </a:xfrm>
           <a:prstGeom prst="rect">
             <a:avLst/>
@@ -19274,7 +19274,7 @@
         <p:spPr>
           <a:xfrm>
             <a:off x="731520" y="1097280"/>
-            <a:ext cx="7315200" cy="274320"/>
+            <a:ext cx="3657600" cy="274320"/>
           </a:xfrm>
           <a:prstGeom prst="rect">
             <a:avLst/>
@@ -19679,7 +19679,7 @@
         <p:spPr>
           <a:xfrm>
             <a:off x="731520" y="640080"/>
-            <a:ext cx="7315200" cy="274320"/>
+            <a:ext cx="3657600" cy="274320"/>
           </a:xfrm>
           <a:prstGeom prst="rect">
             <a:avLst/>
@@ -20903,7 +20903,7 @@
         <p:spPr>
           <a:xfrm>
             <a:off x="731520" y="1188720"/>
-            <a:ext cx="7315200" cy="274320"/>
+            <a:ext cx="3657600" cy="274320"/>
           </a:xfrm>
           <a:prstGeom prst="rect">
             <a:avLst/>
@@ -21234,7 +21234,7 @@
         <p:spPr>
           <a:xfrm>
             <a:off x="731520" y="640080"/>
-            <a:ext cx="7315200" cy="274320"/>
+            <a:ext cx="3657600" cy="274320"/>
           </a:xfrm>
           <a:prstGeom prst="rect">
             <a:avLst/>
@@ -21312,7 +21312,7 @@
         <p:spPr>
           <a:xfrm>
             <a:off x="731520" y="2286000"/>
-            <a:ext cx="7315200" cy="274320"/>
+            <a:ext cx="3657600" cy="274320"/>
           </a:xfrm>
           <a:prstGeom prst="rect">
             <a:avLst/>
@@ -21351,7 +21351,7 @@
         <p:spPr>
           <a:xfrm>
             <a:off x="6263640" y="2286000"/>
-            <a:ext cx="7315200" cy="274320"/>
+            <a:ext cx="3657600" cy="274320"/>
           </a:xfrm>
           <a:prstGeom prst="rect">
             <a:avLst/>
@@ -22263,7 +22263,7 @@
         <p:spPr>
           <a:xfrm>
             <a:off x="731520" y="1188720"/>
-            <a:ext cx="7315200" cy="274320"/>
+            <a:ext cx="3657600" cy="274320"/>
           </a:xfrm>
           <a:prstGeom prst="rect">
             <a:avLst/>
@@ -23146,7 +23146,7 @@
         </p:nvCxnSpPr>
         <p:spPr>
           <a:xfrm>
-            <a:off x="731520" y="5760720"/>
+            <a:off x="731520" y="5623560"/>
             <a:ext cx="10698480" cy="0"/>
           </a:xfrm>
           <a:prstGeom prst="line">
@@ -23181,7 +23181,7 @@
         </p:nvSpPr>
         <p:spPr>
           <a:xfrm>
-            <a:off x="731520" y="5897880"/>
+            <a:off x="731520" y="5760720"/>
             <a:ext cx="2743200" cy="274320"/>
           </a:xfrm>
           <a:prstGeom prst="rect">
@@ -23220,27 +23220,27 @@
         </p:nvSpPr>
         <p:spPr>
           <a:xfrm>
-            <a:off x="731520" y="6126480"/>
-            <a:ext cx="10698480" cy="457200"/>
-          </a:xfrm>
-          <a:prstGeom prst="rect">
-            <a:avLst/>
-          </a:prstGeom>
-          <a:noFill/>
-        </p:spPr>
-        <p:txBody>
-          <a:bodyPr wrap="square" lIns="45720" rIns="45720" tIns="18288" bIns="18288" anchor="t">
-            <a:spAutoFit/>
-          </a:bodyPr>
-          <a:lstStyle/>
-          <a:p>
-            <a:pPr algn="l">
-              <a:lnSpc>
-                <a:spcPct val="135000"/>
-              </a:lnSpc>
-            </a:pPr>
-            <a:r>
-              <a:rPr sz="2200" b="1" spc="-30">
+            <a:off x="731520" y="5989320"/>
+            <a:ext cx="10698480" cy="365760"/>
+          </a:xfrm>
+          <a:prstGeom prst="rect">
+            <a:avLst/>
+          </a:prstGeom>
+          <a:noFill/>
+        </p:spPr>
+        <p:txBody>
+          <a:bodyPr wrap="square" lIns="45720" rIns="45720" tIns="18288" bIns="18288" anchor="t">
+            <a:spAutoFit/>
+          </a:bodyPr>
+          <a:lstStyle/>
+          <a:p>
+            <a:pPr algn="l">
+              <a:lnSpc>
+                <a:spcPct val="135000"/>
+              </a:lnSpc>
+            </a:pPr>
+            <a:r>
+              <a:rPr sz="2000" b="1" spc="-30">
                 <a:solidFill>
                   <a:srgbClr val="111111"/>
                 </a:solidFill>
@@ -23435,7 +23435,7 @@
         <p:spPr>
           <a:xfrm>
             <a:off x="731520" y="640080"/>
-            <a:ext cx="7315200" cy="274320"/>
+            <a:ext cx="3657600" cy="274320"/>
           </a:xfrm>
           <a:prstGeom prst="rect">
             <a:avLst/>
@@ -23513,7 +23513,7 @@
         <p:spPr>
           <a:xfrm>
             <a:off x="731520" y="2286000"/>
-            <a:ext cx="7315200" cy="274320"/>
+            <a:ext cx="3657600" cy="274320"/>
           </a:xfrm>
           <a:prstGeom prst="rect">
             <a:avLst/>
@@ -23552,7 +23552,7 @@
         <p:spPr>
           <a:xfrm>
             <a:off x="6263640" y="2286000"/>
-            <a:ext cx="7315200" cy="274320"/>
+            <a:ext cx="3657600" cy="274320"/>
           </a:xfrm>
           <a:prstGeom prst="rect">
             <a:avLst/>
@@ -24731,7 +24731,7 @@
         </p:nvCxnSpPr>
         <p:spPr>
           <a:xfrm>
-            <a:off x="731520" y="5760720"/>
+            <a:off x="731520" y="5623560"/>
             <a:ext cx="10698480" cy="0"/>
           </a:xfrm>
           <a:prstGeom prst="line">
@@ -24766,7 +24766,7 @@
         </p:nvSpPr>
         <p:spPr>
           <a:xfrm>
-            <a:off x="731520" y="5897880"/>
+            <a:off x="731520" y="5760720"/>
             <a:ext cx="2743200" cy="274320"/>
           </a:xfrm>
           <a:prstGeom prst="rect">
@@ -24805,27 +24805,27 @@
         </p:nvSpPr>
         <p:spPr>
           <a:xfrm>
-            <a:off x="731520" y="6126480"/>
-            <a:ext cx="10698480" cy="457200"/>
-          </a:xfrm>
-          <a:prstGeom prst="rect">
-            <a:avLst/>
-          </a:prstGeom>
-          <a:noFill/>
-        </p:spPr>
-        <p:txBody>
-          <a:bodyPr wrap="square" lIns="45720" rIns="45720" tIns="18288" bIns="18288" anchor="t">
-            <a:spAutoFit/>
-          </a:bodyPr>
-          <a:lstStyle/>
-          <a:p>
-            <a:pPr algn="l">
-              <a:lnSpc>
-                <a:spcPct val="135000"/>
-              </a:lnSpc>
-            </a:pPr>
-            <a:r>
-              <a:rPr sz="2200" b="1" spc="-30">
+            <a:off x="731520" y="5989320"/>
+            <a:ext cx="10698480" cy="365760"/>
+          </a:xfrm>
+          <a:prstGeom prst="rect">
+            <a:avLst/>
+          </a:prstGeom>
+          <a:noFill/>
+        </p:spPr>
+        <p:txBody>
+          <a:bodyPr wrap="square" lIns="45720" rIns="45720" tIns="18288" bIns="18288" anchor="t">
+            <a:spAutoFit/>
+          </a:bodyPr>
+          <a:lstStyle/>
+          <a:p>
+            <a:pPr algn="l">
+              <a:lnSpc>
+                <a:spcPct val="135000"/>
+              </a:lnSpc>
+            </a:pPr>
+            <a:r>
+              <a:rPr sz="2000" b="1" spc="-30">
                 <a:solidFill>
                   <a:srgbClr val="111111"/>
                 </a:solidFill>
@@ -25192,7 +25192,7 @@
         <p:spPr>
           <a:xfrm>
             <a:off x="731520" y="1371600"/>
-            <a:ext cx="7315200" cy="274320"/>
+            <a:ext cx="3657600" cy="274320"/>
           </a:xfrm>
           <a:prstGeom prst="rect">
             <a:avLst/>
@@ -25629,7 +25629,7 @@
         <p:spPr>
           <a:xfrm>
             <a:off x="731520" y="640080"/>
-            <a:ext cx="7315200" cy="274320"/>
+            <a:ext cx="3657600" cy="274320"/>
           </a:xfrm>
           <a:prstGeom prst="rect">
             <a:avLst/>
@@ -26463,7 +26463,7 @@
         <p:spPr>
           <a:xfrm>
             <a:off x="731520" y="1097280"/>
-            <a:ext cx="7315200" cy="274320"/>
+            <a:ext cx="3657600" cy="274320"/>
           </a:xfrm>
           <a:prstGeom prst="rect">
             <a:avLst/>
@@ -26810,7 +26810,7 @@
         <p:spPr>
           <a:xfrm>
             <a:off x="731520" y="640080"/>
-            <a:ext cx="7315200" cy="274320"/>
+            <a:ext cx="3657600" cy="274320"/>
           </a:xfrm>
           <a:prstGeom prst="rect">
             <a:avLst/>
@@ -27834,7 +27834,7 @@
         <p:spPr>
           <a:xfrm>
             <a:off x="731520" y="640080"/>
-            <a:ext cx="7315200" cy="274320"/>
+            <a:ext cx="3657600" cy="274320"/>
           </a:xfrm>
           <a:prstGeom prst="rect">
             <a:avLst/>
@@ -28455,7 +28455,7 @@
         <p:spPr>
           <a:xfrm>
             <a:off x="731520" y="640080"/>
-            <a:ext cx="7315200" cy="274320"/>
+            <a:ext cx="3657600" cy="274320"/>
           </a:xfrm>
           <a:prstGeom prst="rect">
             <a:avLst/>
@@ -29277,7 +29277,7 @@
         <p:spPr>
           <a:xfrm>
             <a:off x="731520" y="640080"/>
-            <a:ext cx="7315200" cy="274320"/>
+            <a:ext cx="3657600" cy="274320"/>
           </a:xfrm>
           <a:prstGeom prst="rect">
             <a:avLst/>
@@ -29846,7 +29846,7 @@
         <p:spPr>
           <a:xfrm>
             <a:off x="731520" y="640080"/>
-            <a:ext cx="7315200" cy="274320"/>
+            <a:ext cx="3657600" cy="274320"/>
           </a:xfrm>
           <a:prstGeom prst="rect">
             <a:avLst/>
@@ -30551,7 +30551,7 @@
         <p:spPr>
           <a:xfrm>
             <a:off x="731520" y="640080"/>
-            <a:ext cx="7315200" cy="274320"/>
+            <a:ext cx="3657600" cy="274320"/>
           </a:xfrm>
           <a:prstGeom prst="rect">
             <a:avLst/>
@@ -31098,7 +31098,7 @@
         <p:spPr>
           <a:xfrm>
             <a:off x="731520" y="640080"/>
-            <a:ext cx="7315200" cy="274320"/>
+            <a:ext cx="3657600" cy="274320"/>
           </a:xfrm>
           <a:prstGeom prst="rect">
             <a:avLst/>
@@ -31722,7 +31722,7 @@
         <p:spPr>
           <a:xfrm>
             <a:off x="731520" y="640080"/>
-            <a:ext cx="7315200" cy="274320"/>
+            <a:ext cx="3657600" cy="274320"/>
           </a:xfrm>
           <a:prstGeom prst="rect">
             <a:avLst/>
@@ -32478,7 +32478,7 @@
         <p:spPr>
           <a:xfrm>
             <a:off x="731520" y="640080"/>
-            <a:ext cx="7315200" cy="274320"/>
+            <a:ext cx="3657600" cy="274320"/>
           </a:xfrm>
           <a:prstGeom prst="rect">
             <a:avLst/>
@@ -33234,7 +33234,7 @@
         <p:spPr>
           <a:xfrm>
             <a:off x="731520" y="640080"/>
-            <a:ext cx="7315200" cy="274320"/>
+            <a:ext cx="3657600" cy="274320"/>
           </a:xfrm>
           <a:prstGeom prst="rect">
             <a:avLst/>
@@ -34877,7 +34877,7 @@
         </p:nvCxnSpPr>
         <p:spPr>
           <a:xfrm>
-            <a:off x="731520" y="5760720"/>
+            <a:off x="731520" y="5623560"/>
             <a:ext cx="10698480" cy="0"/>
           </a:xfrm>
           <a:prstGeom prst="line">
@@ -34912,7 +34912,7 @@
         </p:nvSpPr>
         <p:spPr>
           <a:xfrm>
-            <a:off x="731520" y="5897880"/>
+            <a:off x="731520" y="5760720"/>
             <a:ext cx="2743200" cy="274320"/>
           </a:xfrm>
           <a:prstGeom prst="rect">
@@ -34951,27 +34951,27 @@
         </p:nvSpPr>
         <p:spPr>
           <a:xfrm>
-            <a:off x="731520" y="6126480"/>
-            <a:ext cx="10698480" cy="457200"/>
-          </a:xfrm>
-          <a:prstGeom prst="rect">
-            <a:avLst/>
-          </a:prstGeom>
-          <a:noFill/>
-        </p:spPr>
-        <p:txBody>
-          <a:bodyPr wrap="square" lIns="45720" rIns="45720" tIns="18288" bIns="18288" anchor="t">
-            <a:spAutoFit/>
-          </a:bodyPr>
-          <a:lstStyle/>
-          <a:p>
-            <a:pPr algn="l">
-              <a:lnSpc>
-                <a:spcPct val="135000"/>
-              </a:lnSpc>
-            </a:pPr>
-            <a:r>
-              <a:rPr sz="2200" b="1" spc="-30">
+            <a:off x="731520" y="5989320"/>
+            <a:ext cx="10698480" cy="365760"/>
+          </a:xfrm>
+          <a:prstGeom prst="rect">
+            <a:avLst/>
+          </a:prstGeom>
+          <a:noFill/>
+        </p:spPr>
+        <p:txBody>
+          <a:bodyPr wrap="square" lIns="45720" rIns="45720" tIns="18288" bIns="18288" anchor="t">
+            <a:spAutoFit/>
+          </a:bodyPr>
+          <a:lstStyle/>
+          <a:p>
+            <a:pPr algn="l">
+              <a:lnSpc>
+                <a:spcPct val="135000"/>
+              </a:lnSpc>
+            </a:pPr>
+            <a:r>
+              <a:rPr sz="2000" b="1" spc="-30">
                 <a:solidFill>
                   <a:srgbClr val="111111"/>
                 </a:solidFill>
@@ -35166,7 +35166,7 @@
         <p:spPr>
           <a:xfrm>
             <a:off x="731520" y="640080"/>
-            <a:ext cx="7315200" cy="274320"/>
+            <a:ext cx="3657600" cy="274320"/>
           </a:xfrm>
           <a:prstGeom prst="rect">
             <a:avLst/>
@@ -36191,7 +36191,7 @@
         <p:spPr>
           <a:xfrm>
             <a:off x="7498079" y="2423160"/>
-            <a:ext cx="7315200" cy="274320"/>
+            <a:ext cx="3657600" cy="274320"/>
           </a:xfrm>
           <a:prstGeom prst="rect">
             <a:avLst/>
@@ -36639,7 +36639,7 @@
         <p:spPr>
           <a:xfrm>
             <a:off x="731520" y="640080"/>
-            <a:ext cx="7315200" cy="274320"/>
+            <a:ext cx="3657600" cy="274320"/>
           </a:xfrm>
           <a:prstGeom prst="rect">
             <a:avLst/>
@@ -37129,7 +37129,7 @@
         <p:spPr>
           <a:xfrm>
             <a:off x="731520" y="640080"/>
-            <a:ext cx="7315200" cy="274320"/>
+            <a:ext cx="3657600" cy="274320"/>
           </a:xfrm>
           <a:prstGeom prst="rect">
             <a:avLst/>
@@ -37538,7 +37538,7 @@
         <p:spPr>
           <a:xfrm>
             <a:off x="731520" y="4389120"/>
-            <a:ext cx="7315200" cy="274320"/>
+            <a:ext cx="3657600" cy="274320"/>
           </a:xfrm>
           <a:prstGeom prst="rect">
             <a:avLst/>
@@ -37963,7 +37963,7 @@
         <p:spPr>
           <a:xfrm>
             <a:off x="731520" y="1097280"/>
-            <a:ext cx="7315200" cy="274320"/>
+            <a:ext cx="3657600" cy="274320"/>
           </a:xfrm>
           <a:prstGeom prst="rect">
             <a:avLst/>
@@ -38310,7 +38310,7 @@
         <p:spPr>
           <a:xfrm>
             <a:off x="731520" y="640080"/>
-            <a:ext cx="7315200" cy="274320"/>
+            <a:ext cx="3657600" cy="274320"/>
           </a:xfrm>
           <a:prstGeom prst="rect">
             <a:avLst/>
@@ -39458,7 +39458,7 @@
         </p:nvCxnSpPr>
         <p:spPr>
           <a:xfrm>
-            <a:off x="731520" y="5760720"/>
+            <a:off x="731520" y="5623560"/>
             <a:ext cx="10698480" cy="0"/>
           </a:xfrm>
           <a:prstGeom prst="line">
@@ -39493,7 +39493,7 @@
         </p:nvSpPr>
         <p:spPr>
           <a:xfrm>
-            <a:off x="731520" y="5897880"/>
+            <a:off x="731520" y="5760720"/>
             <a:ext cx="2743200" cy="274320"/>
           </a:xfrm>
           <a:prstGeom prst="rect">
@@ -39532,27 +39532,27 @@
         </p:nvSpPr>
         <p:spPr>
           <a:xfrm>
-            <a:off x="731520" y="6126480"/>
-            <a:ext cx="10698480" cy="457200"/>
-          </a:xfrm>
-          <a:prstGeom prst="rect">
-            <a:avLst/>
-          </a:prstGeom>
-          <a:noFill/>
-        </p:spPr>
-        <p:txBody>
-          <a:bodyPr wrap="square" lIns="45720" rIns="45720" tIns="18288" bIns="18288" anchor="t">
-            <a:spAutoFit/>
-          </a:bodyPr>
-          <a:lstStyle/>
-          <a:p>
-            <a:pPr algn="l">
-              <a:lnSpc>
-                <a:spcPct val="135000"/>
-              </a:lnSpc>
-            </a:pPr>
-            <a:r>
-              <a:rPr sz="2200" b="1" spc="-30">
+            <a:off x="731520" y="5989320"/>
+            <a:ext cx="10698480" cy="365760"/>
+          </a:xfrm>
+          <a:prstGeom prst="rect">
+            <a:avLst/>
+          </a:prstGeom>
+          <a:noFill/>
+        </p:spPr>
+        <p:txBody>
+          <a:bodyPr wrap="square" lIns="45720" rIns="45720" tIns="18288" bIns="18288" anchor="t">
+            <a:spAutoFit/>
+          </a:bodyPr>
+          <a:lstStyle/>
+          <a:p>
+            <a:pPr algn="l">
+              <a:lnSpc>
+                <a:spcPct val="135000"/>
+              </a:lnSpc>
+            </a:pPr>
+            <a:r>
+              <a:rPr sz="2000" b="1" spc="-30">
                 <a:solidFill>
                   <a:srgbClr val="111111"/>
                 </a:solidFill>
@@ -39919,7 +39919,7 @@
         <p:spPr>
           <a:xfrm>
             <a:off x="731520" y="1188720"/>
-            <a:ext cx="7315200" cy="274320"/>
+            <a:ext cx="3657600" cy="274320"/>
           </a:xfrm>
           <a:prstGeom prst="rect">
             <a:avLst/>
@@ -40667,7 +40667,7 @@
         <p:spPr>
           <a:xfrm>
             <a:off x="731520" y="640080"/>
-            <a:ext cx="7315200" cy="274320"/>
+            <a:ext cx="3657600" cy="274320"/>
           </a:xfrm>
           <a:prstGeom prst="rect">
             <a:avLst/>
@@ -40831,7 +40831,7 @@
         <p:spPr>
           <a:xfrm>
             <a:off x="1005840" y="2788920"/>
-            <a:ext cx="7315200" cy="274320"/>
+            <a:ext cx="3657600" cy="274320"/>
           </a:xfrm>
           <a:prstGeom prst="rect">
             <a:avLst/>
@@ -41073,7 +41073,7 @@
         <p:spPr>
           <a:xfrm>
             <a:off x="6537960" y="2788920"/>
-            <a:ext cx="7315200" cy="274320"/>
+            <a:ext cx="3657600" cy="274320"/>
           </a:xfrm>
           <a:prstGeom prst="rect">
             <a:avLst/>
@@ -41315,7 +41315,7 @@
         <p:spPr>
           <a:xfrm>
             <a:off x="1005840" y="4617720"/>
-            <a:ext cx="7315200" cy="274320"/>
+            <a:ext cx="3657600" cy="274320"/>
           </a:xfrm>
           <a:prstGeom prst="rect">
             <a:avLst/>
@@ -41557,7 +41557,7 @@
         <p:spPr>
           <a:xfrm>
             <a:off x="6537960" y="4617720"/>
-            <a:ext cx="7315200" cy="274320"/>
+            <a:ext cx="3657600" cy="274320"/>
           </a:xfrm>
           <a:prstGeom prst="rect">
             <a:avLst/>
@@ -41927,7 +41927,7 @@
         <p:spPr>
           <a:xfrm>
             <a:off x="731520" y="640080"/>
-            <a:ext cx="7315200" cy="274320"/>
+            <a:ext cx="3657600" cy="274320"/>
           </a:xfrm>
           <a:prstGeom prst="rect">
             <a:avLst/>
@@ -43104,7 +43104,7 @@
         <p:spPr>
           <a:xfrm>
             <a:off x="731520" y="1097280"/>
-            <a:ext cx="7315200" cy="274320"/>
+            <a:ext cx="3657600" cy="274320"/>
           </a:xfrm>
           <a:prstGeom prst="rect">
             <a:avLst/>
@@ -43411,8 +43411,8 @@
         </p:nvSpPr>
         <p:spPr>
           <a:xfrm>
-            <a:off x="731520" y="6263640"/>
-            <a:ext cx="10698480" cy="365760"/>
+            <a:off x="731520" y="6080760"/>
+            <a:ext cx="10698480" cy="274320"/>
           </a:xfrm>
           <a:prstGeom prst="rect">
             <a:avLst/>
@@ -43970,7 +43970,7 @@
         <p:spPr>
           <a:xfrm>
             <a:off x="731520" y="1188720"/>
-            <a:ext cx="7315200" cy="274320"/>
+            <a:ext cx="3657600" cy="274320"/>
           </a:xfrm>
           <a:prstGeom prst="rect">
             <a:avLst/>
@@ -44312,7 +44312,7 @@
         </p:nvSpPr>
         <p:spPr>
           <a:xfrm>
-            <a:off x="731520" y="6126480"/>
+            <a:off x="731520" y="5989320"/>
             <a:ext cx="10698480" cy="365760"/>
           </a:xfrm>
           <a:prstGeom prst="rect">
@@ -44586,7 +44586,7 @@
         <p:spPr>
           <a:xfrm>
             <a:off x="731520" y="1097280"/>
-            <a:ext cx="7315200" cy="274320"/>
+            <a:ext cx="3657600" cy="274320"/>
           </a:xfrm>
           <a:prstGeom prst="rect">
             <a:avLst/>
@@ -45105,7 +45105,7 @@
         <p:spPr>
           <a:xfrm>
             <a:off x="731520" y="1097280"/>
-            <a:ext cx="7315200" cy="274320"/>
+            <a:ext cx="3657600" cy="274320"/>
           </a:xfrm>
           <a:prstGeom prst="rect">
             <a:avLst/>
@@ -45475,7 +45475,7 @@
         <p:spPr>
           <a:xfrm>
             <a:off x="731520" y="640080"/>
-            <a:ext cx="7315200" cy="274320"/>
+            <a:ext cx="3657600" cy="274320"/>
           </a:xfrm>
           <a:prstGeom prst="rect">
             <a:avLst/>
@@ -46011,7 +46011,7 @@
         <p:spPr>
           <a:xfrm>
             <a:off x="731520" y="5029200"/>
-            <a:ext cx="7315200" cy="274320"/>
+            <a:ext cx="3657600" cy="274320"/>
           </a:xfrm>
           <a:prstGeom prst="rect">
             <a:avLst/>
@@ -46264,7 +46264,7 @@
         <p:spPr>
           <a:xfrm>
             <a:off x="731520" y="640080"/>
-            <a:ext cx="7315200" cy="274320"/>
+            <a:ext cx="3657600" cy="274320"/>
           </a:xfrm>
           <a:prstGeom prst="rect">
             <a:avLst/>
@@ -46800,7 +46800,7 @@
         <p:spPr>
           <a:xfrm>
             <a:off x="731520" y="5029200"/>
-            <a:ext cx="7315200" cy="274320"/>
+            <a:ext cx="3657600" cy="274320"/>
           </a:xfrm>
           <a:prstGeom prst="rect">
             <a:avLst/>
@@ -47053,7 +47053,7 @@
         <p:spPr>
           <a:xfrm>
             <a:off x="731520" y="640080"/>
-            <a:ext cx="7315200" cy="274320"/>
+            <a:ext cx="3657600" cy="274320"/>
           </a:xfrm>
           <a:prstGeom prst="rect">
             <a:avLst/>
@@ -47589,7 +47589,7 @@
         <p:spPr>
           <a:xfrm>
             <a:off x="731520" y="5029200"/>
-            <a:ext cx="7315200" cy="274320"/>
+            <a:ext cx="3657600" cy="274320"/>
           </a:xfrm>
           <a:prstGeom prst="rect">
             <a:avLst/>
@@ -47842,7 +47842,7 @@
         <p:spPr>
           <a:xfrm>
             <a:off x="731520" y="640080"/>
-            <a:ext cx="7315200" cy="274320"/>
+            <a:ext cx="3657600" cy="274320"/>
           </a:xfrm>
           <a:prstGeom prst="rect">
             <a:avLst/>
@@ -49245,7 +49245,7 @@
         <p:spPr>
           <a:xfrm>
             <a:off x="731520" y="640080"/>
-            <a:ext cx="7315200" cy="274320"/>
+            <a:ext cx="3657600" cy="274320"/>
           </a:xfrm>
           <a:prstGeom prst="rect">
             <a:avLst/>
@@ -50006,7 +50006,7 @@
         <p:spPr>
           <a:xfrm>
             <a:off x="731520" y="640080"/>
-            <a:ext cx="7315200" cy="274320"/>
+            <a:ext cx="3657600" cy="274320"/>
           </a:xfrm>
           <a:prstGeom prst="rect">
             <a:avLst/>
@@ -50954,7 +50954,7 @@
         <p:spPr>
           <a:xfrm>
             <a:off x="731520" y="640080"/>
-            <a:ext cx="7315200" cy="274320"/>
+            <a:ext cx="3657600" cy="274320"/>
           </a:xfrm>
           <a:prstGeom prst="rect">
             <a:avLst/>
@@ -51032,7 +51032,7 @@
         <p:spPr>
           <a:xfrm>
             <a:off x="731520" y="2286000"/>
-            <a:ext cx="7315200" cy="274320"/>
+            <a:ext cx="3657600" cy="274320"/>
           </a:xfrm>
           <a:prstGeom prst="rect">
             <a:avLst/>
@@ -51071,7 +51071,7 @@
         <p:spPr>
           <a:xfrm>
             <a:off x="6263640" y="2286000"/>
-            <a:ext cx="7315200" cy="274320"/>
+            <a:ext cx="3657600" cy="274320"/>
           </a:xfrm>
           <a:prstGeom prst="rect">
             <a:avLst/>

--- a/class_plan/vibe_coding_workshop.pptx
+++ b/class_plan/vibe_coding_workshop.pptx
@@ -34630,7 +34630,7 @@
                 </a:solidFill>
                 <a:latin typeface="Microsoft JhengHei"/>
               </a:rPr>
-              <a:t>A.   把你專案的核心功能寫成一行指令</a:t>
+              <a:t>A.   把核心功能寫成一行指令     例：summarize.sh news.txt</a:t>
             </a:r>
           </a:p>
         </p:txBody>
@@ -34669,7 +34669,7 @@
                 </a:solidFill>
                 <a:latin typeface="Microsoft JhengHei"/>
               </a:rPr>
-              <a:t>     例：summarize.sh news.txt</a:t>
+              <a:t>B.   寫腳本自動產測試資料        例：gen_data.sh 10</a:t>
             </a:r>
           </a:p>
         </p:txBody>
@@ -34708,162 +34708,6 @@
                 </a:solidFill>
                 <a:latin typeface="Microsoft JhengHei"/>
               </a:rPr>
-              <a:t/>
-            </a:r>
-          </a:p>
-        </p:txBody>
-      </p:sp>
-      <p:sp>
-        <p:nvSpPr>
-          <p:cNvPr id="12" name="TextBox 11"/>
-          <p:cNvSpPr txBox="1"/>
-          <p:nvPr/>
-        </p:nvSpPr>
-        <p:spPr>
-          <a:xfrm>
-            <a:off x="914400" y="5257800"/>
-            <a:ext cx="10332720" cy="457200"/>
-          </a:xfrm>
-          <a:prstGeom prst="rect">
-            <a:avLst/>
-          </a:prstGeom>
-          <a:noFill/>
-        </p:spPr>
-        <p:txBody>
-          <a:bodyPr wrap="square" lIns="45720" rIns="45720" tIns="18288" bIns="18288" anchor="t">
-            <a:spAutoFit/>
-          </a:bodyPr>
-          <a:lstStyle/>
-          <a:p>
-            <a:pPr algn="l">
-              <a:lnSpc>
-                <a:spcPct val="135000"/>
-              </a:lnSpc>
-            </a:pPr>
-            <a:r>
-              <a:rPr sz="1800" b="0" spc="-20">
-                <a:solidFill>
-                  <a:srgbClr val="3A3A3A"/>
-                </a:solidFill>
-                <a:latin typeface="Microsoft JhengHei"/>
-              </a:rPr>
-              <a:t>B.   寫一個自動產測試資料的腳本</a:t>
-            </a:r>
-          </a:p>
-        </p:txBody>
-      </p:sp>
-      <p:sp>
-        <p:nvSpPr>
-          <p:cNvPr id="13" name="TextBox 12"/>
-          <p:cNvSpPr txBox="1"/>
-          <p:nvPr/>
-        </p:nvSpPr>
-        <p:spPr>
-          <a:xfrm>
-            <a:off x="914400" y="5715000"/>
-            <a:ext cx="10332720" cy="457200"/>
-          </a:xfrm>
-          <a:prstGeom prst="rect">
-            <a:avLst/>
-          </a:prstGeom>
-          <a:noFill/>
-        </p:spPr>
-        <p:txBody>
-          <a:bodyPr wrap="square" lIns="45720" rIns="45720" tIns="18288" bIns="18288" anchor="t">
-            <a:spAutoFit/>
-          </a:bodyPr>
-          <a:lstStyle/>
-          <a:p>
-            <a:pPr algn="l">
-              <a:lnSpc>
-                <a:spcPct val="135000"/>
-              </a:lnSpc>
-            </a:pPr>
-            <a:r>
-              <a:rPr sz="1800" b="0" spc="-20">
-                <a:solidFill>
-                  <a:srgbClr val="3A3A3A"/>
-                </a:solidFill>
-                <a:latin typeface="Microsoft JhengHei"/>
-              </a:rPr>
-              <a:t>     例：gen_data.sh 10  → 產 10 筆假資料</a:t>
-            </a:r>
-          </a:p>
-        </p:txBody>
-      </p:sp>
-      <p:sp>
-        <p:nvSpPr>
-          <p:cNvPr id="14" name="TextBox 13"/>
-          <p:cNvSpPr txBox="1"/>
-          <p:nvPr/>
-        </p:nvSpPr>
-        <p:spPr>
-          <a:xfrm>
-            <a:off x="914400" y="6172200"/>
-            <a:ext cx="10332720" cy="457200"/>
-          </a:xfrm>
-          <a:prstGeom prst="rect">
-            <a:avLst/>
-          </a:prstGeom>
-          <a:noFill/>
-        </p:spPr>
-        <p:txBody>
-          <a:bodyPr wrap="square" lIns="45720" rIns="45720" tIns="18288" bIns="18288" anchor="t">
-            <a:spAutoFit/>
-          </a:bodyPr>
-          <a:lstStyle/>
-          <a:p>
-            <a:pPr algn="l">
-              <a:lnSpc>
-                <a:spcPct val="135000"/>
-              </a:lnSpc>
-            </a:pPr>
-            <a:r>
-              <a:rPr sz="1800" b="0" spc="-20">
-                <a:solidFill>
-                  <a:srgbClr val="3A3A3A"/>
-                </a:solidFill>
-                <a:latin typeface="Microsoft JhengHei"/>
-              </a:rPr>
-              <a:t/>
-            </a:r>
-          </a:p>
-        </p:txBody>
-      </p:sp>
-      <p:sp>
-        <p:nvSpPr>
-          <p:cNvPr id="15" name="TextBox 14"/>
-          <p:cNvSpPr txBox="1"/>
-          <p:nvPr/>
-        </p:nvSpPr>
-        <p:spPr>
-          <a:xfrm>
-            <a:off x="914400" y="6629400"/>
-            <a:ext cx="10332720" cy="457200"/>
-          </a:xfrm>
-          <a:prstGeom prst="rect">
-            <a:avLst/>
-          </a:prstGeom>
-          <a:noFill/>
-        </p:spPr>
-        <p:txBody>
-          <a:bodyPr wrap="square" lIns="45720" rIns="45720" tIns="18288" bIns="18288" anchor="t">
-            <a:spAutoFit/>
-          </a:bodyPr>
-          <a:lstStyle/>
-          <a:p>
-            <a:pPr algn="l">
-              <a:lnSpc>
-                <a:spcPct val="135000"/>
-              </a:lnSpc>
-            </a:pPr>
-            <a:r>
-              <a:rPr sz="1800" b="0" spc="-20">
-                <a:solidFill>
-                  <a:srgbClr val="3A3A3A"/>
-                </a:solidFill>
-                <a:latin typeface="Microsoft JhengHei"/>
-              </a:rPr>
               <a:t>C.   寫一個「每天跑一次」的小工具（不實際排程）</a:t>
             </a:r>
           </a:p>
@@ -34871,7 +34715,7 @@
       </p:sp>
       <p:cxnSp>
         <p:nvCxnSpPr>
-          <p:cNvPr id="16" name="Connector 15"/>
+          <p:cNvPr id="12" name="Connector 11"/>
           <p:cNvCxnSpPr/>
           <p:nvPr/>
         </p:nvCxnSpPr>
@@ -34906,7 +34750,7 @@
       </p:cxnSp>
       <p:sp>
         <p:nvSpPr>
-          <p:cNvPr id="17" name="TextBox 16"/>
+          <p:cNvPr id="13" name="TextBox 12"/>
           <p:cNvSpPr txBox="1"/>
           <p:nvPr/>
         </p:nvSpPr>
@@ -34945,7 +34789,7 @@
       </p:sp>
       <p:sp>
         <p:nvSpPr>
-          <p:cNvPr id="18" name="TextBox 17"/>
+          <p:cNvPr id="14" name="TextBox 13"/>
           <p:cNvSpPr txBox="1"/>
           <p:nvPr/>
         </p:nvSpPr>
@@ -34984,7 +34828,7 @@
       </p:sp>
       <p:cxnSp>
         <p:nvCxnSpPr>
-          <p:cNvPr id="19" name="Connector 18"/>
+          <p:cNvPr id="15" name="Connector 14"/>
           <p:cNvCxnSpPr/>
           <p:nvPr/>
         </p:nvCxnSpPr>
@@ -35019,7 +34863,7 @@
       </p:cxnSp>
       <p:sp>
         <p:nvSpPr>
-          <p:cNvPr id="20" name="TextBox 19"/>
+          <p:cNvPr id="16" name="TextBox 15"/>
           <p:cNvSpPr txBox="1"/>
           <p:nvPr/>
         </p:nvSpPr>
@@ -35058,7 +34902,7 @@
       </p:sp>
       <p:sp>
         <p:nvSpPr>
-          <p:cNvPr id="21" name="TextBox 20"/>
+          <p:cNvPr id="17" name="TextBox 16"/>
           <p:cNvSpPr txBox="1"/>
           <p:nvPr/>
         </p:nvSpPr>

--- a/class_plan/vibe_coding_workshop.pptx
+++ b/class_plan/vibe_coding_workshop.pptx
@@ -3606,7 +3606,7 @@
               </a:lnSpc>
             </a:pPr>
             <a:r>
-              <a:rPr sz="6800" b="1" spc="-300">
+              <a:rPr sz="5200" b="1" spc="-200">
                 <a:solidFill>
                   <a:srgbClr val="111111"/>
                 </a:solidFill>
@@ -3645,7 +3645,7 @@
               </a:lnSpc>
             </a:pPr>
             <a:r>
-              <a:rPr sz="6800" b="1" spc="-300">
+              <a:rPr sz="5200" b="1" spc="-200">
                 <a:solidFill>
                   <a:srgbClr val="111111"/>
                 </a:solidFill>
@@ -4668,7 +4668,7 @@
               </a:lnSpc>
             </a:pPr>
             <a:r>
-              <a:rPr sz="4000" b="1" spc="-130">
+              <a:rPr sz="3200" b="1" spc="-100">
                 <a:solidFill>
                   <a:srgbClr val="111111"/>
                 </a:solidFill>
@@ -5318,7 +5318,7 @@
               </a:lnSpc>
             </a:pPr>
             <a:r>
-              <a:rPr sz="4000" b="1" spc="-130">
+              <a:rPr sz="3200" b="1" spc="-100">
                 <a:solidFill>
                   <a:srgbClr val="111111"/>
                 </a:solidFill>
@@ -6604,7 +6604,7 @@
               </a:lnSpc>
             </a:pPr>
             <a:r>
-              <a:rPr sz="7200" b="1" spc="-250">
+              <a:rPr sz="5400" b="1" spc="-200">
                 <a:solidFill>
                   <a:srgbClr val="111111"/>
                 </a:solidFill>
@@ -7236,7 +7236,7 @@
               </a:lnSpc>
             </a:pPr>
             <a:r>
-              <a:rPr sz="8800" b="1" spc="-350">
+              <a:rPr sz="6400" b="1" spc="-250">
                 <a:solidFill>
                   <a:srgbClr val="111111"/>
                 </a:solidFill>
@@ -8925,7 +8925,7 @@
               </a:lnSpc>
             </a:pPr>
             <a:r>
-              <a:rPr sz="4400" b="1" spc="-150">
+              <a:rPr sz="3400" b="1" spc="-120">
                 <a:solidFill>
                   <a:srgbClr val="111111"/>
                 </a:solidFill>
@@ -9050,7 +9050,7 @@
               </a:lnSpc>
             </a:pPr>
             <a:r>
-              <a:rPr sz="5200" b="1" spc="-250">
+              <a:rPr sz="4000" b="1" spc="-200">
                 <a:solidFill>
                   <a:srgbClr val="111111"/>
                 </a:solidFill>
@@ -9253,7 +9253,7 @@
               </a:lnSpc>
             </a:pPr>
             <a:r>
-              <a:rPr sz="5200" b="1" spc="-250">
+              <a:rPr sz="4000" b="1" spc="-200">
                 <a:solidFill>
                   <a:srgbClr val="111111"/>
                 </a:solidFill>
@@ -9456,7 +9456,7 @@
               </a:lnSpc>
             </a:pPr>
             <a:r>
-              <a:rPr sz="5200" b="1" spc="-250">
+              <a:rPr sz="4000" b="1" spc="-200">
                 <a:solidFill>
                   <a:srgbClr val="111111"/>
                 </a:solidFill>
@@ -9659,7 +9659,7 @@
               </a:lnSpc>
             </a:pPr>
             <a:r>
-              <a:rPr sz="5200" b="1" spc="-250">
+              <a:rPr sz="4000" b="1" spc="-200">
                 <a:solidFill>
                   <a:srgbClr val="111111"/>
                 </a:solidFill>
@@ -9862,7 +9862,7 @@
               </a:lnSpc>
             </a:pPr>
             <a:r>
-              <a:rPr sz="5200" b="1" spc="-250">
+              <a:rPr sz="4000" b="1" spc="-200">
                 <a:solidFill>
                   <a:srgbClr val="111111"/>
                 </a:solidFill>
@@ -10065,7 +10065,7 @@
               </a:lnSpc>
             </a:pPr>
             <a:r>
-              <a:rPr sz="5200" b="1" spc="-250">
+              <a:rPr sz="4000" b="1" spc="-200">
                 <a:solidFill>
                   <a:srgbClr val="111111"/>
                 </a:solidFill>
@@ -11144,7 +11144,7 @@
               </a:lnSpc>
             </a:pPr>
             <a:r>
-              <a:rPr sz="4400" b="1" spc="-150">
+              <a:rPr sz="3400" b="1" spc="-120">
                 <a:solidFill>
                   <a:srgbClr val="111111"/>
                 </a:solidFill>
@@ -13209,7 +13209,7 @@
               </a:lnSpc>
             </a:pPr>
             <a:r>
-              <a:rPr sz="4000" b="1" spc="-130">
+              <a:rPr sz="3200" b="1" spc="-100">
                 <a:solidFill>
                   <a:srgbClr val="111111"/>
                 </a:solidFill>
@@ -14265,7 +14265,7 @@
               </a:lnSpc>
             </a:pPr>
             <a:r>
-              <a:rPr sz="4400" b="1" spc="-150">
+              <a:rPr sz="3400" b="1" spc="-120">
                 <a:solidFill>
                   <a:srgbClr val="111111"/>
                 </a:solidFill>
@@ -17430,7 +17430,7 @@
               </a:lnSpc>
             </a:pPr>
             <a:r>
-              <a:rPr sz="8800" b="1" spc="-350">
+              <a:rPr sz="6400" b="1" spc="-250">
                 <a:solidFill>
                   <a:srgbClr val="111111"/>
                 </a:solidFill>
@@ -17738,7 +17738,7 @@
               </a:lnSpc>
             </a:pPr>
             <a:r>
-              <a:rPr sz="4000" b="1" spc="-130">
+              <a:rPr sz="3200" b="1" spc="-100">
                 <a:solidFill>
                   <a:srgbClr val="111111"/>
                 </a:solidFill>
@@ -18455,7 +18455,7 @@
               </a:lnSpc>
             </a:pPr>
             <a:r>
-              <a:rPr sz="4400" b="1" spc="-150">
+              <a:rPr sz="3400" b="1" spc="-120">
                 <a:solidFill>
                   <a:srgbClr val="111111"/>
                 </a:solidFill>
@@ -19737,7 +19737,7 @@
               </a:lnSpc>
             </a:pPr>
             <a:r>
-              <a:rPr sz="4000" b="1" spc="-130">
+              <a:rPr sz="3200" b="1" spc="-100">
                 <a:solidFill>
                   <a:srgbClr val="111111"/>
                 </a:solidFill>
@@ -21000,7 +21000,7 @@
               </a:lnSpc>
             </a:pPr>
             <a:r>
-              <a:rPr sz="8000" b="1" spc="-300">
+              <a:rPr sz="5800" b="1" spc="-200">
                 <a:solidFill>
                   <a:srgbClr val="111111"/>
                 </a:solidFill>
@@ -21039,7 +21039,7 @@
               </a:lnSpc>
             </a:pPr>
             <a:r>
-              <a:rPr sz="8000" b="1" spc="-300">
+              <a:rPr sz="5800" b="1" spc="-200">
                 <a:solidFill>
                   <a:srgbClr val="111111"/>
                 </a:solidFill>
@@ -22819,7 +22819,7 @@
               </a:lnSpc>
             </a:pPr>
             <a:r>
-              <a:rPr sz="4000" b="1" spc="-130">
+              <a:rPr sz="3200" b="1" spc="-100">
                 <a:solidFill>
                   <a:srgbClr val="111111"/>
                 </a:solidFill>
@@ -24404,7 +24404,7 @@
               </a:lnSpc>
             </a:pPr>
             <a:r>
-              <a:rPr sz="4000" b="1" spc="-130">
+              <a:rPr sz="3200" b="1" spc="-100">
                 <a:solidFill>
                   <a:srgbClr val="111111"/>
                 </a:solidFill>
@@ -25250,7 +25250,7 @@
               </a:lnSpc>
             </a:pPr>
             <a:r>
-              <a:rPr sz="7200" b="1" spc="-250">
+              <a:rPr sz="5400" b="1" spc="-200">
                 <a:solidFill>
                   <a:srgbClr val="111111"/>
                 </a:solidFill>
@@ -25687,7 +25687,7 @@
               </a:lnSpc>
             </a:pPr>
             <a:r>
-              <a:rPr sz="4000" b="1" spc="-130">
+              <a:rPr sz="3200" b="1" spc="-100">
                 <a:solidFill>
                   <a:srgbClr val="111111"/>
                 </a:solidFill>
@@ -26560,7 +26560,7 @@
               </a:lnSpc>
             </a:pPr>
             <a:r>
-              <a:rPr sz="8800" b="1" spc="-350">
+              <a:rPr sz="6400" b="1" spc="-250">
                 <a:solidFill>
                   <a:srgbClr val="111111"/>
                 </a:solidFill>
@@ -26868,7 +26868,7 @@
               </a:lnSpc>
             </a:pPr>
             <a:r>
-              <a:rPr sz="4400" b="1" spc="-150">
+              <a:rPr sz="3400" b="1" spc="-120">
                 <a:solidFill>
                   <a:srgbClr val="111111"/>
                 </a:solidFill>
@@ -27892,7 +27892,7 @@
               </a:lnSpc>
             </a:pPr>
             <a:r>
-              <a:rPr sz="4000" b="1" spc="-130">
+              <a:rPr sz="3200" b="1" spc="-100">
                 <a:solidFill>
                   <a:srgbClr val="111111"/>
                 </a:solidFill>
@@ -29904,7 +29904,7 @@
               </a:lnSpc>
             </a:pPr>
             <a:r>
-              <a:rPr sz="4000" b="1" spc="-130">
+              <a:rPr sz="3200" b="1" spc="-100">
                 <a:solidFill>
                   <a:srgbClr val="111111"/>
                 </a:solidFill>
@@ -30609,7 +30609,7 @@
               </a:lnSpc>
             </a:pPr>
             <a:r>
-              <a:rPr sz="4000" b="1" spc="-100">
+              <a:rPr sz="3200" b="1" spc="-80">
                 <a:solidFill>
                   <a:srgbClr val="111111"/>
                 </a:solidFill>
@@ -32536,7 +32536,7 @@
               </a:lnSpc>
             </a:pPr>
             <a:r>
-              <a:rPr sz="4000" b="1" spc="-130">
+              <a:rPr sz="3200" b="1" spc="-100">
                 <a:solidFill>
                   <a:srgbClr val="111111"/>
                 </a:solidFill>
@@ -33340,8 +33340,32 @@
                   </a:txBody>
                   <a:tcPr marL="73152" marR="73152" marT="45720" marB="45720" anchor="ctr">
                     <a:solidFill>
-                      <a:srgbClr val="F5F5F3"/>
+                      <a:srgbClr val="ECECE8"/>
                     </a:solidFill>
+                    <a:lnL w="9525" cap="flat" cmpd="sng" algn="ctr">
+                      <a:solidFill>
+                        <a:srgbClr val="E8E8E5"/>
+                      </a:solidFill>
+                      <a:prstDash val="solid"/>
+                    </a:lnL>
+                    <a:lnR w="9525" cap="flat" cmpd="sng" algn="ctr">
+                      <a:solidFill>
+                        <a:srgbClr val="E8E8E5"/>
+                      </a:solidFill>
+                      <a:prstDash val="solid"/>
+                    </a:lnR>
+                    <a:lnT w="9525" cap="flat" cmpd="sng" algn="ctr">
+                      <a:solidFill>
+                        <a:srgbClr val="E8E8E5"/>
+                      </a:solidFill>
+                      <a:prstDash val="solid"/>
+                    </a:lnT>
+                    <a:lnB w="9525" cap="flat" cmpd="sng" algn="ctr">
+                      <a:solidFill>
+                        <a:srgbClr val="E8E8E5"/>
+                      </a:solidFill>
+                      <a:prstDash val="solid"/>
+                    </a:lnB>
                   </a:tcPr>
                 </a:tc>
                 <a:tc>
@@ -33363,8 +33387,32 @@
                   </a:txBody>
                   <a:tcPr marL="73152" marR="73152" marT="45720" marB="45720" anchor="ctr">
                     <a:solidFill>
-                      <a:srgbClr val="F5F5F3"/>
+                      <a:srgbClr val="ECECE8"/>
                     </a:solidFill>
+                    <a:lnL w="9525" cap="flat" cmpd="sng" algn="ctr">
+                      <a:solidFill>
+                        <a:srgbClr val="E8E8E5"/>
+                      </a:solidFill>
+                      <a:prstDash val="solid"/>
+                    </a:lnL>
+                    <a:lnR w="9525" cap="flat" cmpd="sng" algn="ctr">
+                      <a:solidFill>
+                        <a:srgbClr val="E8E8E5"/>
+                      </a:solidFill>
+                      <a:prstDash val="solid"/>
+                    </a:lnR>
+                    <a:lnT w="9525" cap="flat" cmpd="sng" algn="ctr">
+                      <a:solidFill>
+                        <a:srgbClr val="E8E8E5"/>
+                      </a:solidFill>
+                      <a:prstDash val="solid"/>
+                    </a:lnT>
+                    <a:lnB w="9525" cap="flat" cmpd="sng" algn="ctr">
+                      <a:solidFill>
+                        <a:srgbClr val="E8E8E5"/>
+                      </a:solidFill>
+                      <a:prstDash val="solid"/>
+                    </a:lnB>
                   </a:tcPr>
                 </a:tc>
                 <a:tc>
@@ -33386,8 +33434,32 @@
                   </a:txBody>
                   <a:tcPr marL="73152" marR="73152" marT="45720" marB="45720" anchor="ctr">
                     <a:solidFill>
-                      <a:srgbClr val="F5F5F3"/>
+                      <a:srgbClr val="ECECE8"/>
                     </a:solidFill>
+                    <a:lnL w="9525" cap="flat" cmpd="sng" algn="ctr">
+                      <a:solidFill>
+                        <a:srgbClr val="E8E8E5"/>
+                      </a:solidFill>
+                      <a:prstDash val="solid"/>
+                    </a:lnL>
+                    <a:lnR w="9525" cap="flat" cmpd="sng" algn="ctr">
+                      <a:solidFill>
+                        <a:srgbClr val="E8E8E5"/>
+                      </a:solidFill>
+                      <a:prstDash val="solid"/>
+                    </a:lnR>
+                    <a:lnT w="9525" cap="flat" cmpd="sng" algn="ctr">
+                      <a:solidFill>
+                        <a:srgbClr val="E8E8E5"/>
+                      </a:solidFill>
+                      <a:prstDash val="solid"/>
+                    </a:lnT>
+                    <a:lnB w="9525" cap="flat" cmpd="sng" algn="ctr">
+                      <a:solidFill>
+                        <a:srgbClr val="E8E8E5"/>
+                      </a:solidFill>
+                      <a:prstDash val="solid"/>
+                    </a:lnB>
                   </a:tcPr>
                 </a:tc>
                 <a:tc>
@@ -33409,8 +33481,32 @@
                   </a:txBody>
                   <a:tcPr marL="73152" marR="73152" marT="45720" marB="45720" anchor="ctr">
                     <a:solidFill>
-                      <a:srgbClr val="F5F5F3"/>
+                      <a:srgbClr val="ECECE8"/>
                     </a:solidFill>
+                    <a:lnL w="9525" cap="flat" cmpd="sng" algn="ctr">
+                      <a:solidFill>
+                        <a:srgbClr val="E8E8E5"/>
+                      </a:solidFill>
+                      <a:prstDash val="solid"/>
+                    </a:lnL>
+                    <a:lnR w="9525" cap="flat" cmpd="sng" algn="ctr">
+                      <a:solidFill>
+                        <a:srgbClr val="E8E8E5"/>
+                      </a:solidFill>
+                      <a:prstDash val="solid"/>
+                    </a:lnR>
+                    <a:lnT w="9525" cap="flat" cmpd="sng" algn="ctr">
+                      <a:solidFill>
+                        <a:srgbClr val="E8E8E5"/>
+                      </a:solidFill>
+                      <a:prstDash val="solid"/>
+                    </a:lnT>
+                    <a:lnB w="9525" cap="flat" cmpd="sng" algn="ctr">
+                      <a:solidFill>
+                        <a:srgbClr val="E8E8E5"/>
+                      </a:solidFill>
+                      <a:prstDash val="solid"/>
+                    </a:lnB>
                   </a:tcPr>
                 </a:tc>
                 <a:tc>
@@ -33432,8 +33528,32 @@
                   </a:txBody>
                   <a:tcPr marL="73152" marR="73152" marT="45720" marB="45720" anchor="ctr">
                     <a:solidFill>
-                      <a:srgbClr val="F5F5F3"/>
+                      <a:srgbClr val="ECECE8"/>
                     </a:solidFill>
+                    <a:lnL w="9525" cap="flat" cmpd="sng" algn="ctr">
+                      <a:solidFill>
+                        <a:srgbClr val="E8E8E5"/>
+                      </a:solidFill>
+                      <a:prstDash val="solid"/>
+                    </a:lnL>
+                    <a:lnR w="9525" cap="flat" cmpd="sng" algn="ctr">
+                      <a:solidFill>
+                        <a:srgbClr val="E8E8E5"/>
+                      </a:solidFill>
+                      <a:prstDash val="solid"/>
+                    </a:lnR>
+                    <a:lnT w="9525" cap="flat" cmpd="sng" algn="ctr">
+                      <a:solidFill>
+                        <a:srgbClr val="E8E8E5"/>
+                      </a:solidFill>
+                      <a:prstDash val="solid"/>
+                    </a:lnT>
+                    <a:lnB w="9525" cap="flat" cmpd="sng" algn="ctr">
+                      <a:solidFill>
+                        <a:srgbClr val="E8E8E5"/>
+                      </a:solidFill>
+                      <a:prstDash val="solid"/>
+                    </a:lnB>
                   </a:tcPr>
                 </a:tc>
                 <a:tc>
@@ -33455,8 +33575,32 @@
                   </a:txBody>
                   <a:tcPr marL="73152" marR="73152" marT="45720" marB="45720" anchor="ctr">
                     <a:solidFill>
-                      <a:srgbClr val="F5F5F3"/>
+                      <a:srgbClr val="ECECE8"/>
                     </a:solidFill>
+                    <a:lnL w="9525" cap="flat" cmpd="sng" algn="ctr">
+                      <a:solidFill>
+                        <a:srgbClr val="E8E8E5"/>
+                      </a:solidFill>
+                      <a:prstDash val="solid"/>
+                    </a:lnL>
+                    <a:lnR w="9525" cap="flat" cmpd="sng" algn="ctr">
+                      <a:solidFill>
+                        <a:srgbClr val="E8E8E5"/>
+                      </a:solidFill>
+                      <a:prstDash val="solid"/>
+                    </a:lnR>
+                    <a:lnT w="9525" cap="flat" cmpd="sng" algn="ctr">
+                      <a:solidFill>
+                        <a:srgbClr val="E8E8E5"/>
+                      </a:solidFill>
+                      <a:prstDash val="solid"/>
+                    </a:lnT>
+                    <a:lnB w="9525" cap="flat" cmpd="sng" algn="ctr">
+                      <a:solidFill>
+                        <a:srgbClr val="E8E8E5"/>
+                      </a:solidFill>
+                      <a:prstDash val="solid"/>
+                    </a:lnB>
                   </a:tcPr>
                 </a:tc>
               </a:tr>
@@ -33482,6 +33626,30 @@
                     <a:solidFill>
                       <a:srgbClr val="FFFFFF"/>
                     </a:solidFill>
+                    <a:lnL w="9525" cap="flat" cmpd="sng" algn="ctr">
+                      <a:solidFill>
+                        <a:srgbClr val="E8E8E5"/>
+                      </a:solidFill>
+                      <a:prstDash val="solid"/>
+                    </a:lnL>
+                    <a:lnR w="9525" cap="flat" cmpd="sng" algn="ctr">
+                      <a:solidFill>
+                        <a:srgbClr val="E8E8E5"/>
+                      </a:solidFill>
+                      <a:prstDash val="solid"/>
+                    </a:lnR>
+                    <a:lnT w="9525" cap="flat" cmpd="sng" algn="ctr">
+                      <a:solidFill>
+                        <a:srgbClr val="E8E8E5"/>
+                      </a:solidFill>
+                      <a:prstDash val="solid"/>
+                    </a:lnT>
+                    <a:lnB w="9525" cap="flat" cmpd="sng" algn="ctr">
+                      <a:solidFill>
+                        <a:srgbClr val="E8E8E5"/>
+                      </a:solidFill>
+                      <a:prstDash val="solid"/>
+                    </a:lnB>
                   </a:tcPr>
                 </a:tc>
                 <a:tc>
@@ -33497,7 +33665,7 @@
                           </a:solidFill>
                           <a:latin typeface="Microsoft JhengHei"/>
                         </a:rPr>
-                        <a:t>❌</a:t>
+                        <a:t>—</a:t>
                       </a:r>
                     </a:p>
                   </a:txBody>
@@ -33505,6 +33673,30 @@
                     <a:solidFill>
                       <a:srgbClr val="FFFFFF"/>
                     </a:solidFill>
+                    <a:lnL w="9525" cap="flat" cmpd="sng" algn="ctr">
+                      <a:solidFill>
+                        <a:srgbClr val="E8E8E5"/>
+                      </a:solidFill>
+                      <a:prstDash val="solid"/>
+                    </a:lnL>
+                    <a:lnR w="9525" cap="flat" cmpd="sng" algn="ctr">
+                      <a:solidFill>
+                        <a:srgbClr val="E8E8E5"/>
+                      </a:solidFill>
+                      <a:prstDash val="solid"/>
+                    </a:lnR>
+                    <a:lnT w="9525" cap="flat" cmpd="sng" algn="ctr">
+                      <a:solidFill>
+                        <a:srgbClr val="E8E8E5"/>
+                      </a:solidFill>
+                      <a:prstDash val="solid"/>
+                    </a:lnT>
+                    <a:lnB w="9525" cap="flat" cmpd="sng" algn="ctr">
+                      <a:solidFill>
+                        <a:srgbClr val="E8E8E5"/>
+                      </a:solidFill>
+                      <a:prstDash val="solid"/>
+                    </a:lnB>
                   </a:tcPr>
                 </a:tc>
                 <a:tc>
@@ -33528,6 +33720,30 @@
                     <a:solidFill>
                       <a:srgbClr val="FEF7E6"/>
                     </a:solidFill>
+                    <a:lnL w="9525" cap="flat" cmpd="sng" algn="ctr">
+                      <a:solidFill>
+                        <a:srgbClr val="E8E8E5"/>
+                      </a:solidFill>
+                      <a:prstDash val="solid"/>
+                    </a:lnL>
+                    <a:lnR w="9525" cap="flat" cmpd="sng" algn="ctr">
+                      <a:solidFill>
+                        <a:srgbClr val="E8E8E5"/>
+                      </a:solidFill>
+                      <a:prstDash val="solid"/>
+                    </a:lnR>
+                    <a:lnT w="9525" cap="flat" cmpd="sng" algn="ctr">
+                      <a:solidFill>
+                        <a:srgbClr val="E8E8E5"/>
+                      </a:solidFill>
+                      <a:prstDash val="solid"/>
+                    </a:lnT>
+                    <a:lnB w="9525" cap="flat" cmpd="sng" algn="ctr">
+                      <a:solidFill>
+                        <a:srgbClr val="E8E8E5"/>
+                      </a:solidFill>
+                      <a:prstDash val="solid"/>
+                    </a:lnB>
                   </a:tcPr>
                 </a:tc>
                 <a:tc>
@@ -33551,6 +33767,30 @@
                     <a:solidFill>
                       <a:srgbClr val="FFFFFF"/>
                     </a:solidFill>
+                    <a:lnL w="9525" cap="flat" cmpd="sng" algn="ctr">
+                      <a:solidFill>
+                        <a:srgbClr val="E8E8E5"/>
+                      </a:solidFill>
+                      <a:prstDash val="solid"/>
+                    </a:lnL>
+                    <a:lnR w="9525" cap="flat" cmpd="sng" algn="ctr">
+                      <a:solidFill>
+                        <a:srgbClr val="E8E8E5"/>
+                      </a:solidFill>
+                      <a:prstDash val="solid"/>
+                    </a:lnR>
+                    <a:lnT w="9525" cap="flat" cmpd="sng" algn="ctr">
+                      <a:solidFill>
+                        <a:srgbClr val="E8E8E5"/>
+                      </a:solidFill>
+                      <a:prstDash val="solid"/>
+                    </a:lnT>
+                    <a:lnB w="9525" cap="flat" cmpd="sng" algn="ctr">
+                      <a:solidFill>
+                        <a:srgbClr val="E8E8E5"/>
+                      </a:solidFill>
+                      <a:prstDash val="solid"/>
+                    </a:lnB>
                   </a:tcPr>
                 </a:tc>
                 <a:tc>
@@ -33574,6 +33814,30 @@
                     <a:solidFill>
                       <a:srgbClr val="FFFFFF"/>
                     </a:solidFill>
+                    <a:lnL w="9525" cap="flat" cmpd="sng" algn="ctr">
+                      <a:solidFill>
+                        <a:srgbClr val="E8E8E5"/>
+                      </a:solidFill>
+                      <a:prstDash val="solid"/>
+                    </a:lnL>
+                    <a:lnR w="9525" cap="flat" cmpd="sng" algn="ctr">
+                      <a:solidFill>
+                        <a:srgbClr val="E8E8E5"/>
+                      </a:solidFill>
+                      <a:prstDash val="solid"/>
+                    </a:lnR>
+                    <a:lnT w="9525" cap="flat" cmpd="sng" algn="ctr">
+                      <a:solidFill>
+                        <a:srgbClr val="E8E8E5"/>
+                      </a:solidFill>
+                      <a:prstDash val="solid"/>
+                    </a:lnT>
+                    <a:lnB w="9525" cap="flat" cmpd="sng" algn="ctr">
+                      <a:solidFill>
+                        <a:srgbClr val="E8E8E5"/>
+                      </a:solidFill>
+                      <a:prstDash val="solid"/>
+                    </a:lnB>
                   </a:tcPr>
                 </a:tc>
                 <a:tc>
@@ -33597,6 +33861,30 @@
                     <a:solidFill>
                       <a:srgbClr val="FFFFFF"/>
                     </a:solidFill>
+                    <a:lnL w="9525" cap="flat" cmpd="sng" algn="ctr">
+                      <a:solidFill>
+                        <a:srgbClr val="E8E8E5"/>
+                      </a:solidFill>
+                      <a:prstDash val="solid"/>
+                    </a:lnL>
+                    <a:lnR w="9525" cap="flat" cmpd="sng" algn="ctr">
+                      <a:solidFill>
+                        <a:srgbClr val="E8E8E5"/>
+                      </a:solidFill>
+                      <a:prstDash val="solid"/>
+                    </a:lnR>
+                    <a:lnT w="9525" cap="flat" cmpd="sng" algn="ctr">
+                      <a:solidFill>
+                        <a:srgbClr val="E8E8E5"/>
+                      </a:solidFill>
+                      <a:prstDash val="solid"/>
+                    </a:lnT>
+                    <a:lnB w="9525" cap="flat" cmpd="sng" algn="ctr">
+                      <a:solidFill>
+                        <a:srgbClr val="E8E8E5"/>
+                      </a:solidFill>
+                      <a:prstDash val="solid"/>
+                    </a:lnB>
                   </a:tcPr>
                 </a:tc>
               </a:tr>
@@ -33620,8 +33908,32 @@
                   </a:txBody>
                   <a:tcPr marL="73152" marR="73152" marT="45720" marB="45720" anchor="ctr">
                     <a:solidFill>
-                      <a:srgbClr val="FFFFFF"/>
+                      <a:srgbClr val="FAFAF7"/>
                     </a:solidFill>
+                    <a:lnL w="9525" cap="flat" cmpd="sng" algn="ctr">
+                      <a:solidFill>
+                        <a:srgbClr val="E8E8E5"/>
+                      </a:solidFill>
+                      <a:prstDash val="solid"/>
+                    </a:lnL>
+                    <a:lnR w="9525" cap="flat" cmpd="sng" algn="ctr">
+                      <a:solidFill>
+                        <a:srgbClr val="E8E8E5"/>
+                      </a:solidFill>
+                      <a:prstDash val="solid"/>
+                    </a:lnR>
+                    <a:lnT w="9525" cap="flat" cmpd="sng" algn="ctr">
+                      <a:solidFill>
+                        <a:srgbClr val="E8E8E5"/>
+                      </a:solidFill>
+                      <a:prstDash val="solid"/>
+                    </a:lnT>
+                    <a:lnB w="9525" cap="flat" cmpd="sng" algn="ctr">
+                      <a:solidFill>
+                        <a:srgbClr val="E8E8E5"/>
+                      </a:solidFill>
+                      <a:prstDash val="solid"/>
+                    </a:lnB>
                   </a:tcPr>
                 </a:tc>
                 <a:tc>
@@ -33637,14 +33949,38 @@
                           </a:solidFill>
                           <a:latin typeface="Microsoft JhengHei"/>
                         </a:rPr>
-                        <a:t>❌</a:t>
+                        <a:t>—</a:t>
                       </a:r>
                     </a:p>
                   </a:txBody>
                   <a:tcPr marL="73152" marR="73152" marT="45720" marB="45720" anchor="ctr">
                     <a:solidFill>
-                      <a:srgbClr val="FFFFFF"/>
+                      <a:srgbClr val="FAFAF7"/>
                     </a:solidFill>
+                    <a:lnL w="9525" cap="flat" cmpd="sng" algn="ctr">
+                      <a:solidFill>
+                        <a:srgbClr val="E8E8E5"/>
+                      </a:solidFill>
+                      <a:prstDash val="solid"/>
+                    </a:lnL>
+                    <a:lnR w="9525" cap="flat" cmpd="sng" algn="ctr">
+                      <a:solidFill>
+                        <a:srgbClr val="E8E8E5"/>
+                      </a:solidFill>
+                      <a:prstDash val="solid"/>
+                    </a:lnR>
+                    <a:lnT w="9525" cap="flat" cmpd="sng" algn="ctr">
+                      <a:solidFill>
+                        <a:srgbClr val="E8E8E5"/>
+                      </a:solidFill>
+                      <a:prstDash val="solid"/>
+                    </a:lnT>
+                    <a:lnB w="9525" cap="flat" cmpd="sng" algn="ctr">
+                      <a:solidFill>
+                        <a:srgbClr val="E8E8E5"/>
+                      </a:solidFill>
+                      <a:prstDash val="solid"/>
+                    </a:lnB>
                   </a:tcPr>
                 </a:tc>
                 <a:tc>
@@ -33660,14 +33996,38 @@
                           </a:solidFill>
                           <a:latin typeface="Microsoft JhengHei"/>
                         </a:rPr>
-                        <a:t>✅</a:t>
+                        <a:t>✓</a:t>
                       </a:r>
                     </a:p>
                   </a:txBody>
                   <a:tcPr marL="73152" marR="73152" marT="45720" marB="45720" anchor="ctr">
                     <a:solidFill>
-                      <a:srgbClr val="FFFFFF"/>
+                      <a:srgbClr val="FAFAF7"/>
                     </a:solidFill>
+                    <a:lnL w="9525" cap="flat" cmpd="sng" algn="ctr">
+                      <a:solidFill>
+                        <a:srgbClr val="E8E8E5"/>
+                      </a:solidFill>
+                      <a:prstDash val="solid"/>
+                    </a:lnL>
+                    <a:lnR w="9525" cap="flat" cmpd="sng" algn="ctr">
+                      <a:solidFill>
+                        <a:srgbClr val="E8E8E5"/>
+                      </a:solidFill>
+                      <a:prstDash val="solid"/>
+                    </a:lnR>
+                    <a:lnT w="9525" cap="flat" cmpd="sng" algn="ctr">
+                      <a:solidFill>
+                        <a:srgbClr val="E8E8E5"/>
+                      </a:solidFill>
+                      <a:prstDash val="solid"/>
+                    </a:lnT>
+                    <a:lnB w="9525" cap="flat" cmpd="sng" algn="ctr">
+                      <a:solidFill>
+                        <a:srgbClr val="E8E8E5"/>
+                      </a:solidFill>
+                      <a:prstDash val="solid"/>
+                    </a:lnB>
                   </a:tcPr>
                 </a:tc>
                 <a:tc>
@@ -33683,14 +34043,38 @@
                           </a:solidFill>
                           <a:latin typeface="Microsoft JhengHei"/>
                         </a:rPr>
-                        <a:t>✅</a:t>
+                        <a:t>✓</a:t>
                       </a:r>
                     </a:p>
                   </a:txBody>
                   <a:tcPr marL="73152" marR="73152" marT="45720" marB="45720" anchor="ctr">
                     <a:solidFill>
-                      <a:srgbClr val="FFFFFF"/>
+                      <a:srgbClr val="FAFAF7"/>
                     </a:solidFill>
+                    <a:lnL w="9525" cap="flat" cmpd="sng" algn="ctr">
+                      <a:solidFill>
+                        <a:srgbClr val="E8E8E5"/>
+                      </a:solidFill>
+                      <a:prstDash val="solid"/>
+                    </a:lnL>
+                    <a:lnR w="9525" cap="flat" cmpd="sng" algn="ctr">
+                      <a:solidFill>
+                        <a:srgbClr val="E8E8E5"/>
+                      </a:solidFill>
+                      <a:prstDash val="solid"/>
+                    </a:lnR>
+                    <a:lnT w="9525" cap="flat" cmpd="sng" algn="ctr">
+                      <a:solidFill>
+                        <a:srgbClr val="E8E8E5"/>
+                      </a:solidFill>
+                      <a:prstDash val="solid"/>
+                    </a:lnT>
+                    <a:lnB w="9525" cap="flat" cmpd="sng" algn="ctr">
+                      <a:solidFill>
+                        <a:srgbClr val="E8E8E5"/>
+                      </a:solidFill>
+                      <a:prstDash val="solid"/>
+                    </a:lnB>
                   </a:tcPr>
                 </a:tc>
                 <a:tc>
@@ -33706,14 +34090,38 @@
                           </a:solidFill>
                           <a:latin typeface="Microsoft JhengHei"/>
                         </a:rPr>
-                        <a:t>✅</a:t>
+                        <a:t>✓</a:t>
                       </a:r>
                     </a:p>
                   </a:txBody>
                   <a:tcPr marL="73152" marR="73152" marT="45720" marB="45720" anchor="ctr">
                     <a:solidFill>
-                      <a:srgbClr val="FFFFFF"/>
+                      <a:srgbClr val="FAFAF7"/>
                     </a:solidFill>
+                    <a:lnL w="9525" cap="flat" cmpd="sng" algn="ctr">
+                      <a:solidFill>
+                        <a:srgbClr val="E8E8E5"/>
+                      </a:solidFill>
+                      <a:prstDash val="solid"/>
+                    </a:lnL>
+                    <a:lnR w="9525" cap="flat" cmpd="sng" algn="ctr">
+                      <a:solidFill>
+                        <a:srgbClr val="E8E8E5"/>
+                      </a:solidFill>
+                      <a:prstDash val="solid"/>
+                    </a:lnR>
+                    <a:lnT w="9525" cap="flat" cmpd="sng" algn="ctr">
+                      <a:solidFill>
+                        <a:srgbClr val="E8E8E5"/>
+                      </a:solidFill>
+                      <a:prstDash val="solid"/>
+                    </a:lnT>
+                    <a:lnB w="9525" cap="flat" cmpd="sng" algn="ctr">
+                      <a:solidFill>
+                        <a:srgbClr val="E8E8E5"/>
+                      </a:solidFill>
+                      <a:prstDash val="solid"/>
+                    </a:lnB>
                   </a:tcPr>
                 </a:tc>
                 <a:tc>
@@ -33729,14 +34137,38 @@
                           </a:solidFill>
                           <a:latin typeface="Microsoft JhengHei"/>
                         </a:rPr>
-                        <a:t>✅</a:t>
+                        <a:t>✓</a:t>
                       </a:r>
                     </a:p>
                   </a:txBody>
                   <a:tcPr marL="73152" marR="73152" marT="45720" marB="45720" anchor="ctr">
                     <a:solidFill>
-                      <a:srgbClr val="FFFFFF"/>
+                      <a:srgbClr val="FAFAF7"/>
                     </a:solidFill>
+                    <a:lnL w="9525" cap="flat" cmpd="sng" algn="ctr">
+                      <a:solidFill>
+                        <a:srgbClr val="E8E8E5"/>
+                      </a:solidFill>
+                      <a:prstDash val="solid"/>
+                    </a:lnL>
+                    <a:lnR w="9525" cap="flat" cmpd="sng" algn="ctr">
+                      <a:solidFill>
+                        <a:srgbClr val="E8E8E5"/>
+                      </a:solidFill>
+                      <a:prstDash val="solid"/>
+                    </a:lnR>
+                    <a:lnT w="9525" cap="flat" cmpd="sng" algn="ctr">
+                      <a:solidFill>
+                        <a:srgbClr val="E8E8E5"/>
+                      </a:solidFill>
+                      <a:prstDash val="solid"/>
+                    </a:lnT>
+                    <a:lnB w="9525" cap="flat" cmpd="sng" algn="ctr">
+                      <a:solidFill>
+                        <a:srgbClr val="E8E8E5"/>
+                      </a:solidFill>
+                      <a:prstDash val="solid"/>
+                    </a:lnB>
                   </a:tcPr>
                 </a:tc>
               </a:tr>
@@ -33762,6 +34194,30 @@
                     <a:solidFill>
                       <a:srgbClr val="FFFFFF"/>
                     </a:solidFill>
+                    <a:lnL w="9525" cap="flat" cmpd="sng" algn="ctr">
+                      <a:solidFill>
+                        <a:srgbClr val="E8E8E5"/>
+                      </a:solidFill>
+                      <a:prstDash val="solid"/>
+                    </a:lnL>
+                    <a:lnR w="9525" cap="flat" cmpd="sng" algn="ctr">
+                      <a:solidFill>
+                        <a:srgbClr val="E8E8E5"/>
+                      </a:solidFill>
+                      <a:prstDash val="solid"/>
+                    </a:lnR>
+                    <a:lnT w="9525" cap="flat" cmpd="sng" algn="ctr">
+                      <a:solidFill>
+                        <a:srgbClr val="E8E8E5"/>
+                      </a:solidFill>
+                      <a:prstDash val="solid"/>
+                    </a:lnT>
+                    <a:lnB w="9525" cap="flat" cmpd="sng" algn="ctr">
+                      <a:solidFill>
+                        <a:srgbClr val="E8E8E5"/>
+                      </a:solidFill>
+                      <a:prstDash val="solid"/>
+                    </a:lnB>
                   </a:tcPr>
                 </a:tc>
                 <a:tc>
@@ -33777,7 +34233,7 @@
                           </a:solidFill>
                           <a:latin typeface="Microsoft JhengHei"/>
                         </a:rPr>
-                        <a:t>✅</a:t>
+                        <a:t>✓</a:t>
                       </a:r>
                     </a:p>
                   </a:txBody>
@@ -33785,6 +34241,30 @@
                     <a:solidFill>
                       <a:srgbClr val="FFFFFF"/>
                     </a:solidFill>
+                    <a:lnL w="9525" cap="flat" cmpd="sng" algn="ctr">
+                      <a:solidFill>
+                        <a:srgbClr val="E8E8E5"/>
+                      </a:solidFill>
+                      <a:prstDash val="solid"/>
+                    </a:lnL>
+                    <a:lnR w="9525" cap="flat" cmpd="sng" algn="ctr">
+                      <a:solidFill>
+                        <a:srgbClr val="E8E8E5"/>
+                      </a:solidFill>
+                      <a:prstDash val="solid"/>
+                    </a:lnR>
+                    <a:lnT w="9525" cap="flat" cmpd="sng" algn="ctr">
+                      <a:solidFill>
+                        <a:srgbClr val="E8E8E5"/>
+                      </a:solidFill>
+                      <a:prstDash val="solid"/>
+                    </a:lnT>
+                    <a:lnB w="9525" cap="flat" cmpd="sng" algn="ctr">
+                      <a:solidFill>
+                        <a:srgbClr val="E8E8E5"/>
+                      </a:solidFill>
+                      <a:prstDash val="solid"/>
+                    </a:lnB>
                   </a:tcPr>
                 </a:tc>
                 <a:tc>
@@ -33800,7 +34280,7 @@
                           </a:solidFill>
                           <a:latin typeface="Microsoft JhengHei"/>
                         </a:rPr>
-                        <a:t>✅</a:t>
+                        <a:t>✓</a:t>
                       </a:r>
                     </a:p>
                   </a:txBody>
@@ -33808,6 +34288,30 @@
                     <a:solidFill>
                       <a:srgbClr val="FFFFFF"/>
                     </a:solidFill>
+                    <a:lnL w="9525" cap="flat" cmpd="sng" algn="ctr">
+                      <a:solidFill>
+                        <a:srgbClr val="E8E8E5"/>
+                      </a:solidFill>
+                      <a:prstDash val="solid"/>
+                    </a:lnL>
+                    <a:lnR w="9525" cap="flat" cmpd="sng" algn="ctr">
+                      <a:solidFill>
+                        <a:srgbClr val="E8E8E5"/>
+                      </a:solidFill>
+                      <a:prstDash val="solid"/>
+                    </a:lnR>
+                    <a:lnT w="9525" cap="flat" cmpd="sng" algn="ctr">
+                      <a:solidFill>
+                        <a:srgbClr val="E8E8E5"/>
+                      </a:solidFill>
+                      <a:prstDash val="solid"/>
+                    </a:lnT>
+                    <a:lnB w="9525" cap="flat" cmpd="sng" algn="ctr">
+                      <a:solidFill>
+                        <a:srgbClr val="E8E8E5"/>
+                      </a:solidFill>
+                      <a:prstDash val="solid"/>
+                    </a:lnB>
                   </a:tcPr>
                 </a:tc>
                 <a:tc>
@@ -33823,7 +34327,7 @@
                           </a:solidFill>
                           <a:latin typeface="Microsoft JhengHei"/>
                         </a:rPr>
-                        <a:t>✅</a:t>
+                        <a:t>✓</a:t>
                       </a:r>
                     </a:p>
                   </a:txBody>
@@ -33831,6 +34335,30 @@
                     <a:solidFill>
                       <a:srgbClr val="FFFFFF"/>
                     </a:solidFill>
+                    <a:lnL w="9525" cap="flat" cmpd="sng" algn="ctr">
+                      <a:solidFill>
+                        <a:srgbClr val="E8E8E5"/>
+                      </a:solidFill>
+                      <a:prstDash val="solid"/>
+                    </a:lnL>
+                    <a:lnR w="9525" cap="flat" cmpd="sng" algn="ctr">
+                      <a:solidFill>
+                        <a:srgbClr val="E8E8E5"/>
+                      </a:solidFill>
+                      <a:prstDash val="solid"/>
+                    </a:lnR>
+                    <a:lnT w="9525" cap="flat" cmpd="sng" algn="ctr">
+                      <a:solidFill>
+                        <a:srgbClr val="E8E8E5"/>
+                      </a:solidFill>
+                      <a:prstDash val="solid"/>
+                    </a:lnT>
+                    <a:lnB w="9525" cap="flat" cmpd="sng" algn="ctr">
+                      <a:solidFill>
+                        <a:srgbClr val="E8E8E5"/>
+                      </a:solidFill>
+                      <a:prstDash val="solid"/>
+                    </a:lnB>
                   </a:tcPr>
                 </a:tc>
                 <a:tc>
@@ -33846,7 +34374,7 @@
                           </a:solidFill>
                           <a:latin typeface="Microsoft JhengHei"/>
                         </a:rPr>
-                        <a:t>✅</a:t>
+                        <a:t>✓</a:t>
                       </a:r>
                     </a:p>
                   </a:txBody>
@@ -33854,6 +34382,30 @@
                     <a:solidFill>
                       <a:srgbClr val="FFFFFF"/>
                     </a:solidFill>
+                    <a:lnL w="9525" cap="flat" cmpd="sng" algn="ctr">
+                      <a:solidFill>
+                        <a:srgbClr val="E8E8E5"/>
+                      </a:solidFill>
+                      <a:prstDash val="solid"/>
+                    </a:lnL>
+                    <a:lnR w="9525" cap="flat" cmpd="sng" algn="ctr">
+                      <a:solidFill>
+                        <a:srgbClr val="E8E8E5"/>
+                      </a:solidFill>
+                      <a:prstDash val="solid"/>
+                    </a:lnR>
+                    <a:lnT w="9525" cap="flat" cmpd="sng" algn="ctr">
+                      <a:solidFill>
+                        <a:srgbClr val="E8E8E5"/>
+                      </a:solidFill>
+                      <a:prstDash val="solid"/>
+                    </a:lnT>
+                    <a:lnB w="9525" cap="flat" cmpd="sng" algn="ctr">
+                      <a:solidFill>
+                        <a:srgbClr val="E8E8E5"/>
+                      </a:solidFill>
+                      <a:prstDash val="solid"/>
+                    </a:lnB>
                   </a:tcPr>
                 </a:tc>
                 <a:tc>
@@ -33869,7 +34421,7 @@
                           </a:solidFill>
                           <a:latin typeface="Microsoft JhengHei"/>
                         </a:rPr>
-                        <a:t>✅</a:t>
+                        <a:t>✓</a:t>
                       </a:r>
                     </a:p>
                   </a:txBody>
@@ -33877,6 +34429,30 @@
                     <a:solidFill>
                       <a:srgbClr val="FFFFFF"/>
                     </a:solidFill>
+                    <a:lnL w="9525" cap="flat" cmpd="sng" algn="ctr">
+                      <a:solidFill>
+                        <a:srgbClr val="E8E8E5"/>
+                      </a:solidFill>
+                      <a:prstDash val="solid"/>
+                    </a:lnL>
+                    <a:lnR w="9525" cap="flat" cmpd="sng" algn="ctr">
+                      <a:solidFill>
+                        <a:srgbClr val="E8E8E5"/>
+                      </a:solidFill>
+                      <a:prstDash val="solid"/>
+                    </a:lnR>
+                    <a:lnT w="9525" cap="flat" cmpd="sng" algn="ctr">
+                      <a:solidFill>
+                        <a:srgbClr val="E8E8E5"/>
+                      </a:solidFill>
+                      <a:prstDash val="solid"/>
+                    </a:lnT>
+                    <a:lnB w="9525" cap="flat" cmpd="sng" algn="ctr">
+                      <a:solidFill>
+                        <a:srgbClr val="E8E8E5"/>
+                      </a:solidFill>
+                      <a:prstDash val="solid"/>
+                    </a:lnB>
                   </a:tcPr>
                 </a:tc>
               </a:tr>
@@ -33900,8 +34476,32 @@
                   </a:txBody>
                   <a:tcPr marL="73152" marR="73152" marT="45720" marB="45720" anchor="ctr">
                     <a:solidFill>
-                      <a:srgbClr val="FFFFFF"/>
+                      <a:srgbClr val="FAFAF7"/>
                     </a:solidFill>
+                    <a:lnL w="9525" cap="flat" cmpd="sng" algn="ctr">
+                      <a:solidFill>
+                        <a:srgbClr val="E8E8E5"/>
+                      </a:solidFill>
+                      <a:prstDash val="solid"/>
+                    </a:lnL>
+                    <a:lnR w="9525" cap="flat" cmpd="sng" algn="ctr">
+                      <a:solidFill>
+                        <a:srgbClr val="E8E8E5"/>
+                      </a:solidFill>
+                      <a:prstDash val="solid"/>
+                    </a:lnR>
+                    <a:lnT w="9525" cap="flat" cmpd="sng" algn="ctr">
+                      <a:solidFill>
+                        <a:srgbClr val="E8E8E5"/>
+                      </a:solidFill>
+                      <a:prstDash val="solid"/>
+                    </a:lnT>
+                    <a:lnB w="9525" cap="flat" cmpd="sng" algn="ctr">
+                      <a:solidFill>
+                        <a:srgbClr val="E8E8E5"/>
+                      </a:solidFill>
+                      <a:prstDash val="solid"/>
+                    </a:lnB>
                   </a:tcPr>
                 </a:tc>
                 <a:tc>
@@ -33917,14 +34517,38 @@
                           </a:solidFill>
                           <a:latin typeface="Microsoft JhengHei"/>
                         </a:rPr>
-                        <a:t>❌</a:t>
+                        <a:t>—</a:t>
                       </a:r>
                     </a:p>
                   </a:txBody>
                   <a:tcPr marL="73152" marR="73152" marT="45720" marB="45720" anchor="ctr">
                     <a:solidFill>
-                      <a:srgbClr val="FFFFFF"/>
+                      <a:srgbClr val="FAFAF7"/>
                     </a:solidFill>
+                    <a:lnL w="9525" cap="flat" cmpd="sng" algn="ctr">
+                      <a:solidFill>
+                        <a:srgbClr val="E8E8E5"/>
+                      </a:solidFill>
+                      <a:prstDash val="solid"/>
+                    </a:lnL>
+                    <a:lnR w="9525" cap="flat" cmpd="sng" algn="ctr">
+                      <a:solidFill>
+                        <a:srgbClr val="E8E8E5"/>
+                      </a:solidFill>
+                      <a:prstDash val="solid"/>
+                    </a:lnR>
+                    <a:lnT w="9525" cap="flat" cmpd="sng" algn="ctr">
+                      <a:solidFill>
+                        <a:srgbClr val="E8E8E5"/>
+                      </a:solidFill>
+                      <a:prstDash val="solid"/>
+                    </a:lnT>
+                    <a:lnB w="9525" cap="flat" cmpd="sng" algn="ctr">
+                      <a:solidFill>
+                        <a:srgbClr val="E8E8E5"/>
+                      </a:solidFill>
+                      <a:prstDash val="solid"/>
+                    </a:lnB>
                   </a:tcPr>
                 </a:tc>
                 <a:tc>
@@ -33940,14 +34564,38 @@
                           </a:solidFill>
                           <a:latin typeface="Microsoft JhengHei"/>
                         </a:rPr>
-                        <a:t>✅</a:t>
+                        <a:t>✓</a:t>
                       </a:r>
                     </a:p>
                   </a:txBody>
                   <a:tcPr marL="73152" marR="73152" marT="45720" marB="45720" anchor="ctr">
                     <a:solidFill>
-                      <a:srgbClr val="FFFFFF"/>
+                      <a:srgbClr val="FAFAF7"/>
                     </a:solidFill>
+                    <a:lnL w="9525" cap="flat" cmpd="sng" algn="ctr">
+                      <a:solidFill>
+                        <a:srgbClr val="E8E8E5"/>
+                      </a:solidFill>
+                      <a:prstDash val="solid"/>
+                    </a:lnL>
+                    <a:lnR w="9525" cap="flat" cmpd="sng" algn="ctr">
+                      <a:solidFill>
+                        <a:srgbClr val="E8E8E5"/>
+                      </a:solidFill>
+                      <a:prstDash val="solid"/>
+                    </a:lnR>
+                    <a:lnT w="9525" cap="flat" cmpd="sng" algn="ctr">
+                      <a:solidFill>
+                        <a:srgbClr val="E8E8E5"/>
+                      </a:solidFill>
+                      <a:prstDash val="solid"/>
+                    </a:lnT>
+                    <a:lnB w="9525" cap="flat" cmpd="sng" algn="ctr">
+                      <a:solidFill>
+                        <a:srgbClr val="E8E8E5"/>
+                      </a:solidFill>
+                      <a:prstDash val="solid"/>
+                    </a:lnB>
                   </a:tcPr>
                 </a:tc>
                 <a:tc>
@@ -33963,14 +34611,38 @@
                           </a:solidFill>
                           <a:latin typeface="Microsoft JhengHei"/>
                         </a:rPr>
-                        <a:t>✅</a:t>
+                        <a:t>✓</a:t>
                       </a:r>
                     </a:p>
                   </a:txBody>
                   <a:tcPr marL="73152" marR="73152" marT="45720" marB="45720" anchor="ctr">
                     <a:solidFill>
-                      <a:srgbClr val="FFFFFF"/>
+                      <a:srgbClr val="FAFAF7"/>
                     </a:solidFill>
+                    <a:lnL w="9525" cap="flat" cmpd="sng" algn="ctr">
+                      <a:solidFill>
+                        <a:srgbClr val="E8E8E5"/>
+                      </a:solidFill>
+                      <a:prstDash val="solid"/>
+                    </a:lnL>
+                    <a:lnR w="9525" cap="flat" cmpd="sng" algn="ctr">
+                      <a:solidFill>
+                        <a:srgbClr val="E8E8E5"/>
+                      </a:solidFill>
+                      <a:prstDash val="solid"/>
+                    </a:lnR>
+                    <a:lnT w="9525" cap="flat" cmpd="sng" algn="ctr">
+                      <a:solidFill>
+                        <a:srgbClr val="E8E8E5"/>
+                      </a:solidFill>
+                      <a:prstDash val="solid"/>
+                    </a:lnT>
+                    <a:lnB w="9525" cap="flat" cmpd="sng" algn="ctr">
+                      <a:solidFill>
+                        <a:srgbClr val="E8E8E5"/>
+                      </a:solidFill>
+                      <a:prstDash val="solid"/>
+                    </a:lnB>
                   </a:tcPr>
                 </a:tc>
                 <a:tc>
@@ -33986,14 +34658,38 @@
                           </a:solidFill>
                           <a:latin typeface="Microsoft JhengHei"/>
                         </a:rPr>
-                        <a:t>✅</a:t>
+                        <a:t>✓</a:t>
                       </a:r>
                     </a:p>
                   </a:txBody>
                   <a:tcPr marL="73152" marR="73152" marT="45720" marB="45720" anchor="ctr">
                     <a:solidFill>
-                      <a:srgbClr val="FFFFFF"/>
+                      <a:srgbClr val="FAFAF7"/>
                     </a:solidFill>
+                    <a:lnL w="9525" cap="flat" cmpd="sng" algn="ctr">
+                      <a:solidFill>
+                        <a:srgbClr val="E8E8E5"/>
+                      </a:solidFill>
+                      <a:prstDash val="solid"/>
+                    </a:lnL>
+                    <a:lnR w="9525" cap="flat" cmpd="sng" algn="ctr">
+                      <a:solidFill>
+                        <a:srgbClr val="E8E8E5"/>
+                      </a:solidFill>
+                      <a:prstDash val="solid"/>
+                    </a:lnR>
+                    <a:lnT w="9525" cap="flat" cmpd="sng" algn="ctr">
+                      <a:solidFill>
+                        <a:srgbClr val="E8E8E5"/>
+                      </a:solidFill>
+                      <a:prstDash val="solid"/>
+                    </a:lnT>
+                    <a:lnB w="9525" cap="flat" cmpd="sng" algn="ctr">
+                      <a:solidFill>
+                        <a:srgbClr val="E8E8E5"/>
+                      </a:solidFill>
+                      <a:prstDash val="solid"/>
+                    </a:lnB>
                   </a:tcPr>
                 </a:tc>
                 <a:tc>
@@ -34009,14 +34705,38 @@
                           </a:solidFill>
                           <a:latin typeface="Microsoft JhengHei"/>
                         </a:rPr>
-                        <a:t>✅</a:t>
+                        <a:t>✓</a:t>
                       </a:r>
                     </a:p>
                   </a:txBody>
                   <a:tcPr marL="73152" marR="73152" marT="45720" marB="45720" anchor="ctr">
                     <a:solidFill>
-                      <a:srgbClr val="FFFFFF"/>
+                      <a:srgbClr val="FAFAF7"/>
                     </a:solidFill>
+                    <a:lnL w="9525" cap="flat" cmpd="sng" algn="ctr">
+                      <a:solidFill>
+                        <a:srgbClr val="E8E8E5"/>
+                      </a:solidFill>
+                      <a:prstDash val="solid"/>
+                    </a:lnL>
+                    <a:lnR w="9525" cap="flat" cmpd="sng" algn="ctr">
+                      <a:solidFill>
+                        <a:srgbClr val="E8E8E5"/>
+                      </a:solidFill>
+                      <a:prstDash val="solid"/>
+                    </a:lnR>
+                    <a:lnT w="9525" cap="flat" cmpd="sng" algn="ctr">
+                      <a:solidFill>
+                        <a:srgbClr val="E8E8E5"/>
+                      </a:solidFill>
+                      <a:prstDash val="solid"/>
+                    </a:lnT>
+                    <a:lnB w="9525" cap="flat" cmpd="sng" algn="ctr">
+                      <a:solidFill>
+                        <a:srgbClr val="E8E8E5"/>
+                      </a:solidFill>
+                      <a:prstDash val="solid"/>
+                    </a:lnB>
                   </a:tcPr>
                 </a:tc>
               </a:tr>
@@ -34433,7 +35153,7 @@
               </a:lnSpc>
             </a:pPr>
             <a:r>
-              <a:rPr sz="4000" b="1" spc="-130">
+              <a:rPr sz="3200" b="1" spc="-100">
                 <a:solidFill>
                   <a:srgbClr val="111111"/>
                 </a:solidFill>
@@ -35068,7 +35788,7 @@
               </a:lnSpc>
             </a:pPr>
             <a:r>
-              <a:rPr sz="4000" b="1" spc="-130">
+              <a:rPr sz="3200" b="1" spc="-100">
                 <a:solidFill>
                   <a:srgbClr val="111111"/>
                 </a:solidFill>
@@ -36541,7 +37261,7 @@
               </a:lnSpc>
             </a:pPr>
             <a:r>
-              <a:rPr sz="4000" b="1" spc="-130">
+              <a:rPr sz="3200" b="1" spc="-100">
                 <a:solidFill>
                   <a:srgbClr val="111111"/>
                 </a:solidFill>
@@ -37031,7 +37751,7 @@
               </a:lnSpc>
             </a:pPr>
             <a:r>
-              <a:rPr sz="4000" b="1" spc="-130">
+              <a:rPr sz="3200" b="1" spc="-100">
                 <a:solidFill>
                   <a:srgbClr val="111111"/>
                 </a:solidFill>
@@ -37904,7 +38624,7 @@
               </a:lnSpc>
             </a:pPr>
             <a:r>
-              <a:rPr sz="8800" b="1" spc="-350">
+              <a:rPr sz="6400" b="1" spc="-250">
                 <a:solidFill>
                   <a:srgbClr val="111111"/>
                 </a:solidFill>
@@ -38212,7 +38932,7 @@
               </a:lnSpc>
             </a:pPr>
             <a:r>
-              <a:rPr sz="4000" b="1" spc="-130">
+              <a:rPr sz="3200" b="1" spc="-100">
                 <a:solidFill>
                   <a:srgbClr val="111111"/>
                 </a:solidFill>
@@ -39014,7 +39734,7 @@
               </a:lnSpc>
             </a:pPr>
             <a:r>
-              <a:rPr sz="4000" b="1" spc="-130">
+              <a:rPr sz="3200" b="1" spc="-100">
                 <a:solidFill>
                   <a:srgbClr val="111111"/>
                 </a:solidFill>
@@ -39821,7 +40541,7 @@
               </a:lnSpc>
             </a:pPr>
             <a:r>
-              <a:rPr sz="7200" b="1" spc="-250">
+              <a:rPr sz="5400" b="1" spc="-200">
                 <a:solidFill>
                   <a:srgbClr val="111111"/>
                 </a:solidFill>
@@ -43197,7 +43917,7 @@
               </a:lnSpc>
             </a:pPr>
             <a:r>
-              <a:rPr sz="5000" b="1" spc="-180">
+              <a:rPr sz="3800" b="1" spc="-150">
                 <a:solidFill>
                   <a:srgbClr val="111111"/>
                 </a:solidFill>
@@ -43236,7 +43956,7 @@
               </a:lnSpc>
             </a:pPr>
             <a:r>
-              <a:rPr sz="5000" b="1" spc="-180">
+              <a:rPr sz="3800" b="1" spc="-150">
                 <a:solidFill>
                   <a:srgbClr val="111111"/>
                 </a:solidFill>
@@ -43872,7 +44592,7 @@
               </a:lnSpc>
             </a:pPr>
             <a:r>
-              <a:rPr sz="6400" b="1" spc="-250">
+              <a:rPr sz="4800" b="1" spc="-200">
                 <a:solidFill>
                   <a:srgbClr val="111111"/>
                 </a:solidFill>
@@ -44527,7 +45247,7 @@
               </a:lnSpc>
             </a:pPr>
             <a:r>
-              <a:rPr sz="8800" b="1" spc="-350">
+              <a:rPr sz="6400" b="1" spc="-250">
                 <a:solidFill>
                   <a:srgbClr val="111111"/>
                 </a:solidFill>
@@ -45046,7 +45766,7 @@
               </a:lnSpc>
             </a:pPr>
             <a:r>
-              <a:rPr sz="7200" b="1" spc="-250">
+              <a:rPr sz="5400" b="1" spc="-200">
                 <a:solidFill>
                   <a:srgbClr val="111111"/>
                 </a:solidFill>
@@ -49147,7 +49867,7 @@
               </a:lnSpc>
             </a:pPr>
             <a:r>
-              <a:rPr sz="4000" b="1" spc="-130">
+              <a:rPr sz="3200" b="1" spc="-100">
                 <a:solidFill>
                   <a:srgbClr val="111111"/>
                 </a:solidFill>

--- a/class_plan/vibe_coding_workshop.pptx
+++ b/class_plan/vibe_coding_workshop.pptx
@@ -3842,7 +3842,7 @@
                 </a:solidFill>
                 <a:latin typeface="Microsoft JhengHei"/>
               </a:rPr>
-              <a:t>Antigravity</a:t>
+              <a:t>Antigravity 桌面版</a:t>
             </a:r>
           </a:p>
         </p:txBody>
@@ -3920,7 +3920,7 @@
                 </a:solidFill>
                 <a:latin typeface="Microsoft JhengHei"/>
               </a:rPr>
-              <a:t>Gemini CLI</a:t>
+              <a:t>Antigravity CLI</a:t>
             </a:r>
           </a:p>
         </p:txBody>
@@ -13944,7 +13944,7 @@
                 </a:solidFill>
                 <a:latin typeface="Consolas"/>
               </a:rPr>
-              <a:t>→ Gemini CLI 管道 &amp; 迭代</a:t>
+              <a:t>→ Antigravity CLI 管道 &amp; 迭代</a:t>
             </a:r>
           </a:p>
         </p:txBody>
@@ -14462,7 +14462,7 @@
                 </a:solidFill>
                 <a:latin typeface="Microsoft JhengHei"/>
               </a:rPr>
-              <a:t>免費，直接用 Gemini 最新模型</a:t>
+              <a:t>免費，直接用 Gemini 3 系列最新模型</a:t>
             </a:r>
           </a:p>
         </p:txBody>
@@ -26566,7 +26566,7 @@
                 </a:solidFill>
                 <a:latin typeface="Microsoft JhengHei"/>
               </a:rPr>
-              <a:t>Gemini CLI</a:t>
+              <a:t>Antigravity CLI（agy）</a:t>
             </a:r>
           </a:p>
         </p:txBody>
@@ -26622,6 +26622,22 @@
                 <a:latin typeface="Microsoft JhengHei"/>
               </a:rPr>
               <a:t>順便學 2026 通用 coding agent 技能。</a:t>
+            </a:r>
+          </a:p>
+          <a:p>
+            <a:pPr algn="l">
+              <a:lnSpc>
+                <a:spcPct val="140000"/>
+              </a:lnSpc>
+            </a:pPr>
+            <a:r>
+              <a:rPr sz="2600" b="0" spc="-40">
+                <a:solidFill>
+                  <a:srgbClr val="3A3A3A"/>
+                </a:solidFill>
+                <a:latin typeface="Microsoft JhengHei"/>
+              </a:rPr>
+              <a:t>Gemini CLI 6/18 停服，本模組教 Google 唯一現役 CLI。</a:t>
             </a:r>
           </a:p>
         </p:txBody>
@@ -26695,7 +26711,7 @@
                 </a:solidFill>
                 <a:latin typeface="Consolas"/>
               </a:rPr>
-              <a:t>M4 · GEMINI CLI</a:t>
+              <a:t>M4 · ANTIGRAVITY CLI</a:t>
             </a:r>
           </a:p>
         </p:txBody>
@@ -27310,7 +27326,7 @@
                 </a:solidFill>
                 <a:latin typeface="Microsoft JhengHei"/>
               </a:rPr>
-              <a:t>Antigravity</a:t>
+              <a:t>Antigravity 桌面版</a:t>
             </a:r>
           </a:p>
         </p:txBody>
@@ -27567,7 +27583,7 @@
                 </a:solidFill>
                 <a:latin typeface="Microsoft JhengHei"/>
               </a:rPr>
-              <a:t>Gemini CLI</a:t>
+              <a:t>Antigravity CLI</a:t>
             </a:r>
           </a:p>
         </p:txBody>
@@ -28234,7 +28250,7 @@
                 </a:solidFill>
                 <a:latin typeface="Consolas"/>
               </a:rPr>
-              <a:t>gemini "hello"</a:t>
+              <a:t>agy "hello"</a:t>
             </a:r>
           </a:p>
           <a:p>
@@ -28250,7 +28266,7 @@
                 </a:solidFill>
                 <a:latin typeface="Consolas"/>
               </a:rPr>
-              <a:t>gemini "把這句翻成英文：今天天氣真好"</a:t>
+              <a:t>agy "把這句翻成英文：今天天氣真好"</a:t>
             </a:r>
           </a:p>
           <a:p>
@@ -28266,7 +28282,7 @@
                 </a:solidFill>
                 <a:latin typeface="Consolas"/>
               </a:rPr>
-              <a:t>cat news.txt | gemini "用三句話摘要"</a:t>
+              <a:t>cat news.txt | agy "用三句話摘要"</a:t>
             </a:r>
           </a:p>
         </p:txBody>
@@ -28340,7 +28356,7 @@
                 </a:solidFill>
                 <a:latin typeface="Consolas"/>
               </a:rPr>
-              <a:t>M4 · GEMINI CLI</a:t>
+              <a:t>M4 · ANTIGRAVITY CLI</a:t>
             </a:r>
           </a:p>
         </p:txBody>
@@ -28784,7 +28800,7 @@
                 </a:solidFill>
                 <a:latin typeface="Microsoft JhengHei"/>
               </a:rPr>
-              <a:t>丟進 Antigravity</a:t>
+              <a:t>丟進 Antigravity 桌面版</a:t>
             </a:r>
           </a:p>
         </p:txBody>
@@ -28936,7 +28952,7 @@
                 </a:solidFill>
                 <a:latin typeface="Microsoft JhengHei"/>
               </a:rPr>
-              <a:t>打進 Gemini CLI</a:t>
+              <a:t>打進 Antigravity CLI</a:t>
             </a:r>
           </a:p>
         </p:txBody>
@@ -29162,7 +29178,7 @@
                 </a:solidFill>
                 <a:latin typeface="Consolas"/>
               </a:rPr>
-              <a:t>M4 · GEMINI CLI</a:t>
+              <a:t>M4 · ANTIGRAVITY CLI</a:t>
             </a:r>
           </a:p>
         </p:txBody>
@@ -29417,7 +29433,7 @@
                 </a:solidFill>
                 <a:latin typeface="Consolas"/>
               </a:rPr>
-              <a:t>gemini "幫我把這句中文翻成英文：你好嗎"</a:t>
+              <a:t>agy "幫我把這句中文翻成英文：你好嗎"</a:t>
             </a:r>
           </a:p>
           <a:p>
@@ -29465,7 +29481,7 @@
                 </a:solidFill>
                 <a:latin typeface="Consolas"/>
               </a:rPr>
-              <a:t>cat news.txt | gemini "用三句話摘要"</a:t>
+              <a:t>cat news.txt | agy "用三句話摘要"</a:t>
             </a:r>
           </a:p>
           <a:p>
@@ -29513,7 +29529,7 @@
                 </a:solidFill>
                 <a:latin typeface="Consolas"/>
               </a:rPr>
-              <a:t>gemini "這段 CSV 轉成 JSON" &lt; data.csv &gt; data.json</a:t>
+              <a:t>agy "這段 CSV 轉成 JSON" &lt; data.csv &gt; data.json</a:t>
             </a:r>
           </a:p>
           <a:p>
@@ -29561,7 +29577,7 @@
                 </a:solidFill>
                 <a:latin typeface="Consolas"/>
               </a:rPr>
-              <a:t>gemini "你是編輯(R)，用五要格式(K)摘要：$(cat input.txt)"</a:t>
+              <a:t>agy "你是編輯(R)，用 STRIKE 格式(K)摘要：$(cat input.txt)"</a:t>
             </a:r>
           </a:p>
           <a:p>
@@ -29609,7 +29625,7 @@
                 </a:solidFill>
                 <a:latin typeface="Consolas"/>
               </a:rPr>
-              <a:t>cat news.txt | gemini "摘要" | gemini "翻成英文"</a:t>
+              <a:t>cat news.txt | agy "摘要" | agy "翻成英文"</a:t>
             </a:r>
           </a:p>
           <a:p>
@@ -29641,7 +29657,7 @@
                 </a:solidFill>
                 <a:latin typeface="Consolas"/>
               </a:rPr>
-              <a:t># 進階：互動模式</a:t>
+              <a:t># 進階：互動模式（TUI）</a:t>
             </a:r>
           </a:p>
           <a:p>
@@ -29657,7 +29673,7 @@
                 </a:solidFill>
                 <a:latin typeface="Consolas"/>
               </a:rPr>
-              <a:t>gemini</a:t>
+              <a:t>agy</a:t>
             </a:r>
           </a:p>
         </p:txBody>
@@ -29731,7 +29747,7 @@
                 </a:solidFill>
                 <a:latin typeface="Consolas"/>
               </a:rPr>
-              <a:t>M4 · GEMINI CLI</a:t>
+              <a:t>M4 · ANTIGRAVITY CLI</a:t>
             </a:r>
           </a:p>
         </p:txBody>
@@ -30436,7 +30452,7 @@
                 </a:solidFill>
                 <a:latin typeface="Consolas"/>
               </a:rPr>
-              <a:t>M4 · GEMINI CLI</a:t>
+              <a:t>M4 · ANTIGRAVITY CLI</a:t>
             </a:r>
           </a:p>
         </p:txBody>
@@ -30576,7 +30592,7 @@
                 </a:solidFill>
                 <a:latin typeface="Consolas"/>
               </a:rPr>
-              <a:t>M4 · GEMINI.MD — PROJECT MEMORY</a:t>
+              <a:t>M4 · AGENTS.MD — PROJECT MEMORY</a:t>
             </a:r>
           </a:p>
         </p:txBody>
@@ -30615,7 +30631,7 @@
                 </a:solidFill>
                 <a:latin typeface="Consolas"/>
               </a:rPr>
-              <a:t>GEMINI.md</a:t>
+              <a:t>AGENTS.md</a:t>
             </a:r>
           </a:p>
         </p:txBody>
@@ -30648,13 +30664,13 @@
               </a:lnSpc>
             </a:pPr>
             <a:r>
-              <a:rPr sz="1800" b="0" spc="-20">
+              <a:rPr sz="1600" b="0" spc="-20">
                 <a:solidFill>
                   <a:srgbClr val="8A8A8A"/>
                 </a:solidFill>
                 <a:latin typeface="Microsoft JhengHei"/>
               </a:rPr>
-              <a:t>給 agent 一份「公司守則」。每次開工自動讀。</a:t>
+              <a:t>給 agent 一份「公司守則」。每次開工自動讀。業界共識：Antigravity / Cursor / OpenAI Codex 都認。</a:t>
             </a:r>
           </a:p>
         </p:txBody>
@@ -30833,7 +30849,7 @@
                 </a:solidFill>
                 <a:latin typeface="Consolas"/>
               </a:rPr>
-              <a:t>兩個層級（Gemini CLI 都吃）：</a:t>
+              <a:t>兩個層級（Antigravity CLI 都吃）：</a:t>
             </a:r>
           </a:p>
         </p:txBody>
@@ -30887,13 +30903,13 @@
               </a:lnSpc>
             </a:pPr>
             <a:r>
-              <a:rPr sz="1400">
+              <a:rPr sz="1300">
                 <a:solidFill>
                   <a:srgbClr val="111111"/>
                 </a:solidFill>
                 <a:latin typeface="Consolas"/>
               </a:rPr>
-              <a:t>~/.gemini/GEMINI.md   = 全域（所有專案都套用）</a:t>
+              <a:t>~/.gemini/antigravity-cli/AGENTS.md   = 全域（過渡期沿用 .gemini/ 路徑）</a:t>
             </a:r>
           </a:p>
           <a:p>
@@ -30903,13 +30919,13 @@
               </a:lnSpc>
             </a:pPr>
             <a:r>
-              <a:rPr sz="1400">
+              <a:rPr sz="1300">
                 <a:solidFill>
                   <a:srgbClr val="111111"/>
                 </a:solidFill>
                 <a:latin typeface="Consolas"/>
               </a:rPr>
-              <a:t>./GEMINI.md           = 這個專案專用</a:t>
+              <a:t>./AGENTS.md                           = 這個專案專用</a:t>
             </a:r>
           </a:p>
         </p:txBody>
@@ -30983,7 +30999,7 @@
                 </a:solidFill>
                 <a:latin typeface="Consolas"/>
               </a:rPr>
-              <a:t>M4 · GEMINI CLI</a:t>
+              <a:t>M4 · ANTIGRAVITY CLI</a:t>
             </a:r>
           </a:p>
         </p:txBody>
@@ -31261,7 +31277,7 @@
                 </a:solidFill>
                 <a:latin typeface="Consolas"/>
               </a:rPr>
-              <a:t>cat news.txt | gemini "摘要"</a:t>
+              <a:t>cat news.txt | agy "摘要"</a:t>
             </a:r>
           </a:p>
         </p:txBody>
@@ -31360,7 +31376,7 @@
                 </a:solidFill>
                 <a:latin typeface="Consolas"/>
               </a:rPr>
-              <a:t>gemini "@news.txt 幫我摘要"</a:t>
+              <a:t>agy "@news.txt 幫我摘要"</a:t>
             </a:r>
           </a:p>
         </p:txBody>
@@ -31533,7 +31549,7 @@
                 </a:solidFill>
                 <a:latin typeface="Consolas"/>
               </a:rPr>
-              <a:t>gemini "@README.md @src/main.py 解釋這個程式怎麼跑"</a:t>
+              <a:t>agy "@README.md @src/main.py 解釋這個程式怎麼跑"</a:t>
             </a:r>
           </a:p>
         </p:txBody>
@@ -31607,7 +31623,7 @@
                 </a:solidFill>
                 <a:latin typeface="Consolas"/>
               </a:rPr>
-              <a:t>M4 · GEMINI CLI</a:t>
+              <a:t>M4 · ANTIGRAVITY CLI</a:t>
             </a:r>
           </a:p>
         </p:txBody>
@@ -31825,7 +31841,7 @@
                 </a:solidFill>
                 <a:latin typeface="Microsoft JhengHei"/>
               </a:rPr>
-              <a:t>Gemini CLI 不只會聊天，預設帶這些工具：</a:t>
+              <a:t>Antigravity CLI 不只會聊天，預設帶這些工具：</a:t>
             </a:r>
           </a:p>
         </p:txBody>
@@ -32250,7 +32266,7 @@
                 </a:solidFill>
                 <a:latin typeface="Microsoft JhengHei"/>
               </a:rPr>
-              <a:t>預設模式：每步都確認  ← 初學者請用這個</a:t>
+              <a:t>首次啟動：逐資料夾信任授權  ← 只信你自己的工作區</a:t>
             </a:r>
           </a:p>
         </p:txBody>
@@ -32285,11 +32301,11 @@
             <a:r>
               <a:rPr sz="1500" b="0" spc="-20">
                 <a:solidFill>
-                  <a:srgbClr val="B45309"/>
-                </a:solidFill>
-                <a:latin typeface="Consolas"/>
-              </a:rPr>
-              <a:t>--yolo 模式：不問直接做  ← demo 用，別在重要專案開</a:t>
+                  <a:srgbClr val="156B4A"/>
+                </a:solidFill>
+                <a:latin typeface="Microsoft JhengHei"/>
+              </a:rPr>
+              <a:t>每次動手：先問你「可以嗎？」  ← 確認模式 = 你的保護傘</a:t>
             </a:r>
           </a:p>
         </p:txBody>
@@ -32363,7 +32379,7 @@
                 </a:solidFill>
                 <a:latin typeface="Consolas"/>
               </a:rPr>
-              <a:t>M4 · GEMINI CLI</a:t>
+              <a:t>M4 · ANTIGRAVITY CLI</a:t>
             </a:r>
           </a:p>
         </p:txBody>
@@ -33119,7 +33135,7 @@
                 </a:solidFill>
                 <a:latin typeface="Consolas"/>
               </a:rPr>
-              <a:t>M4 · GEMINI CLI</a:t>
+              <a:t>M4 · ANTIGRAVITY CLI</a:t>
             </a:r>
           </a:p>
         </p:txBody>
@@ -33298,7 +33314,7 @@
                 </a:solidFill>
                 <a:latin typeface="Microsoft JhengHei"/>
               </a:rPr>
-              <a:t>你學的不是 Gemini CLI，是通用技能</a:t>
+              <a:t>你學的不是 Antigravity CLI，是通用技能</a:t>
             </a:r>
           </a:p>
         </p:txBody>
@@ -33428,7 +33444,7 @@
                           </a:solidFill>
                           <a:latin typeface="Microsoft JhengHei"/>
                         </a:rPr>
-                        <a:t>Antigravity</a:t>
+                        <a:t>Antigravity 桌面</a:t>
                       </a:r>
                     </a:p>
                   </a:txBody>
@@ -33475,7 +33491,7 @@
                           </a:solidFill>
                           <a:latin typeface="Microsoft JhengHei"/>
                         </a:rPr>
-                        <a:t>Gemini CLI</a:t>
+                        <a:t>Antigravity CLI</a:t>
                       </a:r>
                     </a:p>
                   </a:txBody>
@@ -33712,7 +33728,7 @@
                           </a:solidFill>
                           <a:latin typeface="Consolas"/>
                         </a:rPr>
-                        <a:t>AGENTS.md *</a:t>
+                        <a:t>AGENTS.md</a:t>
                       </a:r>
                     </a:p>
                   </a:txBody>
@@ -33759,13 +33775,13 @@
                           </a:solidFill>
                           <a:latin typeface="Consolas"/>
                         </a:rPr>
-                        <a:t>GEMINI.md</a:t>
+                        <a:t>AGENTS.md ⭐</a:t>
                       </a:r>
                     </a:p>
                   </a:txBody>
                   <a:tcPr marL="73152" marR="73152" marT="45720" marB="45720" anchor="ctr">
                     <a:solidFill>
-                      <a:srgbClr val="FFFFFF"/>
+                      <a:srgbClr val="FEF7E6"/>
                     </a:solidFill>
                     <a:lnL w="9525" cap="flat" cmpd="sng" algn="ctr">
                       <a:solidFill>
@@ -34778,7 +34794,7 @@
                 </a:solidFill>
                 <a:latin typeface="Microsoft JhengHei"/>
               </a:rPr>
-              <a:t>*  Antigravity 與 Gemini CLI 共用 ~/.gemini/GEMINI.md 做全域設定（同一家人）</a:t>
+              <a:t>⭐  Antigravity CLI 用 AGENTS.md 取代舊版 GEMINI.md（agy plugin import gemini 一鍵搬）</a:t>
             </a:r>
           </a:p>
         </p:txBody>
@@ -34852,7 +34868,7 @@
                 </a:solidFill>
                 <a:latin typeface="Microsoft JhengHei"/>
               </a:rPr>
-              <a:t>🟡  AGENTS.md 是 2026 新興的「跨工具通用」格式</a:t>
+              <a:t>🟡  AGENTS.md 是 2026 業界共識的「跨工具通用」格式</a:t>
             </a:r>
           </a:p>
         </p:txBody>
@@ -34891,7 +34907,7 @@
                 </a:solidFill>
                 <a:latin typeface="Microsoft JhengHei"/>
               </a:rPr>
-              <a:t>    Cursor 與 Antigravity 都認得它，最值得學</a:t>
+              <a:t>    Antigravity / Cursor / OpenAI Codex 都認，最值得學</a:t>
             </a:r>
           </a:p>
         </p:txBody>
@@ -34965,7 +34981,7 @@
                 </a:solidFill>
                 <a:latin typeface="Consolas"/>
               </a:rPr>
-              <a:t>M4 · GEMINI CLI</a:t>
+              <a:t>M4 · ANTIGRAVITY CLI</a:t>
             </a:r>
           </a:p>
         </p:txBody>
@@ -35233,7 +35249,7 @@
                 </a:solidFill>
                 <a:latin typeface="Microsoft JhengHei"/>
               </a:rPr>
-              <a:t>必做（5 min）：在你的專案根目錄建一份 GEMINI.md（5 行就好）</a:t>
+              <a:t>必做（5 min）：在你的專案根目錄建一份 AGENTS.md（5 行就好）</a:t>
             </a:r>
           </a:p>
         </p:txBody>
@@ -35350,7 +35366,7 @@
                 </a:solidFill>
                 <a:latin typeface="Microsoft JhengHei"/>
               </a:rPr>
-              <a:t>A.   把核心功能寫成一行指令     例：summarize.sh news.txt</a:t>
+              <a:t>A.   把核心功能寫成一行 agy 指令     例：agy "summarize @news.txt &gt; out.md"</a:t>
             </a:r>
           </a:p>
         </p:txBody>
@@ -35389,7 +35405,7 @@
                 </a:solidFill>
                 <a:latin typeface="Microsoft JhengHei"/>
               </a:rPr>
-              <a:t>B.   寫腳本自動產測試資料        例：gen_data.sh 10</a:t>
+              <a:t>B.   寫腳本自動產測試資料           例：agy --headless "產 10 筆假資料 JSON"</a:t>
             </a:r>
           </a:p>
         </p:txBody>
@@ -35428,7 +35444,7 @@
                 </a:solidFill>
                 <a:latin typeface="Microsoft JhengHei"/>
               </a:rPr>
-              <a:t>C.   寫一個「每天跑一次」的小工具（不實際排程）</a:t>
+              <a:t>C.   寫一個「每天跑一次」的小工具（先手動跑；可後續用 Scheduled Tasks 排程）</a:t>
             </a:r>
           </a:p>
         </p:txBody>
@@ -35615,7 +35631,7 @@
                 </a:solidFill>
                 <a:latin typeface="Consolas"/>
               </a:rPr>
-              <a:t>M4 · GEMINI CLI</a:t>
+              <a:t>M4 · ANTIGRAVITY CLI</a:t>
             </a:r>
           </a:p>
         </p:txBody>
@@ -36554,7 +36570,7 @@
                 </a:solidFill>
                 <a:latin typeface="Microsoft JhengHei"/>
               </a:rPr>
-              <a:t>Gemini CLI</a:t>
+              <a:t>Antigravity CLI（agy）</a:t>
             </a:r>
           </a:p>
         </p:txBody>
@@ -37382,7 +37398,7 @@
                 </a:solidFill>
                 <a:latin typeface="Consolas"/>
               </a:rPr>
-              <a:t>├─  做有介面的東西                   →   Antigravity</a:t>
+              <a:t>├─  做有介面的東西                   →   Antigravity 桌面版</a:t>
             </a:r>
           </a:p>
           <a:p>
@@ -37398,7 +37414,7 @@
                 </a:solidFill>
                 <a:latin typeface="Consolas"/>
               </a:rPr>
-              <a:t>├─  把重複的事自動化                 →   Gemini CLI</a:t>
+              <a:t>├─  把重複的事自動化                 →   Antigravity CLI（agy）</a:t>
             </a:r>
           </a:p>
           <a:p>
@@ -37414,7 +37430,7 @@
                 </a:solidFill>
                 <a:latin typeface="Consolas"/>
               </a:rPr>
-              <a:t>├─  超大專案 / 多人協作              →   Antigravity（多 agent）</a:t>
+              <a:t>├─  超大專案 / 多人協作              →   Antigravity 桌面版（多 agent）</a:t>
             </a:r>
           </a:p>
           <a:p>
@@ -37578,7 +37594,7 @@
                 </a:solidFill>
                 <a:latin typeface="Consolas"/>
               </a:rPr>
-              <a:t>M4 · GEMINI CLI</a:t>
+              <a:t>M4 · ANTIGRAVITY CLI</a:t>
             </a:r>
           </a:p>
         </p:txBody>
@@ -37905,7 +37921,7 @@
                 </a:solidFill>
                 <a:latin typeface="Microsoft JhengHei"/>
               </a:rPr>
-              <a:t>·  Gemini CLI = AI Studio 的無介面版</a:t>
+              <a:t>·  Antigravity CLI（agy）= AI Studio 的無介面版 + 桌面版的腳本版</a:t>
             </a:r>
           </a:p>
         </p:txBody>
@@ -38053,7 +38069,7 @@
                 </a:solidFill>
                 <a:latin typeface="Microsoft JhengHei"/>
               </a:rPr>
-              <a:t>·  CLI 是你之後做「每天自動跑」的基礎</a:t>
+              <a:t>·  AGENTS.md 是業界共識，換工具不換腦袋</a:t>
             </a:r>
           </a:p>
         </p:txBody>
@@ -38240,7 +38256,7 @@
                 </a:solidFill>
                 <a:latin typeface="Consolas"/>
               </a:rPr>
-              <a:t>M4 · GEMINI CLI</a:t>
+              <a:t>M4 · ANTIGRAVITY CLI</a:t>
             </a:r>
           </a:p>
         </p:txBody>
@@ -41576,7 +41592,7 @@
                 </a:solidFill>
                 <a:latin typeface="Microsoft JhengHei"/>
               </a:rPr>
-              <a:t>□  用 Gemini CLI 做一件以前手動的事</a:t>
+              <a:t>□  用 Antigravity CLI（agy）做一件以前手動的事</a:t>
             </a:r>
           </a:p>
         </p:txBody>
@@ -46359,7 +46375,7 @@
                 </a:solidFill>
                 <a:latin typeface="Consolas"/>
               </a:rPr>
-              <a:t>ANTIGRAVITY</a:t>
+              <a:t>ANTIGRAVITY 桌面版</a:t>
             </a:r>
           </a:p>
         </p:txBody>
@@ -46487,7 +46503,7 @@
                 </a:solidFill>
                 <a:latin typeface="Consolas"/>
               </a:rPr>
-              <a:t>GEMINI CLI</a:t>
+              <a:t>ANTIGRAVITY CLI</a:t>
             </a:r>
           </a:p>
         </p:txBody>
@@ -46526,7 +46542,7 @@
                 </a:solidFill>
                 <a:latin typeface="Microsoft JhengHei"/>
               </a:rPr>
-              <a:t>cat news.txt | gemini "摘要" | gemini "翻成英文"（L3 鏈式）</a:t>
+              <a:t>cat news.txt | agy "摘要" | agy "翻成英文"（L3 鏈式）</a:t>
             </a:r>
           </a:p>
         </p:txBody>
@@ -46639,7 +46655,7 @@
                 </a:solidFill>
                 <a:latin typeface="Microsoft JhengHei"/>
               </a:rPr>
-              <a:t>教案 S16、S33 現成材料；Gemini 免費純文字額度綽綽有餘；L3 鏈式天然銜接 M4 CLI；30 人同時跑無壓力。</a:t>
+              <a:t>教案 S16、S33 現成材料；Gemini API 免費純文字額度綽綽有餘；L3 鏈式天然銜接 M4 CLI；30 人同時跑無壓力。</a:t>
             </a:r>
           </a:p>
         </p:txBody>
@@ -47148,7 +47164,7 @@
                 </a:solidFill>
                 <a:latin typeface="Consolas"/>
               </a:rPr>
-              <a:t>ANTIGRAVITY</a:t>
+              <a:t>ANTIGRAVITY 桌面版</a:t>
             </a:r>
           </a:p>
         </p:txBody>
@@ -47276,7 +47292,7 @@
                 </a:solidFill>
                 <a:latin typeface="Consolas"/>
               </a:rPr>
-              <a:t>GEMINI CLI</a:t>
+              <a:t>ANTIGRAVITY CLI</a:t>
             </a:r>
           </a:p>
         </p:txBody>
@@ -47315,7 +47331,7 @@
                 </a:solidFill>
                 <a:latin typeface="Microsoft JhengHei"/>
               </a:rPr>
-              <a:t>批次處理多場會議：for f in meetings/*.txt; do gemini &lt; $f; done</a:t>
+              <a:t>批次處理多場會議：for f in meetings/*.txt; do agy &lt; $f; done</a:t>
             </a:r>
           </a:p>
         </p:txBody>
@@ -47937,7 +47953,7 @@
                 </a:solidFill>
                 <a:latin typeface="Consolas"/>
               </a:rPr>
-              <a:t>ANTIGRAVITY</a:t>
+              <a:t>ANTIGRAVITY 桌面版</a:t>
             </a:r>
           </a:p>
         </p:txBody>
@@ -48065,7 +48081,7 @@
                 </a:solidFill>
                 <a:latin typeface="Consolas"/>
               </a:rPr>
-              <a:t>GEMINI CLI</a:t>
+              <a:t>ANTIGRAVITY CLI</a:t>
             </a:r>
           </a:p>
         </p:txBody>
@@ -48104,7 +48120,7 @@
                 </a:solidFill>
                 <a:latin typeface="Microsoft JhengHei"/>
               </a:rPr>
-              <a:t>gemini "今晚煮什麼" --pantry fridge.txt（可定時每天 17:00 跑）</a:t>
+              <a:t>agy "今晚煮什麼 @fridge.txt"（可用 Scheduled Tasks 每天 17:00 跑）</a:t>
             </a:r>
           </a:p>
         </p:txBody>

--- a/class_plan/vibe_coding_workshop.pptx
+++ b/class_plan/vibe_coding_workshop.pptx
@@ -30684,7 +30684,7 @@
         <p:spPr>
           <a:xfrm>
             <a:off x="731520" y="2606040"/>
-            <a:ext cx="10698480" cy="2011680"/>
+            <a:ext cx="10698480" cy="1874519"/>
           </a:xfrm>
           <a:prstGeom prst="roundRect">
             <a:avLst>
@@ -30823,27 +30823,27 @@
         </p:nvSpPr>
         <p:spPr>
           <a:xfrm>
-            <a:off x="731520" y="4800600"/>
-            <a:ext cx="10698480" cy="365760"/>
-          </a:xfrm>
-          <a:prstGeom prst="rect">
-            <a:avLst/>
-          </a:prstGeom>
-          <a:noFill/>
-        </p:spPr>
-        <p:txBody>
-          <a:bodyPr wrap="square" lIns="45720" rIns="45720" tIns="18288" bIns="18288" anchor="t">
-            <a:spAutoFit/>
-          </a:bodyPr>
-          <a:lstStyle/>
-          <a:p>
-            <a:pPr algn="l">
-              <a:lnSpc>
-                <a:spcPct val="135000"/>
-              </a:lnSpc>
-            </a:pPr>
-            <a:r>
-              <a:rPr sz="1300" b="0" spc="150">
+            <a:off x="731520" y="4617720"/>
+            <a:ext cx="10698480" cy="320040"/>
+          </a:xfrm>
+          <a:prstGeom prst="rect">
+            <a:avLst/>
+          </a:prstGeom>
+          <a:noFill/>
+        </p:spPr>
+        <p:txBody>
+          <a:bodyPr wrap="square" lIns="45720" rIns="45720" tIns="18288" bIns="18288" anchor="t">
+            <a:spAutoFit/>
+          </a:bodyPr>
+          <a:lstStyle/>
+          <a:p>
+            <a:pPr algn="l">
+              <a:lnSpc>
+                <a:spcPct val="135000"/>
+              </a:lnSpc>
+            </a:pPr>
+            <a:r>
+              <a:rPr sz="1200" b="0" spc="150">
                 <a:solidFill>
                   <a:srgbClr val="8A8A8A"/>
                 </a:solidFill>
@@ -30862,8 +30862,8 @@
         </p:nvSpPr>
         <p:spPr>
           <a:xfrm>
-            <a:off x="731520" y="5166360"/>
-            <a:ext cx="10698480" cy="1005840"/>
+            <a:off x="731520" y="4937760"/>
+            <a:ext cx="10698480" cy="822960"/>
           </a:xfrm>
           <a:prstGeom prst="roundRect">
             <a:avLst>
@@ -30903,7 +30903,7 @@
               </a:lnSpc>
             </a:pPr>
             <a:r>
-              <a:rPr sz="1300">
+              <a:rPr sz="1200">
                 <a:solidFill>
                   <a:srgbClr val="111111"/>
                 </a:solidFill>
@@ -30919,7 +30919,7 @@
               </a:lnSpc>
             </a:pPr>
             <a:r>
-              <a:rPr sz="1300">
+              <a:rPr sz="1200">
                 <a:solidFill>
                   <a:srgbClr val="111111"/>
                 </a:solidFill>
@@ -30938,8 +30938,8 @@
         </p:nvCxnSpPr>
         <p:spPr>
           <a:xfrm>
-            <a:off x="548640" y="6446520"/>
-            <a:ext cx="11091672" cy="0"/>
+            <a:off x="731520" y="5852160"/>
+            <a:ext cx="10698480" cy="0"/>
           </a:xfrm>
           <a:prstGeom prst="line">
             <a:avLst/>
@@ -30973,6 +30973,80 @@
         </p:nvSpPr>
         <p:spPr>
           <a:xfrm>
+            <a:off x="731520" y="5943600"/>
+            <a:ext cx="10698480" cy="411480"/>
+          </a:xfrm>
+          <a:prstGeom prst="rect">
+            <a:avLst/>
+          </a:prstGeom>
+          <a:noFill/>
+        </p:spPr>
+        <p:txBody>
+          <a:bodyPr wrap="square" lIns="45720" rIns="45720" tIns="18288" bIns="18288" anchor="t">
+            <a:spAutoFit/>
+          </a:bodyPr>
+          <a:lstStyle/>
+          <a:p>
+            <a:pPr algn="l">
+              <a:lnSpc>
+                <a:spcPct val="135000"/>
+              </a:lnSpc>
+            </a:pPr>
+            <a:r>
+              <a:rPr sz="1300" b="0" spc="-20">
+                <a:solidFill>
+                  <a:srgbClr val="B45309"/>
+                </a:solidFill>
+                <a:latin typeface="Consolas"/>
+              </a:rPr>
+              <a:t>🔧  Debug：AI 沒讀到規則？打 /memory show 看實際載入；改完 AGENTS.md 打 /memory refresh</a:t>
+            </a:r>
+          </a:p>
+        </p:txBody>
+      </p:sp>
+      <p:cxnSp>
+        <p:nvCxnSpPr>
+          <p:cNvPr id="11" name="Connector 10"/>
+          <p:cNvCxnSpPr/>
+          <p:nvPr/>
+        </p:nvCxnSpPr>
+        <p:spPr>
+          <a:xfrm>
+            <a:off x="548640" y="6446520"/>
+            <a:ext cx="11091672" cy="0"/>
+          </a:xfrm>
+          <a:prstGeom prst="line">
+            <a:avLst/>
+          </a:prstGeom>
+          <a:ln w="6350">
+            <a:solidFill>
+              <a:srgbClr val="E5E5E5"/>
+            </a:solidFill>
+          </a:ln>
+        </p:spPr>
+        <p:style>
+          <a:lnRef idx="2">
+            <a:schemeClr val="accent1"/>
+          </a:lnRef>
+          <a:fillRef idx="0">
+            <a:schemeClr val="accent1"/>
+          </a:fillRef>
+          <a:effectRef idx="1">
+            <a:schemeClr val="accent1"/>
+          </a:effectRef>
+          <a:fontRef idx="minor">
+            <a:schemeClr val="tx1"/>
+          </a:fontRef>
+        </p:style>
+      </p:cxnSp>
+      <p:sp>
+        <p:nvSpPr>
+          <p:cNvPr id="12" name="TextBox 11"/>
+          <p:cNvSpPr txBox="1"/>
+          <p:nvPr/>
+        </p:nvSpPr>
+        <p:spPr>
+          <a:xfrm>
             <a:off x="548640" y="6537960"/>
             <a:ext cx="7315200" cy="274320"/>
           </a:xfrm>
@@ -31006,7 +31080,7 @@
       </p:sp>
       <p:sp>
         <p:nvSpPr>
-          <p:cNvPr id="11" name="TextBox 10"/>
+          <p:cNvPr id="13" name="TextBox 12"/>
           <p:cNvSpPr txBox="1"/>
           <p:nvPr/>
         </p:nvSpPr>
@@ -31763,7 +31837,7 @@
                 </a:solidFill>
                 <a:latin typeface="Consolas"/>
               </a:rPr>
-              <a:t>M4 · BUILT-IN TOOLS &amp; SAFETY</a:t>
+              <a:t>M4 · BUILT-IN TOOLS &amp; THREE-LAYER SAFETY</a:t>
             </a:r>
           </a:p>
         </p:txBody>
@@ -31802,7 +31876,7 @@
                 </a:solidFill>
                 <a:latin typeface="Microsoft JhengHei"/>
               </a:rPr>
-              <a:t>內建工具 + 安全模式</a:t>
+              <a:t>內建工具 + 三層保險</a:t>
             </a:r>
           </a:p>
         </p:txBody>
@@ -31815,8 +31889,86 @@
         </p:nvSpPr>
         <p:spPr>
           <a:xfrm>
-            <a:off x="731520" y="1965960"/>
-            <a:ext cx="10698480" cy="457200"/>
+            <a:off x="731520" y="1874519"/>
+            <a:ext cx="10698480" cy="365760"/>
+          </a:xfrm>
+          <a:prstGeom prst="rect">
+            <a:avLst/>
+          </a:prstGeom>
+          <a:noFill/>
+        </p:spPr>
+        <p:txBody>
+          <a:bodyPr wrap="square" lIns="45720" rIns="45720" tIns="18288" bIns="18288" anchor="t">
+            <a:spAutoFit/>
+          </a:bodyPr>
+          <a:lstStyle/>
+          <a:p>
+            <a:pPr algn="l">
+              <a:lnSpc>
+                <a:spcPct val="135000"/>
+              </a:lnSpc>
+            </a:pPr>
+            <a:r>
+              <a:rPr sz="1500" b="0" spc="-20">
+                <a:solidFill>
+                  <a:srgbClr val="8A8A8A"/>
+                </a:solidFill>
+                <a:latin typeface="Microsoft JhengHei"/>
+              </a:rPr>
+              <a:t>Antigravity CLI 不只會聊天，預設帶這些工具：</a:t>
+            </a:r>
+          </a:p>
+        </p:txBody>
+      </p:sp>
+      <p:sp>
+        <p:nvSpPr>
+          <p:cNvPr id="6" name="TextBox 5"/>
+          <p:cNvSpPr txBox="1"/>
+          <p:nvPr/>
+        </p:nvSpPr>
+        <p:spPr>
+          <a:xfrm>
+            <a:off x="914400" y="2423160"/>
+            <a:ext cx="5029200" cy="320040"/>
+          </a:xfrm>
+          <a:prstGeom prst="rect">
+            <a:avLst/>
+          </a:prstGeom>
+          <a:noFill/>
+        </p:spPr>
+        <p:txBody>
+          <a:bodyPr wrap="square" lIns="45720" rIns="45720" tIns="18288" bIns="18288" anchor="t">
+            <a:spAutoFit/>
+          </a:bodyPr>
+          <a:lstStyle/>
+          <a:p>
+            <a:pPr algn="l">
+              <a:lnSpc>
+                <a:spcPct val="135000"/>
+              </a:lnSpc>
+            </a:pPr>
+            <a:r>
+              <a:rPr sz="1600" b="1" spc="-20">
+                <a:solidFill>
+                  <a:srgbClr val="111111"/>
+                </a:solidFill>
+                <a:latin typeface="Consolas"/>
+              </a:rPr>
+              <a:t>📂  ReadFile / WriteFile</a:t>
+            </a:r>
+          </a:p>
+        </p:txBody>
+      </p:sp>
+      <p:sp>
+        <p:nvSpPr>
+          <p:cNvPr id="7" name="TextBox 6"/>
+          <p:cNvSpPr txBox="1"/>
+          <p:nvPr/>
+        </p:nvSpPr>
+        <p:spPr>
+          <a:xfrm>
+            <a:off x="6217920" y="2423160"/>
+            <a:ext cx="5212080" cy="320040"/>
           </a:xfrm>
           <a:prstGeom prst="rect">
             <a:avLst/>
@@ -31837,283 +31989,205 @@
             <a:r>
               <a:rPr sz="1600" b="0" spc="-20">
                 <a:solidFill>
-                  <a:srgbClr val="8A8A8A"/>
+                  <a:srgbClr val="3A3A3A"/>
                 </a:solidFill>
                 <a:latin typeface="Microsoft JhengHei"/>
               </a:rPr>
-              <a:t>Antigravity CLI 不只會聊天，預設帶這些工具：</a:t>
-            </a:r>
-          </a:p>
-        </p:txBody>
-      </p:sp>
-      <p:sp>
-        <p:nvSpPr>
-          <p:cNvPr id="6" name="TextBox 5"/>
-          <p:cNvSpPr txBox="1"/>
-          <p:nvPr/>
-        </p:nvSpPr>
-        <p:spPr>
-          <a:xfrm>
-            <a:off x="914400" y="2651760"/>
-            <a:ext cx="5029200" cy="365760"/>
-          </a:xfrm>
-          <a:prstGeom prst="rect">
-            <a:avLst/>
-          </a:prstGeom>
-          <a:noFill/>
-        </p:spPr>
-        <p:txBody>
-          <a:bodyPr wrap="square" lIns="45720" rIns="45720" tIns="18288" bIns="18288" anchor="t">
-            <a:spAutoFit/>
-          </a:bodyPr>
-          <a:lstStyle/>
-          <a:p>
-            <a:pPr algn="l">
-              <a:lnSpc>
-                <a:spcPct val="135000"/>
-              </a:lnSpc>
-            </a:pPr>
-            <a:r>
-              <a:rPr sz="1800" b="1" spc="-20">
+              <a:t>讀寫檔案</a:t>
+            </a:r>
+          </a:p>
+        </p:txBody>
+      </p:sp>
+      <p:sp>
+        <p:nvSpPr>
+          <p:cNvPr id="8" name="TextBox 7"/>
+          <p:cNvSpPr txBox="1"/>
+          <p:nvPr/>
+        </p:nvSpPr>
+        <p:spPr>
+          <a:xfrm>
+            <a:off x="914400" y="2807208"/>
+            <a:ext cx="5029200" cy="320040"/>
+          </a:xfrm>
+          <a:prstGeom prst="rect">
+            <a:avLst/>
+          </a:prstGeom>
+          <a:noFill/>
+        </p:spPr>
+        <p:txBody>
+          <a:bodyPr wrap="square" lIns="45720" rIns="45720" tIns="18288" bIns="18288" anchor="t">
+            <a:spAutoFit/>
+          </a:bodyPr>
+          <a:lstStyle/>
+          <a:p>
+            <a:pPr algn="l">
+              <a:lnSpc>
+                <a:spcPct val="135000"/>
+              </a:lnSpc>
+            </a:pPr>
+            <a:r>
+              <a:rPr sz="1600" b="1" spc="-20">
                 <a:solidFill>
                   <a:srgbClr val="111111"/>
                 </a:solidFill>
                 <a:latin typeface="Consolas"/>
               </a:rPr>
-              <a:t>📂  ReadFile / WriteFile</a:t>
-            </a:r>
-          </a:p>
-        </p:txBody>
-      </p:sp>
-      <p:sp>
-        <p:nvSpPr>
-          <p:cNvPr id="7" name="TextBox 6"/>
-          <p:cNvSpPr txBox="1"/>
-          <p:nvPr/>
-        </p:nvSpPr>
-        <p:spPr>
-          <a:xfrm>
-            <a:off x="6217920" y="2651760"/>
-            <a:ext cx="5212080" cy="365760"/>
-          </a:xfrm>
-          <a:prstGeom prst="rect">
-            <a:avLst/>
-          </a:prstGeom>
-          <a:noFill/>
-        </p:spPr>
-        <p:txBody>
-          <a:bodyPr wrap="square" lIns="45720" rIns="45720" tIns="18288" bIns="18288" anchor="t">
-            <a:spAutoFit/>
-          </a:bodyPr>
-          <a:lstStyle/>
-          <a:p>
-            <a:pPr algn="l">
-              <a:lnSpc>
-                <a:spcPct val="135000"/>
-              </a:lnSpc>
-            </a:pPr>
-            <a:r>
-              <a:rPr sz="1800" b="0" spc="-20">
+              <a:t>🐚  Shell</a:t>
+            </a:r>
+          </a:p>
+        </p:txBody>
+      </p:sp>
+      <p:sp>
+        <p:nvSpPr>
+          <p:cNvPr id="9" name="TextBox 8"/>
+          <p:cNvSpPr txBox="1"/>
+          <p:nvPr/>
+        </p:nvSpPr>
+        <p:spPr>
+          <a:xfrm>
+            <a:off x="6217920" y="2807208"/>
+            <a:ext cx="5212080" cy="320040"/>
+          </a:xfrm>
+          <a:prstGeom prst="rect">
+            <a:avLst/>
+          </a:prstGeom>
+          <a:noFill/>
+        </p:spPr>
+        <p:txBody>
+          <a:bodyPr wrap="square" lIns="45720" rIns="45720" tIns="18288" bIns="18288" anchor="t">
+            <a:spAutoFit/>
+          </a:bodyPr>
+          <a:lstStyle/>
+          <a:p>
+            <a:pPr algn="l">
+              <a:lnSpc>
+                <a:spcPct val="135000"/>
+              </a:lnSpc>
+            </a:pPr>
+            <a:r>
+              <a:rPr sz="1600" b="0" spc="-20">
                 <a:solidFill>
                   <a:srgbClr val="3A3A3A"/>
                 </a:solidFill>
                 <a:latin typeface="Microsoft JhengHei"/>
               </a:rPr>
-              <a:t>讀寫檔案</a:t>
-            </a:r>
-          </a:p>
-        </p:txBody>
-      </p:sp>
-      <p:sp>
-        <p:nvSpPr>
-          <p:cNvPr id="8" name="TextBox 7"/>
-          <p:cNvSpPr txBox="1"/>
-          <p:nvPr/>
-        </p:nvSpPr>
-        <p:spPr>
-          <a:xfrm>
-            <a:off x="914400" y="3108960"/>
-            <a:ext cx="5029200" cy="365760"/>
-          </a:xfrm>
-          <a:prstGeom prst="rect">
-            <a:avLst/>
-          </a:prstGeom>
-          <a:noFill/>
-        </p:spPr>
-        <p:txBody>
-          <a:bodyPr wrap="square" lIns="45720" rIns="45720" tIns="18288" bIns="18288" anchor="t">
-            <a:spAutoFit/>
-          </a:bodyPr>
-          <a:lstStyle/>
-          <a:p>
-            <a:pPr algn="l">
-              <a:lnSpc>
-                <a:spcPct val="135000"/>
-              </a:lnSpc>
-            </a:pPr>
-            <a:r>
-              <a:rPr sz="1800" b="1" spc="-20">
+              <a:t>跑指令</a:t>
+            </a:r>
+          </a:p>
+        </p:txBody>
+      </p:sp>
+      <p:sp>
+        <p:nvSpPr>
+          <p:cNvPr id="10" name="TextBox 9"/>
+          <p:cNvSpPr txBox="1"/>
+          <p:nvPr/>
+        </p:nvSpPr>
+        <p:spPr>
+          <a:xfrm>
+            <a:off x="914400" y="3191256"/>
+            <a:ext cx="5029200" cy="320040"/>
+          </a:xfrm>
+          <a:prstGeom prst="rect">
+            <a:avLst/>
+          </a:prstGeom>
+          <a:noFill/>
+        </p:spPr>
+        <p:txBody>
+          <a:bodyPr wrap="square" lIns="45720" rIns="45720" tIns="18288" bIns="18288" anchor="t">
+            <a:spAutoFit/>
+          </a:bodyPr>
+          <a:lstStyle/>
+          <a:p>
+            <a:pPr algn="l">
+              <a:lnSpc>
+                <a:spcPct val="135000"/>
+              </a:lnSpc>
+            </a:pPr>
+            <a:r>
+              <a:rPr sz="1600" b="1" spc="-20">
                 <a:solidFill>
                   <a:srgbClr val="111111"/>
                 </a:solidFill>
                 <a:latin typeface="Consolas"/>
               </a:rPr>
-              <a:t>🐚  Shell</a:t>
-            </a:r>
-          </a:p>
-        </p:txBody>
-      </p:sp>
-      <p:sp>
-        <p:nvSpPr>
-          <p:cNvPr id="9" name="TextBox 8"/>
-          <p:cNvSpPr txBox="1"/>
-          <p:nvPr/>
-        </p:nvSpPr>
-        <p:spPr>
-          <a:xfrm>
-            <a:off x="6217920" y="3108960"/>
-            <a:ext cx="5212080" cy="365760"/>
-          </a:xfrm>
-          <a:prstGeom prst="rect">
-            <a:avLst/>
-          </a:prstGeom>
-          <a:noFill/>
-        </p:spPr>
-        <p:txBody>
-          <a:bodyPr wrap="square" lIns="45720" rIns="45720" tIns="18288" bIns="18288" anchor="t">
-            <a:spAutoFit/>
-          </a:bodyPr>
-          <a:lstStyle/>
-          <a:p>
-            <a:pPr algn="l">
-              <a:lnSpc>
-                <a:spcPct val="135000"/>
-              </a:lnSpc>
-            </a:pPr>
-            <a:r>
-              <a:rPr sz="1800" b="0" spc="-20">
+              <a:t>🔍  GoogleSearch</a:t>
+            </a:r>
+          </a:p>
+        </p:txBody>
+      </p:sp>
+      <p:sp>
+        <p:nvSpPr>
+          <p:cNvPr id="11" name="TextBox 10"/>
+          <p:cNvSpPr txBox="1"/>
+          <p:nvPr/>
+        </p:nvSpPr>
+        <p:spPr>
+          <a:xfrm>
+            <a:off x="6217920" y="3191256"/>
+            <a:ext cx="5212080" cy="320040"/>
+          </a:xfrm>
+          <a:prstGeom prst="rect">
+            <a:avLst/>
+          </a:prstGeom>
+          <a:noFill/>
+        </p:spPr>
+        <p:txBody>
+          <a:bodyPr wrap="square" lIns="45720" rIns="45720" tIns="18288" bIns="18288" anchor="t">
+            <a:spAutoFit/>
+          </a:bodyPr>
+          <a:lstStyle/>
+          <a:p>
+            <a:pPr algn="l">
+              <a:lnSpc>
+                <a:spcPct val="135000"/>
+              </a:lnSpc>
+            </a:pPr>
+            <a:r>
+              <a:rPr sz="1600" b="0" spc="-20">
                 <a:solidFill>
                   <a:srgbClr val="3A3A3A"/>
                 </a:solidFill>
                 <a:latin typeface="Microsoft JhengHei"/>
               </a:rPr>
-              <a:t>跑指令</a:t>
-            </a:r>
-          </a:p>
-        </p:txBody>
-      </p:sp>
-      <p:sp>
-        <p:nvSpPr>
-          <p:cNvPr id="10" name="TextBox 9"/>
-          <p:cNvSpPr txBox="1"/>
-          <p:nvPr/>
-        </p:nvSpPr>
-        <p:spPr>
-          <a:xfrm>
-            <a:off x="914400" y="3566160"/>
-            <a:ext cx="5029200" cy="365760"/>
-          </a:xfrm>
-          <a:prstGeom prst="rect">
-            <a:avLst/>
-          </a:prstGeom>
-          <a:noFill/>
-        </p:spPr>
-        <p:txBody>
-          <a:bodyPr wrap="square" lIns="45720" rIns="45720" tIns="18288" bIns="18288" anchor="t">
-            <a:spAutoFit/>
-          </a:bodyPr>
-          <a:lstStyle/>
-          <a:p>
-            <a:pPr algn="l">
-              <a:lnSpc>
-                <a:spcPct val="135000"/>
-              </a:lnSpc>
-            </a:pPr>
-            <a:r>
-              <a:rPr sz="1800" b="1" spc="-20">
+              <a:t>即時上網查</a:t>
+            </a:r>
+          </a:p>
+        </p:txBody>
+      </p:sp>
+      <p:sp>
+        <p:nvSpPr>
+          <p:cNvPr id="12" name="TextBox 11"/>
+          <p:cNvSpPr txBox="1"/>
+          <p:nvPr/>
+        </p:nvSpPr>
+        <p:spPr>
+          <a:xfrm>
+            <a:off x="914400" y="3575304"/>
+            <a:ext cx="5029200" cy="320040"/>
+          </a:xfrm>
+          <a:prstGeom prst="rect">
+            <a:avLst/>
+          </a:prstGeom>
+          <a:noFill/>
+        </p:spPr>
+        <p:txBody>
+          <a:bodyPr wrap="square" lIns="45720" rIns="45720" tIns="18288" bIns="18288" anchor="t">
+            <a:spAutoFit/>
+          </a:bodyPr>
+          <a:lstStyle/>
+          <a:p>
+            <a:pPr algn="l">
+              <a:lnSpc>
+                <a:spcPct val="135000"/>
+              </a:lnSpc>
+            </a:pPr>
+            <a:r>
+              <a:rPr sz="1600" b="1" spc="-20">
                 <a:solidFill>
                   <a:srgbClr val="111111"/>
                 </a:solidFill>
                 <a:latin typeface="Consolas"/>
               </a:rPr>
-              <a:t>🔍  GoogleSearch</a:t>
-            </a:r>
-          </a:p>
-        </p:txBody>
-      </p:sp>
-      <p:sp>
-        <p:nvSpPr>
-          <p:cNvPr id="11" name="TextBox 10"/>
-          <p:cNvSpPr txBox="1"/>
-          <p:nvPr/>
-        </p:nvSpPr>
-        <p:spPr>
-          <a:xfrm>
-            <a:off x="6217920" y="3566160"/>
-            <a:ext cx="5212080" cy="365760"/>
-          </a:xfrm>
-          <a:prstGeom prst="rect">
-            <a:avLst/>
-          </a:prstGeom>
-          <a:noFill/>
-        </p:spPr>
-        <p:txBody>
-          <a:bodyPr wrap="square" lIns="45720" rIns="45720" tIns="18288" bIns="18288" anchor="t">
-            <a:spAutoFit/>
-          </a:bodyPr>
-          <a:lstStyle/>
-          <a:p>
-            <a:pPr algn="l">
-              <a:lnSpc>
-                <a:spcPct val="135000"/>
-              </a:lnSpc>
-            </a:pPr>
-            <a:r>
-              <a:rPr sz="1800" b="0" spc="-20">
-                <a:solidFill>
-                  <a:srgbClr val="3A3A3A"/>
-                </a:solidFill>
-                <a:latin typeface="Microsoft JhengHei"/>
-              </a:rPr>
-              <a:t>即時上網查</a:t>
-            </a:r>
-          </a:p>
-        </p:txBody>
-      </p:sp>
-      <p:sp>
-        <p:nvSpPr>
-          <p:cNvPr id="12" name="TextBox 11"/>
-          <p:cNvSpPr txBox="1"/>
-          <p:nvPr/>
-        </p:nvSpPr>
-        <p:spPr>
-          <a:xfrm>
-            <a:off x="914400" y="4023360"/>
-            <a:ext cx="5029200" cy="365760"/>
-          </a:xfrm>
-          <a:prstGeom prst="rect">
-            <a:avLst/>
-          </a:prstGeom>
-          <a:noFill/>
-        </p:spPr>
-        <p:txBody>
-          <a:bodyPr wrap="square" lIns="45720" rIns="45720" tIns="18288" bIns="18288" anchor="t">
-            <a:spAutoFit/>
-          </a:bodyPr>
-          <a:lstStyle/>
-          <a:p>
-            <a:pPr algn="l">
-              <a:lnSpc>
-                <a:spcPct val="135000"/>
-              </a:lnSpc>
-            </a:pPr>
-            <a:r>
-              <a:rPr sz="1800" b="1" spc="-20">
-                <a:solidFill>
-                  <a:srgbClr val="111111"/>
-                </a:solidFill>
-                <a:latin typeface="Consolas"/>
-              </a:rPr>
               <a:t>🌐  WebFetch</a:t>
             </a:r>
           </a:p>
@@ -32127,27 +32201,27 @@
         </p:nvSpPr>
         <p:spPr>
           <a:xfrm>
-            <a:off x="6217920" y="4023360"/>
-            <a:ext cx="5212080" cy="365760"/>
-          </a:xfrm>
-          <a:prstGeom prst="rect">
-            <a:avLst/>
-          </a:prstGeom>
-          <a:noFill/>
-        </p:spPr>
-        <p:txBody>
-          <a:bodyPr wrap="square" lIns="45720" rIns="45720" tIns="18288" bIns="18288" anchor="t">
-            <a:spAutoFit/>
-          </a:bodyPr>
-          <a:lstStyle/>
-          <a:p>
-            <a:pPr algn="l">
-              <a:lnSpc>
-                <a:spcPct val="135000"/>
-              </a:lnSpc>
-            </a:pPr>
-            <a:r>
-              <a:rPr sz="1800" b="0" spc="-20">
+            <a:off x="6217920" y="3575304"/>
+            <a:ext cx="5212080" cy="320040"/>
+          </a:xfrm>
+          <a:prstGeom prst="rect">
+            <a:avLst/>
+          </a:prstGeom>
+          <a:noFill/>
+        </p:spPr>
+        <p:txBody>
+          <a:bodyPr wrap="square" lIns="45720" rIns="45720" tIns="18288" bIns="18288" anchor="t">
+            <a:spAutoFit/>
+          </a:bodyPr>
+          <a:lstStyle/>
+          <a:p>
+            <a:pPr algn="l">
+              <a:lnSpc>
+                <a:spcPct val="135000"/>
+              </a:lnSpc>
+            </a:pPr>
+            <a:r>
+              <a:rPr sz="1600" b="0" spc="-20">
                 <a:solidFill>
                   <a:srgbClr val="3A3A3A"/>
                 </a:solidFill>
@@ -32166,7 +32240,7 @@
         </p:nvCxnSpPr>
         <p:spPr>
           <a:xfrm>
-            <a:off x="731520" y="4617720"/>
+            <a:off x="731520" y="4114800"/>
             <a:ext cx="10698480" cy="0"/>
           </a:xfrm>
           <a:prstGeom prst="line">
@@ -32201,33 +32275,33 @@
         </p:nvSpPr>
         <p:spPr>
           <a:xfrm>
-            <a:off x="731520" y="4754880"/>
-            <a:ext cx="10698480" cy="457200"/>
-          </a:xfrm>
-          <a:prstGeom prst="rect">
-            <a:avLst/>
-          </a:prstGeom>
-          <a:noFill/>
-        </p:spPr>
-        <p:txBody>
-          <a:bodyPr wrap="square" lIns="45720" rIns="45720" tIns="18288" bIns="18288" anchor="t">
-            <a:spAutoFit/>
-          </a:bodyPr>
-          <a:lstStyle/>
-          <a:p>
-            <a:pPr algn="l">
-              <a:lnSpc>
-                <a:spcPct val="135000"/>
-              </a:lnSpc>
-            </a:pPr>
-            <a:r>
-              <a:rPr sz="1800" b="1" spc="-30">
+            <a:off x="731520" y="4251960"/>
+            <a:ext cx="10698480" cy="411480"/>
+          </a:xfrm>
+          <a:prstGeom prst="rect">
+            <a:avLst/>
+          </a:prstGeom>
+          <a:noFill/>
+        </p:spPr>
+        <p:txBody>
+          <a:bodyPr wrap="square" lIns="45720" rIns="45720" tIns="18288" bIns="18288" anchor="t">
+            <a:spAutoFit/>
+          </a:bodyPr>
+          <a:lstStyle/>
+          <a:p>
+            <a:pPr algn="l">
+              <a:lnSpc>
+                <a:spcPct val="135000"/>
+              </a:lnSpc>
+            </a:pPr>
+            <a:r>
+              <a:rPr sz="1700" b="1" spc="-30">
                 <a:solidFill>
                   <a:srgbClr val="111111"/>
                 </a:solidFill>
                 <a:latin typeface="Microsoft JhengHei"/>
               </a:rPr>
-              <a:t>每次它要動手，會先問你「可以嗎？」</a:t>
+              <a:t>三層保險（事前 → 事中 → 事後）：</a:t>
             </a:r>
           </a:p>
         </p:txBody>
@@ -32240,79 +32314,352 @@
         </p:nvSpPr>
         <p:spPr>
           <a:xfrm>
-            <a:off x="914400" y="5349240"/>
-            <a:ext cx="10698480" cy="365760"/>
-          </a:xfrm>
-          <a:prstGeom prst="rect">
-            <a:avLst/>
-          </a:prstGeom>
-          <a:noFill/>
-        </p:spPr>
-        <p:txBody>
-          <a:bodyPr wrap="square" lIns="45720" rIns="45720" tIns="18288" bIns="18288" anchor="t">
-            <a:spAutoFit/>
-          </a:bodyPr>
-          <a:lstStyle/>
-          <a:p>
-            <a:pPr algn="l">
-              <a:lnSpc>
-                <a:spcPct val="135000"/>
-              </a:lnSpc>
-            </a:pPr>
-            <a:r>
-              <a:rPr sz="1500" b="0" spc="-20">
+            <a:off x="914400" y="4800600"/>
+            <a:ext cx="914400" cy="365760"/>
+          </a:xfrm>
+          <a:prstGeom prst="rect">
+            <a:avLst/>
+          </a:prstGeom>
+          <a:noFill/>
+        </p:spPr>
+        <p:txBody>
+          <a:bodyPr wrap="square" lIns="45720" rIns="45720" tIns="18288" bIns="18288" anchor="t">
+            <a:spAutoFit/>
+          </a:bodyPr>
+          <a:lstStyle/>
+          <a:p>
+            <a:pPr algn="l">
+              <a:lnSpc>
+                <a:spcPct val="135000"/>
+              </a:lnSpc>
+            </a:pPr>
+            <a:r>
+              <a:rPr sz="1400" b="1" spc="100">
                 <a:solidFill>
                   <a:srgbClr val="156B4A"/>
                 </a:solidFill>
+                <a:latin typeface="Consolas"/>
+              </a:rPr>
+              <a:t>事前</a:t>
+            </a:r>
+          </a:p>
+        </p:txBody>
+      </p:sp>
+      <p:sp>
+        <p:nvSpPr>
+          <p:cNvPr id="17" name="TextBox 16"/>
+          <p:cNvSpPr txBox="1"/>
+          <p:nvPr/>
+        </p:nvSpPr>
+        <p:spPr>
+          <a:xfrm>
+            <a:off x="1920240" y="4800600"/>
+            <a:ext cx="5029200" cy="365760"/>
+          </a:xfrm>
+          <a:prstGeom prst="rect">
+            <a:avLst/>
+          </a:prstGeom>
+          <a:noFill/>
+        </p:spPr>
+        <p:txBody>
+          <a:bodyPr wrap="square" lIns="45720" rIns="45720" tIns="18288" bIns="18288" anchor="t">
+            <a:spAutoFit/>
+          </a:bodyPr>
+          <a:lstStyle/>
+          <a:p>
+            <a:pPr algn="l">
+              <a:lnSpc>
+                <a:spcPct val="135000"/>
+              </a:lnSpc>
+            </a:pPr>
+            <a:r>
+              <a:rPr sz="1400" b="1" spc="-20">
+                <a:solidFill>
+                  <a:srgbClr val="111111"/>
+                </a:solidFill>
                 <a:latin typeface="Microsoft JhengHei"/>
               </a:rPr>
-              <a:t>首次啟動：逐資料夾信任授權  ← 只信你自己的工作區</a:t>
-            </a:r>
-          </a:p>
-        </p:txBody>
-      </p:sp>
-      <p:sp>
-        <p:nvSpPr>
-          <p:cNvPr id="17" name="TextBox 16"/>
-          <p:cNvSpPr txBox="1"/>
-          <p:nvPr/>
-        </p:nvSpPr>
-        <p:spPr>
-          <a:xfrm>
-            <a:off x="914400" y="5760720"/>
-            <a:ext cx="10698480" cy="365760"/>
-          </a:xfrm>
-          <a:prstGeom prst="rect">
-            <a:avLst/>
-          </a:prstGeom>
-          <a:noFill/>
-        </p:spPr>
-        <p:txBody>
-          <a:bodyPr wrap="square" lIns="45720" rIns="45720" tIns="18288" bIns="18288" anchor="t">
-            <a:spAutoFit/>
-          </a:bodyPr>
-          <a:lstStyle/>
-          <a:p>
-            <a:pPr algn="l">
-              <a:lnSpc>
-                <a:spcPct val="135000"/>
-              </a:lnSpc>
-            </a:pPr>
-            <a:r>
-              <a:rPr sz="1500" b="0" spc="-20">
+              <a:t>首次啟動：逐資料夾信任授權</a:t>
+            </a:r>
+          </a:p>
+        </p:txBody>
+      </p:sp>
+      <p:sp>
+        <p:nvSpPr>
+          <p:cNvPr id="18" name="TextBox 17"/>
+          <p:cNvSpPr txBox="1"/>
+          <p:nvPr/>
+        </p:nvSpPr>
+        <p:spPr>
+          <a:xfrm>
+            <a:off x="7040880" y="4800600"/>
+            <a:ext cx="4389120" cy="365760"/>
+          </a:xfrm>
+          <a:prstGeom prst="rect">
+            <a:avLst/>
+          </a:prstGeom>
+          <a:noFill/>
+        </p:spPr>
+        <p:txBody>
+          <a:bodyPr wrap="square" lIns="45720" rIns="45720" tIns="18288" bIns="18288" anchor="t">
+            <a:spAutoFit/>
+          </a:bodyPr>
+          <a:lstStyle/>
+          <a:p>
+            <a:pPr algn="l">
+              <a:lnSpc>
+                <a:spcPct val="135000"/>
+              </a:lnSpc>
+            </a:pPr>
+            <a:r>
+              <a:rPr sz="1300" b="0" spc="-10">
+                <a:solidFill>
+                  <a:srgbClr val="8A8A8A"/>
+                </a:solidFill>
+                <a:latin typeface="Microsoft JhengHei"/>
+              </a:rPr>
+              <a:t>只信你自己的工作區</a:t>
+            </a:r>
+          </a:p>
+        </p:txBody>
+      </p:sp>
+      <p:sp>
+        <p:nvSpPr>
+          <p:cNvPr id="19" name="TextBox 18"/>
+          <p:cNvSpPr txBox="1"/>
+          <p:nvPr/>
+        </p:nvSpPr>
+        <p:spPr>
+          <a:xfrm>
+            <a:off x="914400" y="5303520"/>
+            <a:ext cx="914400" cy="365760"/>
+          </a:xfrm>
+          <a:prstGeom prst="rect">
+            <a:avLst/>
+          </a:prstGeom>
+          <a:noFill/>
+        </p:spPr>
+        <p:txBody>
+          <a:bodyPr wrap="square" lIns="45720" rIns="45720" tIns="18288" bIns="18288" anchor="t">
+            <a:spAutoFit/>
+          </a:bodyPr>
+          <a:lstStyle/>
+          <a:p>
+            <a:pPr algn="l">
+              <a:lnSpc>
+                <a:spcPct val="135000"/>
+              </a:lnSpc>
+            </a:pPr>
+            <a:r>
+              <a:rPr sz="1400" b="1" spc="100">
                 <a:solidFill>
                   <a:srgbClr val="156B4A"/>
                 </a:solidFill>
+                <a:latin typeface="Consolas"/>
+              </a:rPr>
+              <a:t>事中</a:t>
+            </a:r>
+          </a:p>
+        </p:txBody>
+      </p:sp>
+      <p:sp>
+        <p:nvSpPr>
+          <p:cNvPr id="20" name="TextBox 19"/>
+          <p:cNvSpPr txBox="1"/>
+          <p:nvPr/>
+        </p:nvSpPr>
+        <p:spPr>
+          <a:xfrm>
+            <a:off x="1920240" y="5303520"/>
+            <a:ext cx="5029200" cy="365760"/>
+          </a:xfrm>
+          <a:prstGeom prst="rect">
+            <a:avLst/>
+          </a:prstGeom>
+          <a:noFill/>
+        </p:spPr>
+        <p:txBody>
+          <a:bodyPr wrap="square" lIns="45720" rIns="45720" tIns="18288" bIns="18288" anchor="t">
+            <a:spAutoFit/>
+          </a:bodyPr>
+          <a:lstStyle/>
+          <a:p>
+            <a:pPr algn="l">
+              <a:lnSpc>
+                <a:spcPct val="135000"/>
+              </a:lnSpc>
+            </a:pPr>
+            <a:r>
+              <a:rPr sz="1400" b="1" spc="-20">
+                <a:solidFill>
+                  <a:srgbClr val="111111"/>
+                </a:solidFill>
                 <a:latin typeface="Microsoft JhengHei"/>
               </a:rPr>
-              <a:t>每次動手：先問你「可以嗎？」  ← 確認模式 = 你的保護傘</a:t>
+              <a:t>每次動手：先問你「可以嗎？」</a:t>
+            </a:r>
+          </a:p>
+        </p:txBody>
+      </p:sp>
+      <p:sp>
+        <p:nvSpPr>
+          <p:cNvPr id="21" name="TextBox 20"/>
+          <p:cNvSpPr txBox="1"/>
+          <p:nvPr/>
+        </p:nvSpPr>
+        <p:spPr>
+          <a:xfrm>
+            <a:off x="7040880" y="5303520"/>
+            <a:ext cx="4389120" cy="365760"/>
+          </a:xfrm>
+          <a:prstGeom prst="rect">
+            <a:avLst/>
+          </a:prstGeom>
+          <a:noFill/>
+        </p:spPr>
+        <p:txBody>
+          <a:bodyPr wrap="square" lIns="45720" rIns="45720" tIns="18288" bIns="18288" anchor="t">
+            <a:spAutoFit/>
+          </a:bodyPr>
+          <a:lstStyle/>
+          <a:p>
+            <a:pPr algn="l">
+              <a:lnSpc>
+                <a:spcPct val="135000"/>
+              </a:lnSpc>
+            </a:pPr>
+            <a:r>
+              <a:rPr sz="1300" b="0" spc="-10">
+                <a:solidFill>
+                  <a:srgbClr val="8A8A8A"/>
+                </a:solidFill>
+                <a:latin typeface="Microsoft JhengHei"/>
+              </a:rPr>
+              <a:t>確認模式 = 動檔/跑指令前停下</a:t>
+            </a:r>
+          </a:p>
+        </p:txBody>
+      </p:sp>
+      <p:sp>
+        <p:nvSpPr>
+          <p:cNvPr id="22" name="TextBox 21"/>
+          <p:cNvSpPr txBox="1"/>
+          <p:nvPr/>
+        </p:nvSpPr>
+        <p:spPr>
+          <a:xfrm>
+            <a:off x="914400" y="5806440"/>
+            <a:ext cx="914400" cy="365760"/>
+          </a:xfrm>
+          <a:prstGeom prst="rect">
+            <a:avLst/>
+          </a:prstGeom>
+          <a:noFill/>
+        </p:spPr>
+        <p:txBody>
+          <a:bodyPr wrap="square" lIns="45720" rIns="45720" tIns="18288" bIns="18288" anchor="t">
+            <a:spAutoFit/>
+          </a:bodyPr>
+          <a:lstStyle/>
+          <a:p>
+            <a:pPr algn="l">
+              <a:lnSpc>
+                <a:spcPct val="135000"/>
+              </a:lnSpc>
+            </a:pPr>
+            <a:r>
+              <a:rPr sz="1400" b="1" spc="100">
+                <a:solidFill>
+                  <a:srgbClr val="156B4A"/>
+                </a:solidFill>
+                <a:latin typeface="Consolas"/>
+              </a:rPr>
+              <a:t>事後</a:t>
+            </a:r>
+          </a:p>
+        </p:txBody>
+      </p:sp>
+      <p:sp>
+        <p:nvSpPr>
+          <p:cNvPr id="23" name="TextBox 22"/>
+          <p:cNvSpPr txBox="1"/>
+          <p:nvPr/>
+        </p:nvSpPr>
+        <p:spPr>
+          <a:xfrm>
+            <a:off x="1920240" y="5806440"/>
+            <a:ext cx="5029200" cy="365760"/>
+          </a:xfrm>
+          <a:prstGeom prst="rect">
+            <a:avLst/>
+          </a:prstGeom>
+          <a:noFill/>
+        </p:spPr>
+        <p:txBody>
+          <a:bodyPr wrap="square" lIns="45720" rIns="45720" tIns="18288" bIns="18288" anchor="t">
+            <a:spAutoFit/>
+          </a:bodyPr>
+          <a:lstStyle/>
+          <a:p>
+            <a:pPr algn="l">
+              <a:lnSpc>
+                <a:spcPct val="135000"/>
+              </a:lnSpc>
+            </a:pPr>
+            <a:r>
+              <a:rPr sz="1400" b="1" spc="-20">
+                <a:solidFill>
+                  <a:srgbClr val="111111"/>
+                </a:solidFill>
+                <a:latin typeface="Microsoft JhengHei"/>
+              </a:rPr>
+              <a:t>改錯了：打 /restore 選快照回滾</a:t>
+            </a:r>
+          </a:p>
+        </p:txBody>
+      </p:sp>
+      <p:sp>
+        <p:nvSpPr>
+          <p:cNvPr id="24" name="TextBox 23"/>
+          <p:cNvSpPr txBox="1"/>
+          <p:nvPr/>
+        </p:nvSpPr>
+        <p:spPr>
+          <a:xfrm>
+            <a:off x="7040880" y="5806440"/>
+            <a:ext cx="4389120" cy="365760"/>
+          </a:xfrm>
+          <a:prstGeom prst="rect">
+            <a:avLst/>
+          </a:prstGeom>
+          <a:noFill/>
+        </p:spPr>
+        <p:txBody>
+          <a:bodyPr wrap="square" lIns="45720" rIns="45720" tIns="18288" bIns="18288" anchor="t">
+            <a:spAutoFit/>
+          </a:bodyPr>
+          <a:lstStyle/>
+          <a:p>
+            <a:pPr algn="l">
+              <a:lnSpc>
+                <a:spcPct val="135000"/>
+              </a:lnSpc>
+            </a:pPr>
+            <a:r>
+              <a:rPr sz="1300" b="0" spc="-10">
+                <a:solidFill>
+                  <a:srgbClr val="8A8A8A"/>
+                </a:solidFill>
+                <a:latin typeface="Microsoft JhengHei"/>
+              </a:rPr>
+              <a:t>比 git reset 安全（不動 git 歷史）</a:t>
             </a:r>
           </a:p>
         </p:txBody>
       </p:sp>
       <p:cxnSp>
         <p:nvCxnSpPr>
-          <p:cNvPr id="18" name="Connector 17"/>
+          <p:cNvPr id="25" name="Connector 24"/>
           <p:cNvCxnSpPr/>
           <p:nvPr/>
         </p:nvCxnSpPr>
@@ -32347,7 +32694,7 @@
       </p:cxnSp>
       <p:sp>
         <p:nvSpPr>
-          <p:cNvPr id="19" name="TextBox 18"/>
+          <p:cNvPr id="26" name="TextBox 25"/>
           <p:cNvSpPr txBox="1"/>
           <p:nvPr/>
         </p:nvSpPr>
@@ -32386,7 +32733,7 @@
       </p:sp>
       <p:sp>
         <p:nvSpPr>
-          <p:cNvPr id="20" name="TextBox 19"/>
+          <p:cNvPr id="27" name="TextBox 26"/>
           <p:cNvSpPr txBox="1"/>
           <p:nvPr/>
         </p:nvSpPr>

--- a/class_plan/vibe_coding_workshop.pptx
+++ b/class_plan/vibe_coding_workshop.pptx
@@ -30670,7 +30670,7 @@
                 </a:solidFill>
                 <a:latin typeface="Microsoft JhengHei"/>
               </a:rPr>
-              <a:t>給 agent 一份「公司守則」。每次開工自動讀。業界共識：Antigravity / Cursor / OpenAI Codex 都認。</a:t>
+              <a:t>給 agent 一份「公司守則」。每次開工自動讀。跨工具新興共通格式：Antigravity / Codex 原生；Claude / Cursor 需橋接。</a:t>
             </a:r>
           </a:p>
         </p:txBody>
@@ -35215,7 +35215,7 @@
                 </a:solidFill>
                 <a:latin typeface="Microsoft JhengHei"/>
               </a:rPr>
-              <a:t>🟡  AGENTS.md 是 2026 業界共識的「跨工具通用」格式</a:t>
+              <a:t>🟡  AGENTS.md 是 2026 跨工具新興共通格式</a:t>
             </a:r>
           </a:p>
         </p:txBody>
@@ -35254,7 +35254,7 @@
                 </a:solidFill>
                 <a:latin typeface="Microsoft JhengHei"/>
               </a:rPr>
-              <a:t>    Antigravity / Cursor / OpenAI Codex 都認，最值得學</a:t>
+              <a:t>    Antigravity / OpenAI Codex 原生讀；Claude Code / Cursor 需各寫一行 rules 橋接</a:t>
             </a:r>
           </a:p>
         </p:txBody>
@@ -38416,7 +38416,7 @@
                 </a:solidFill>
                 <a:latin typeface="Microsoft JhengHei"/>
               </a:rPr>
-              <a:t>·  AGENTS.md 是業界共識，換工具不換腦袋</a:t>
+              <a:t>·  AGENTS.md 是跨工具共通格式（Codex/Antigravity 原生；Claude/Cursor 可橋接），換工具不換腦袋</a:t>
             </a:r>
           </a:p>
         </p:txBody>
